--- a/apresentacao-adocao.pptx
+++ b/apresentacao-adocao.pptx
@@ -14,11 +14,9 @@
     <p:sldId id="262" r:id="rId8"/>
     <p:sldId id="263" r:id="rId9"/>
     <p:sldId id="264" r:id="rId10"/>
-    <p:sldId id="265" r:id="rId11"/>
-    <p:sldId id="266" r:id="rId12"/>
   </p:sldIdLst>
   <p:notesMasterIdLst>
-    <p:notesMasterId r:id="rId13"/>
+    <p:notesMasterId r:id="rId11"/>
   </p:notesMasterIdLst>
   <p:sldSz cx="12192000" cy="6858000"/>
   <p:notesSz cx="6858000" cy="12192000"/>
@@ -117,39 +115,33 @@
   <p:extLst>
     <p:ext uri="{521415D9-36F7-43E2-AB2F-B90AF26B5E84}">
       <p14:sectionLst xmlns:p14="http://schemas.microsoft.com/office/powerpoint/2010/main">
-        <p14:section name="Abertura" id="{5c66dcd8-6871-daf0-7328-b0b4d9c96b12}">
+        <p14:section name="Abertura" id="{a5b92dae-74d0-66a3-5390-50a6566dd621}">
           <p14:sldIdLst>
             <p14:sldId id="256"/>
           </p14:sldIdLst>
         </p14:section>
-        <p14:section name="Modelagem" id="{931aa7c2-3c4a-6dfd-6ac0-bf07ca4c3231}">
+        <p14:section name="Modelagem" id="{d3a65ae3-e648-5869-3d96-a01113a155bb}">
           <p14:sldIdLst>
             <p14:sldId id="257"/>
             <p14:sldId id="258"/>
             <p14:sldId id="259"/>
           </p14:sldIdLst>
         </p14:section>
-        <p14:section name="Arquitetura" id="{d1777a5e-eebc-bc58-3060-0e7f83ea1ac2}">
+        <p14:section name="Demonstração" id="{234fb57f-489f-31f2-7019-d410f7f98294}">
           <p14:sldIdLst>
             <p14:sldId id="260"/>
             <p14:sldId id="261"/>
           </p14:sldIdLst>
         </p14:section>
-        <p14:section name="Demonstração" id="{04454d05-33cb-1158-1246-50433050ab7f}">
+        <p14:section name="Herança e polimorfismo" id="{5198754f-2f9a-468d-654f-bd0f64c8da0a}">
           <p14:sldIdLst>
             <p14:sldId id="262"/>
             <p14:sldId id="263"/>
           </p14:sldIdLst>
         </p14:section>
-        <p14:section name="Herança e polimorfismo" id="{ba2e2911-3916-8484-628c-0a3d0646c15c}">
+        <p14:section name="Encerramento" id="{85858dc9-fda9-8799-63c1-0e7a45dde666}">
           <p14:sldIdLst>
             <p14:sldId id="264"/>
-            <p14:sldId id="265"/>
-          </p14:sldIdLst>
-        </p14:section>
-        <p14:section name="Encerramento" id="{50a4db98-cf59-6560-5698-f12147490650}">
-          <p14:sldIdLst>
-            <p14:sldId id="266"/>
           </p14:sldIdLst>
         </p14:section>
       </p14:sectionLst>
@@ -598,182 +590,6 @@
 </p:notes>
 </file>
 
-<file path=ppt/notesSlides/notesSlide10.xml><?xml version="1.0" encoding="utf-8"?>
-<p:notes xmlns:a="http://schemas.openxmlformats.org/drawingml/2006/main" xmlns:r="http://schemas.openxmlformats.org/officeDocument/2006/relationships" xmlns:p="http://schemas.openxmlformats.org/presentationml/2006/main">
-  <p:cSld>
-    <p:spTree>
-      <p:nvGrpSpPr>
-        <p:cNvPr id="1" name=""/>
-        <p:cNvGrpSpPr/>
-        <p:nvPr/>
-      </p:nvGrpSpPr>
-      <p:grpSpPr>
-        <a:xfrm>
-          <a:off x="0" y="0"/>
-          <a:ext cx="0" cy="0"/>
-          <a:chOff x="0" y="0"/>
-          <a:chExt cx="0" cy="0"/>
-        </a:xfrm>
-      </p:grpSpPr>
-      <p:sp>
-        <p:nvSpPr>
-          <p:cNvPr id="2" name="Slide Image Placeholder 1"/>
-          <p:cNvSpPr>
-            <a:spLocks noGrp="1" noRot="1" noChangeAspect="1"/>
-          </p:cNvSpPr>
-          <p:nvPr>
-            <p:ph type="sldImg"/>
-          </p:nvPr>
-        </p:nvSpPr>
-        <p:spPr/>
-      </p:sp>
-      <p:sp>
-        <p:nvSpPr>
-          <p:cNvPr id="3" name="Notes Placeholder 2"/>
-          <p:cNvSpPr>
-            <a:spLocks noGrp="1"/>
-          </p:cNvSpPr>
-          <p:nvPr>
-            <p:ph type="body" idx="1"/>
-          </p:nvPr>
-        </p:nvSpPr>
-        <p:spPr/>
-        <p:txBody>
-          <a:bodyPr/>
-          <a:lstStyle/>
-          <a:p>
-            <a:r>
-              <a:rPr lang="en-US" dirty="0"/>
-              <a:t>Pessoa 5. O polimorfismo aparece quando o controller chama mostrar_taxa, descricao ou verificar_adotante sem saber se o animal é cão ou gato: cada classe responde do seu jeito. O dicionário ESPECIES transforma o texto do mock na classe certa, então não precisamos de um if para cada espécie. Para uma quarta espécie, criamos a classe em animal.py, acrescentamos uma linha no dicionário e colocamos os dados no mock. Controller e rotas continuam iguais.</a:t>
-            </a:r>
-            <a:endParaRPr lang="en-US" dirty="0"/>
-          </a:p>
-        </p:txBody>
-      </p:sp>
-      <p:sp>
-        <p:nvSpPr>
-          <p:cNvPr id="4" name="Slide Number Placeholder 3"/>
-          <p:cNvSpPr>
-            <a:spLocks noGrp="1"/>
-          </p:cNvSpPr>
-          <p:nvPr>
-            <p:ph type="sldNum" sz="quarter" idx="10"/>
-          </p:nvPr>
-        </p:nvSpPr>
-        <p:spPr/>
-        <p:txBody>
-          <a:bodyPr/>
-          <a:lstStyle/>
-          <a:p>
-            <a:fld id="{F7021451-1387-4CA6-816F-3879F97B5CBC}" type="slidenum">
-              <a:rPr lang="en-US"/>
-              <a:t>10</a:t>
-            </a:fld>
-            <a:endParaRPr lang="en-US"/>
-          </a:p>
-        </p:txBody>
-      </p:sp>
-    </p:spTree>
-    <p:extLst>
-      <p:ext uri="{BB962C8B-B14F-4D97-AF65-F5344CB8AC3E}">
-        <p14:creationId xmlns:p14="http://schemas.microsoft.com/office/powerpoint/2010/main" val="1024086991"/>
-      </p:ext>
-    </p:extLst>
-  </p:cSld>
-  <p:clrMapOvr>
-    <a:masterClrMapping/>
-  </p:clrMapOvr>
-</p:notes>
-</file>
-
-<file path=ppt/notesSlides/notesSlide11.xml><?xml version="1.0" encoding="utf-8"?>
-<p:notes xmlns:a="http://schemas.openxmlformats.org/drawingml/2006/main" xmlns:r="http://schemas.openxmlformats.org/officeDocument/2006/relationships" xmlns:p="http://schemas.openxmlformats.org/presentationml/2006/main">
-  <p:cSld>
-    <p:spTree>
-      <p:nvGrpSpPr>
-        <p:cNvPr id="1" name=""/>
-        <p:cNvGrpSpPr/>
-        <p:nvPr/>
-      </p:nvGrpSpPr>
-      <p:grpSpPr>
-        <a:xfrm>
-          <a:off x="0" y="0"/>
-          <a:ext cx="0" cy="0"/>
-          <a:chOff x="0" y="0"/>
-          <a:chExt cx="0" cy="0"/>
-        </a:xfrm>
-      </p:grpSpPr>
-      <p:sp>
-        <p:nvSpPr>
-          <p:cNvPr id="2" name="Slide Image Placeholder 1"/>
-          <p:cNvSpPr>
-            <a:spLocks noGrp="1" noRot="1" noChangeAspect="1"/>
-          </p:cNvSpPr>
-          <p:nvPr>
-            <p:ph type="sldImg"/>
-          </p:nvPr>
-        </p:nvSpPr>
-        <p:spPr/>
-      </p:sp>
-      <p:sp>
-        <p:nvSpPr>
-          <p:cNvPr id="3" name="Notes Placeholder 2"/>
-          <p:cNvSpPr>
-            <a:spLocks noGrp="1"/>
-          </p:cNvSpPr>
-          <p:nvPr>
-            <p:ph type="body" idx="1"/>
-          </p:nvPr>
-        </p:nvSpPr>
-        <p:spPr/>
-        <p:txBody>
-          <a:bodyPr/>
-          <a:lstStyle/>
-          <a:p>
-            <a:r>
-              <a:rPr lang="en-US" dirty="0"/>
-              <a:t>Pessoa 5. Para fechar: o verificar.py passa nas 42 checagens e o testar_rotas.py confirma todas as rotas. Obrigado, ficamos à disposição para perguntas.</a:t>
-            </a:r>
-            <a:endParaRPr lang="en-US" dirty="0"/>
-          </a:p>
-        </p:txBody>
-      </p:sp>
-      <p:sp>
-        <p:nvSpPr>
-          <p:cNvPr id="4" name="Slide Number Placeholder 3"/>
-          <p:cNvSpPr>
-            <a:spLocks noGrp="1"/>
-          </p:cNvSpPr>
-          <p:nvPr>
-            <p:ph type="sldNum" sz="quarter" idx="10"/>
-          </p:nvPr>
-        </p:nvSpPr>
-        <p:spPr/>
-        <p:txBody>
-          <a:bodyPr/>
-          <a:lstStyle/>
-          <a:p>
-            <a:fld id="{F7021451-1387-4CA6-816F-3879F97B5CBC}" type="slidenum">
-              <a:rPr lang="en-US"/>
-              <a:t>11</a:t>
-            </a:fld>
-            <a:endParaRPr lang="en-US"/>
-          </a:p>
-        </p:txBody>
-      </p:sp>
-    </p:spTree>
-    <p:extLst>
-      <p:ext uri="{BB962C8B-B14F-4D97-AF65-F5344CB8AC3E}">
-        <p14:creationId xmlns:p14="http://schemas.microsoft.com/office/powerpoint/2010/main" val="1024086991"/>
-      </p:ext>
-    </p:extLst>
-  </p:cSld>
-  <p:clrMapOvr>
-    <a:masterClrMapping/>
-  </p:clrMapOvr>
-</p:notes>
-</file>
-
 <file path=ppt/notesSlides/notesSlide2.xml><?xml version="1.0" encoding="utf-8"?>
 <p:notes xmlns:a="http://schemas.openxmlformats.org/drawingml/2006/main" xmlns:r="http://schemas.openxmlformats.org/officeDocument/2006/relationships" xmlns:p="http://schemas.openxmlformats.org/presentationml/2006/main">
   <p:cSld>
@@ -1084,7 +900,7 @@
           <a:p>
             <a:r>
               <a:rPr lang="en-US" dirty="0"/>
-              <a:t>Pessoa 3. O projeto tem as quatro camadas do KiOferta. Data guarda só os mocks. Models tem as classes e as regras, e não importa nada do FastAPI. O controller executa os casos de uso e, quando não encontra um animal ou adotante, retorna None. Quem transforma isso em 404 é a rota. Se os mocks virassem banco de dados, só mudariam a pasta data e as funções carregar.</a:t>
+              <a:t>Pessoa 3. Agora a API rodando em localhost:8000/docs. A ordem importa, porque cada adoção muda os dados. Primeiro listo os disponíveis e filtro os gatos. Depois registro a adoção da Luna pelo Bruno: 201. Mando o mesmo pedido de novo: 409, porque ela já foi adotada. Tento a adoção do Thor, que é cão grande, pelo Diego, que não tem quintal: 422. A Elisa já tem duas adoções, então o pedido do Bolt dá 409. No fim, o relatório mostra 6 adoções e 390 reais.</a:t>
             </a:r>
             <a:endParaRPr lang="en-US" dirty="0"/>
           </a:p>
@@ -1172,7 +988,7 @@
           <a:p>
             <a:r>
               <a:rPr lang="en-US" dirty="0"/>
-              <a:t>Pessoa 3. Todas as regras ficam na model, com raise. Nenhuma está na rota ou no controller, então valem em qualquer lugar onde o objeto for usado. O construtor chama os métodos alterar_, que validam os dados, então não dá para criar um objeto inválido. Erro de dado é ValueError e vira 422. Conflito com o estado atual é ConflitoError e vira 409. Passo para a Pessoa 4, que vai mostrar a API rodando.</a:t>
+              <a:t>Pessoa 4. Resumindo os códigos: 201 quando a adoção é criada, 404 quando o controller retorna None, 409 quando há conflito com o estado atual e 422 quando uma regra é violada. A conversão para HTTP acontece só na rota, com try e except. Como ConflitoError herda de ValueError, o except dele vem antes; se viesse depois, todo conflito viraria 422. Passo para a Pessoa 5.</a:t>
             </a:r>
             <a:endParaRPr lang="en-US" dirty="0"/>
           </a:p>
@@ -1260,7 +1076,7 @@
           <a:p>
             <a:r>
               <a:rPr lang="en-US" dirty="0"/>
-              <a:t>Pessoa 4. Agora a API rodando em localhost:8000/docs. A ordem importa, porque cada adoção muda os dados. Primeiro listo os disponíveis e filtro os gatos. Depois registro a adoção da Luna pelo Bruno: 201. Mando o mesmo pedido de novo: 409, porque ela já foi adotada. Tento a adoção do Thor, que é cão grande, pelo Diego, que não tem quintal: 422. A Elisa já tem duas adoções, então o pedido do Bolt dá 409. No fim, o relatório mostra 6 adoções e 390 reais.</a:t>
+              <a:t>Pessoa 5. A herança está em animal.py. Cao e Gato herdam de Animal os atributos e as validações comuns. No Cao, verificar_adotante chama primeiro o super, que confere se o animal está disponível e se o adotante ainda pode adotar. Depois vem a regra própria do cão: porte grande exige quintal. Sem o super, essas duas verificações não valeriam para cães, e um cão poderia ser adotado duas vezes.</a:t>
             </a:r>
             <a:endParaRPr lang="en-US" dirty="0"/>
           </a:p>
@@ -1348,7 +1164,7 @@
           <a:p>
             <a:r>
               <a:rPr lang="en-US" dirty="0"/>
-              <a:t>Pessoa 4. Resumindo os códigos: 201 quando a adoção é criada, 404 quando o controller retorna None, 409 quando há conflito com o estado atual e 422 quando uma regra é violada. A conversão para HTTP acontece só na rota, com try e except. Como ConflitoError herda de ValueError, o except dele vem antes; se viesse depois, todo conflito viraria 422. Passo para a Pessoa 5.</a:t>
+              <a:t>Pessoa 5. O polimorfismo aparece quando o controller chama mostrar_taxa, descricao ou verificar_adotante sem saber se o animal é cão ou gato: cada classe responde do seu jeito. O dicionário ESPECIES transforma o texto do mock na classe certa, então não precisamos de um if para cada espécie. Para uma quarta espécie, criamos a classe em animal.py, acrescentamos uma linha no dicionário e colocamos os dados no mock. Controller e rotas continuam iguais.</a:t>
             </a:r>
             <a:endParaRPr lang="en-US" dirty="0"/>
           </a:p>
@@ -1436,7 +1252,7 @@
           <a:p>
             <a:r>
               <a:rPr lang="en-US" dirty="0"/>
-              <a:t>Pessoa 5. A herança está em animal.py. Cao e Gato herdam de Animal os atributos e as validações comuns. No Cao, verificar_adotante chama primeiro o super, que confere se o animal está disponível e se o adotante ainda pode adotar. Depois vem a regra própria do cão: porte grande exige quintal. Sem o super, essas duas verificações não valeriam para cães, e um cão poderia ser adotado duas vezes.</a:t>
+              <a:t>Pessoa 5. Para fechar: o verificar.py passa nas 42 checagens e o testar_rotas.py confirma todas as rotas. Obrigado, ficamos à disposição para perguntas.</a:t>
             </a:r>
             <a:endParaRPr lang="en-US" dirty="0"/>
           </a:p>
@@ -2570,673 +2386,6 @@
 </p:sld>
 </file>
 
-<file path=ppt/slides/slide10.xml><?xml version="1.0" encoding="utf-8"?>
-<p:sld xmlns:a="http://schemas.openxmlformats.org/drawingml/2006/main" xmlns:r="http://schemas.openxmlformats.org/officeDocument/2006/relationships" xmlns:p="http://schemas.openxmlformats.org/presentationml/2006/main">
-  <p:cSld name="Slide 10">
-    <p:spTree>
-      <p:nvGrpSpPr>
-        <p:cNvPr id="1" name=""/>
-        <p:cNvGrpSpPr/>
-        <p:nvPr/>
-      </p:nvGrpSpPr>
-      <p:grpSpPr>
-        <a:xfrm>
-          <a:off x="0" y="0"/>
-          <a:ext cx="0" cy="0"/>
-          <a:chOff x="0" y="0"/>
-          <a:chExt cx="0" cy="0"/>
-        </a:xfrm>
-      </p:grpSpPr>
-      <p:sp>
-        <p:nvSpPr>
-          <p:cNvPr id="2" name="Text 1"/>
-          <p:cNvSpPr/>
-          <p:nvPr>
-            <p:ph idx="101" type="title" hasCustomPrompt="1"/>
-          </p:nvPr>
-        </p:nvSpPr>
-        <p:spPr>
-          <a:xfrm>
-            <a:off x="812800" y="762000"/>
-            <a:ext cx="10566400" cy="635000"/>
-          </a:xfrm>
-          <a:prstGeom prst="rect">
-            <a:avLst/>
-          </a:prstGeom>
-          <a:noFill/>
-          <a:ln/>
-        </p:spPr>
-        <p:txBody>
-          <a:bodyPr wrap="square" lIns="0" tIns="0" rIns="0" bIns="0" rtlCol="0" anchor="t"/>
-          <a:lstStyle/>
-          <a:p>
-            <a:pPr algn="l" indent="0" marL="0">
-              <a:buNone/>
-            </a:pPr>
-            <a:r>
-              <a:rPr lang="en-US" sz="3600" b="1" dirty="0">
-                <a:solidFill>
-                  <a:srgbClr val="1E2A3B"/>
-                </a:solidFill>
-              </a:rPr>
-              <a:t>Polimorfismo</a:t>
-            </a:r>
-            <a:endParaRPr lang="en-US" sz="3600" dirty="0"/>
-          </a:p>
-        </p:txBody>
-      </p:sp>
-      <p:sp>
-        <p:nvSpPr>
-          <p:cNvPr id="3" name="Text 1"/>
-          <p:cNvSpPr/>
-          <p:nvPr>
-            <p:ph idx="102" type="body" hasCustomPrompt="1"/>
-          </p:nvPr>
-        </p:nvSpPr>
-        <p:spPr>
-          <a:xfrm>
-            <a:off x="7569200" y="6197600"/>
-            <a:ext cx="3810000" cy="279400"/>
-          </a:xfrm>
-          <a:prstGeom prst="rect">
-            <a:avLst/>
-          </a:prstGeom>
-          <a:noFill/>
-          <a:ln/>
-        </p:spPr>
-        <p:txBody>
-          <a:bodyPr wrap="square" lIns="0" tIns="0" rIns="0" bIns="0" rtlCol="0" anchor="ctr"/>
-          <a:lstStyle/>
-          <a:p>
-            <a:pPr algn="r" indent="0" marL="0">
-              <a:buNone/>
-            </a:pPr>
-            <a:r>
-              <a:rPr lang="en-US" sz="1200" dirty="0">
-                <a:solidFill>
-                  <a:srgbClr val="667085"/>
-                </a:solidFill>
-              </a:rPr>
-              <a:t>Polimorfismo · 10</a:t>
-            </a:r>
-            <a:endParaRPr lang="en-US" sz="1200" dirty="0"/>
-          </a:p>
-        </p:txBody>
-      </p:sp>
-      <p:sp>
-        <p:nvSpPr>
-          <p:cNvPr id="5" name="anim|1|sobe|62"/>
-          <p:cNvSpPr/>
-          <p:nvPr/>
-        </p:nvSpPr>
-        <p:spPr>
-          <a:xfrm>
-            <a:off x="812800" y="1587500"/>
-            <a:ext cx="5207000" cy="2794000"/>
-          </a:xfrm>
-          <a:prstGeom prst="roundRect">
-            <a:avLst>
-              <a:gd name="adj" fmla="val 4582"/>
-            </a:avLst>
-          </a:prstGeom>
-          <a:solidFill>
-            <a:srgbClr val="F1E7D0"/>
-          </a:solidFill>
-          <a:ln/>
-        </p:spPr>
-        <p:txBody>
-          <a:bodyPr wrap="square" lIns="254000" tIns="330200" rIns="330200" bIns="254000" rtlCol="0" anchor="t"/>
-          <a:lstStyle/>
-          <a:p>
-            <a:pPr indent="0" marL="0">
-              <a:spcAft>
-                <a:spcPts val="1000"/>
-              </a:spcAft>
-              <a:buNone/>
-            </a:pPr>
-            <a:r>
-              <a:rPr lang="en-US" sz="1200" b="1" dirty="0">
-                <a:solidFill>
-                  <a:srgbClr val="8A3B06"/>
-                </a:solidFill>
-              </a:rPr>
-              <a:t>app/models/animal.py</a:t>
-            </a:r>
-            <a:endParaRPr lang="en-US" sz="1200" dirty="0"/>
-          </a:p>
-          <a:p>
-            <a:pPr indent="0" marL="0">
-              <a:lnSpc>
-                <a:spcPct val="125000"/>
-              </a:lnSpc>
-              <a:buNone/>
-            </a:pPr>
-            <a:r>
-              <a:rPr lang="en-US" sz="1200" dirty="0">
-                <a:solidFill>
-                  <a:srgbClr val="1E2A3B"/>
-                </a:solidFill>
-                <a:latin typeface="Consolas" pitchFamily="34" charset="0"/>
-                <a:ea typeface="Consolas" pitchFamily="34" charset="-122"/>
-                <a:cs typeface="Consolas" pitchFamily="34" charset="-120"/>
-              </a:rPr>
-              <a:t>ESPECIES = {</a:t>
-            </a:r>
-            <a:endParaRPr lang="en-US" sz="1200" dirty="0"/>
-          </a:p>
-          <a:p>
-            <a:pPr indent="0" marL="0">
-              <a:lnSpc>
-                <a:spcPct val="125000"/>
-              </a:lnSpc>
-              <a:buNone/>
-            </a:pPr>
-            <a:r>
-              <a:rPr lang="en-US" sz="1200" dirty="0">
-                <a:solidFill>
-                  <a:srgbClr val="1E2A3B"/>
-                </a:solidFill>
-                <a:latin typeface="Consolas" pitchFamily="34" charset="0"/>
-                <a:ea typeface="Consolas" pitchFamily="34" charset="-122"/>
-                <a:cs typeface="Consolas" pitchFamily="34" charset="-120"/>
-              </a:rPr>
-              <a:t>    'cao': Cao,</a:t>
-            </a:r>
-            <a:endParaRPr lang="en-US" sz="1200" dirty="0"/>
-          </a:p>
-          <a:p>
-            <a:pPr indent="0" marL="0">
-              <a:lnSpc>
-                <a:spcPct val="125000"/>
-              </a:lnSpc>
-              <a:buNone/>
-            </a:pPr>
-            <a:r>
-              <a:rPr lang="en-US" sz="1200" dirty="0">
-                <a:solidFill>
-                  <a:srgbClr val="1E2A3B"/>
-                </a:solidFill>
-                <a:latin typeface="Consolas" pitchFamily="34" charset="0"/>
-                <a:ea typeface="Consolas" pitchFamily="34" charset="-122"/>
-                <a:cs typeface="Consolas" pitchFamily="34" charset="-120"/>
-              </a:rPr>
-              <a:t>    'gato': Gato,</a:t>
-            </a:r>
-            <a:endParaRPr lang="en-US" sz="1200" dirty="0"/>
-          </a:p>
-          <a:p>
-            <a:pPr indent="0" marL="0">
-              <a:lnSpc>
-                <a:spcPct val="125000"/>
-              </a:lnSpc>
-              <a:buNone/>
-            </a:pPr>
-            <a:r>
-              <a:rPr lang="en-US" sz="1200" dirty="0">
-                <a:solidFill>
-                  <a:srgbClr val="1E2A3B"/>
-                </a:solidFill>
-                <a:latin typeface="Consolas" pitchFamily="34" charset="0"/>
-                <a:ea typeface="Consolas" pitchFamily="34" charset="-122"/>
-                <a:cs typeface="Consolas" pitchFamily="34" charset="-120"/>
-              </a:rPr>
-              <a:t>}</a:t>
-            </a:r>
-            <a:endParaRPr lang="en-US" sz="1200" dirty="0"/>
-          </a:p>
-          <a:p>
-            <a:pPr indent="0" marL="0">
-              <a:lnSpc>
-                <a:spcPct val="125000"/>
-              </a:lnSpc>
-              <a:buNone/>
-            </a:pPr>
-            <a:r>
-              <a:rPr lang="en-US" sz="1200" dirty="0">
-                <a:solidFill>
-                  <a:srgbClr val="1E2A3B"/>
-                </a:solidFill>
-                <a:latin typeface="Consolas" pitchFamily="34" charset="0"/>
-                <a:ea typeface="Consolas" pitchFamily="34" charset="-122"/>
-                <a:cs typeface="Consolas" pitchFamily="34" charset="-120"/>
-              </a:rPr>
-              <a:t>classe = ESPECIES[a['especie']]</a:t>
-            </a:r>
-            <a:endParaRPr lang="en-US" sz="1200" dirty="0"/>
-          </a:p>
-          <a:p>
-            <a:pPr indent="0" marL="0">
-              <a:lnSpc>
-                <a:spcPct val="125000"/>
-              </a:lnSpc>
-              <a:buNone/>
-            </a:pPr>
-            <a:r>
-              <a:rPr lang="en-US" sz="1200" dirty="0">
-                <a:solidFill>
-                  <a:srgbClr val="1E2A3B"/>
-                </a:solidFill>
-                <a:latin typeface="Consolas" pitchFamily="34" charset="0"/>
-                <a:ea typeface="Consolas" pitchFamily="34" charset="-122"/>
-                <a:cs typeface="Consolas" pitchFamily="34" charset="-120"/>
-              </a:rPr>
-              <a:t>animal = classe(...)</a:t>
-            </a:r>
-            <a:endParaRPr lang="en-US" sz="1200" dirty="0"/>
-          </a:p>
-          <a:p>
-            <a:pPr indent="0" marL="0">
-              <a:lnSpc>
-                <a:spcPct val="125000"/>
-              </a:lnSpc>
-              <a:buNone/>
-            </a:pPr>
-            <a:r>
-              <a:rPr lang="en-US" sz="1200" dirty="0">
-                <a:solidFill>
-                  <a:srgbClr val="1E2A3B"/>
-                </a:solidFill>
-                <a:latin typeface="Consolas" pitchFamily="34" charset="0"/>
-                <a:ea typeface="Consolas" pitchFamily="34" charset="-122"/>
-                <a:cs typeface="Consolas" pitchFamily="34" charset="-120"/>
-              </a:rPr>
-              <a:t>animal.mostrar_taxa()</a:t>
-            </a:r>
-            <a:endParaRPr lang="en-US" sz="1200" dirty="0"/>
-          </a:p>
-          <a:p>
-            <a:pPr indent="0" marL="0">
-              <a:lnSpc>
-                <a:spcPct val="125000"/>
-              </a:lnSpc>
-              <a:buNone/>
-            </a:pPr>
-            <a:r>
-              <a:rPr lang="en-US" sz="1200" dirty="0">
-                <a:solidFill>
-                  <a:srgbClr val="5B6474"/>
-                </a:solidFill>
-                <a:latin typeface="Consolas" pitchFamily="34" charset="0"/>
-                <a:ea typeface="Consolas" pitchFamily="34" charset="-122"/>
-                <a:cs typeface="Consolas" pitchFamily="34" charset="-120"/>
-              </a:rPr>
-              <a:t># 80.0 para Cao, 50.0 para Gato</a:t>
-            </a:r>
-            <a:endParaRPr lang="en-US" sz="1200" dirty="0"/>
-          </a:p>
-        </p:txBody>
-      </p:sp>
-      <p:sp>
-        <p:nvSpPr>
-          <p:cNvPr id="6" name="anim|2|sobe|63"/>
-          <p:cNvSpPr/>
-          <p:nvPr/>
-        </p:nvSpPr>
-        <p:spPr>
-          <a:xfrm>
-            <a:off x="6223000" y="1587500"/>
-            <a:ext cx="5156200" cy="2794000"/>
-          </a:xfrm>
-          <a:prstGeom prst="roundRect">
-            <a:avLst>
-              <a:gd name="adj" fmla="val 4582"/>
-            </a:avLst>
-          </a:prstGeom>
-          <a:solidFill>
-            <a:srgbClr val="FFFDF8"/>
-          </a:solidFill>
-          <a:ln w="12700">
-            <a:solidFill>
-              <a:srgbClr val="E8DCC0"/>
-            </a:solidFill>
-          </a:ln>
-        </p:spPr>
-        <p:txBody>
-          <a:bodyPr wrap="square" lIns="254000" tIns="330200" rIns="330200" bIns="254000" rtlCol="0" anchor="t"/>
-          <a:lstStyle/>
-          <a:p>
-            <a:pPr indent="0" marL="0">
-              <a:spcAft>
-                <a:spcPts val="1000"/>
-              </a:spcAft>
-              <a:buNone/>
-            </a:pPr>
-            <a:r>
-              <a:rPr lang="en-US" sz="1200" b="1" dirty="0">
-                <a:solidFill>
-                  <a:srgbClr val="B45309"/>
-                </a:solidFill>
-              </a:rPr>
-              <a:t>Sem polimorfismo, teria um if por espécie:</a:t>
-            </a:r>
-            <a:endParaRPr lang="en-US" sz="1200" dirty="0"/>
-          </a:p>
-          <a:p>
-            <a:pPr indent="0" marL="0">
-              <a:lnSpc>
-                <a:spcPct val="125000"/>
-              </a:lnSpc>
-              <a:buNone/>
-            </a:pPr>
-            <a:r>
-              <a:rPr lang="en-US" sz="1200" dirty="0">
-                <a:solidFill>
-                  <a:srgbClr val="667085"/>
-                </a:solidFill>
-                <a:latin typeface="Consolas" pitchFamily="34" charset="0"/>
-                <a:ea typeface="Consolas" pitchFamily="34" charset="-122"/>
-                <a:cs typeface="Consolas" pitchFamily="34" charset="-120"/>
-              </a:rPr>
-              <a:t>if especie == 'cao':</a:t>
-            </a:r>
-            <a:endParaRPr lang="en-US" sz="1200" dirty="0"/>
-          </a:p>
-          <a:p>
-            <a:pPr indent="0" marL="0">
-              <a:lnSpc>
-                <a:spcPct val="125000"/>
-              </a:lnSpc>
-              <a:buNone/>
-            </a:pPr>
-            <a:r>
-              <a:rPr lang="en-US" sz="1200" dirty="0">
-                <a:solidFill>
-                  <a:srgbClr val="667085"/>
-                </a:solidFill>
-                <a:latin typeface="Consolas" pitchFamily="34" charset="0"/>
-                <a:ea typeface="Consolas" pitchFamily="34" charset="-122"/>
-                <a:cs typeface="Consolas" pitchFamily="34" charset="-120"/>
-              </a:rPr>
-              <a:t>    taxa = 80</a:t>
-            </a:r>
-            <a:endParaRPr lang="en-US" sz="1200" dirty="0"/>
-          </a:p>
-          <a:p>
-            <a:pPr indent="0" marL="0">
-              <a:lnSpc>
-                <a:spcPct val="125000"/>
-              </a:lnSpc>
-              <a:buNone/>
-            </a:pPr>
-            <a:r>
-              <a:rPr lang="en-US" sz="1200" dirty="0">
-                <a:solidFill>
-                  <a:srgbClr val="667085"/>
-                </a:solidFill>
-                <a:latin typeface="Consolas" pitchFamily="34" charset="0"/>
-                <a:ea typeface="Consolas" pitchFamily="34" charset="-122"/>
-                <a:cs typeface="Consolas" pitchFamily="34" charset="-120"/>
-              </a:rPr>
-              <a:t>else:</a:t>
-            </a:r>
-            <a:endParaRPr lang="en-US" sz="1200" dirty="0"/>
-          </a:p>
-          <a:p>
-            <a:pPr indent="0" marL="0">
-              <a:lnSpc>
-                <a:spcPct val="125000"/>
-              </a:lnSpc>
-              <a:spcAft>
-                <a:spcPts val="1400"/>
-              </a:spcAft>
-              <a:buNone/>
-            </a:pPr>
-            <a:r>
-              <a:rPr lang="en-US" sz="1200" dirty="0">
-                <a:solidFill>
-                  <a:srgbClr val="667085"/>
-                </a:solidFill>
-                <a:latin typeface="Consolas" pitchFamily="34" charset="0"/>
-                <a:ea typeface="Consolas" pitchFamily="34" charset="-122"/>
-                <a:cs typeface="Consolas" pitchFamily="34" charset="-120"/>
-              </a:rPr>
-              <a:t>    taxa = 50</a:t>
-            </a:r>
-            <a:endParaRPr lang="en-US" sz="1200" dirty="0"/>
-          </a:p>
-          <a:p>
-            <a:pPr indent="0" marL="0">
-              <a:buNone/>
-            </a:pPr>
-            <a:r>
-              <a:rPr lang="en-US" sz="1600" dirty="0">
-                <a:solidFill>
-                  <a:srgbClr val="1E2A3B"/>
-                </a:solidFill>
-              </a:rPr>
-              <a:t>Para uma nova espécie, basta criar a classe em animal.py e incluir os dados no mock.</a:t>
-            </a:r>
-            <a:endParaRPr lang="en-US" sz="1200" dirty="0"/>
-          </a:p>
-        </p:txBody>
-      </p:sp>
-      <p:sp>
-        <p:nvSpPr>
-          <p:cNvPr id="7" name="anim|3|sobe|64"/>
-          <p:cNvSpPr txBox="1"/>
-          <p:nvPr/>
-        </p:nvSpPr>
-        <p:spPr>
-          <a:xfrm>
-            <a:off x="812800" y="4699000"/>
-            <a:ext cx="10566400" cy="571500"/>
-          </a:xfrm>
-          <a:prstGeom prst="rect">
-            <a:avLst/>
-          </a:prstGeom>
-          <a:noFill/>
-          <a:ln/>
-        </p:spPr>
-        <p:txBody>
-          <a:bodyPr wrap="square" lIns="0" tIns="0" rIns="0" bIns="0" rtlCol="0" anchor="t"/>
-          <a:lstStyle/>
-          <a:p>
-            <a:pPr indent="0" marL="0">
-              <a:buNone/>
-            </a:pPr>
-            <a:r>
-              <a:rPr lang="en-US" sz="1600" dirty="0">
-                <a:solidFill>
-                  <a:srgbClr val="4A5568"/>
-                </a:solidFill>
-              </a:rPr>
-              <a:t>O projeto não tem nenhum if comparando tipo ou nome de classe, e o </a:t>
-            </a:r>
-            <a:pPr indent="0" marL="0">
-              <a:buNone/>
-            </a:pPr>
-            <a:r>
-              <a:rPr lang="en-US" sz="1600" b="1" dirty="0">
-                <a:solidFill>
-                  <a:srgbClr val="4A5568"/>
-                </a:solidFill>
-              </a:rPr>
-              <a:t>verificar.py</a:t>
-            </a:r>
-            <a:pPr indent="0" marL="0">
-              <a:buNone/>
-            </a:pPr>
-            <a:r>
-              <a:rPr lang="en-US" sz="1600" dirty="0">
-                <a:solidFill>
-                  <a:srgbClr val="4A5568"/>
-                </a:solidFill>
-              </a:rPr>
-              <a:t> confere isso.</a:t>
-            </a:r>
-            <a:endParaRPr lang="en-US" sz="1600" dirty="0"/>
-          </a:p>
-        </p:txBody>
-      </p:sp>
-    </p:spTree>
-  </p:cSld>
-  <p:clrMapOvr>
-    <a:masterClrMapping/>
-  </p:clrMapOvr>
-</p:sld>
-</file>
-
-<file path=ppt/slides/slide11.xml><?xml version="1.0" encoding="utf-8"?>
-<p:sld xmlns:a="http://schemas.openxmlformats.org/drawingml/2006/main" xmlns:r="http://schemas.openxmlformats.org/officeDocument/2006/relationships" xmlns:p="http://schemas.openxmlformats.org/presentationml/2006/main">
-  <p:cSld name="Slide 11">
-    <p:spTree>
-      <p:nvGrpSpPr>
-        <p:cNvPr id="1" name=""/>
-        <p:cNvGrpSpPr/>
-        <p:nvPr/>
-      </p:nvGrpSpPr>
-      <p:grpSpPr>
-        <a:xfrm>
-          <a:off x="0" y="0"/>
-          <a:ext cx="0" cy="0"/>
-          <a:chOff x="0" y="0"/>
-          <a:chExt cx="0" cy="0"/>
-        </a:xfrm>
-      </p:grpSpPr>
-      <p:sp>
-        <p:nvSpPr>
-          <p:cNvPr id="2" name="Text 1"/>
-          <p:cNvSpPr/>
-          <p:nvPr>
-            <p:ph idx="101" type="title" hasCustomPrompt="1"/>
-          </p:nvPr>
-        </p:nvSpPr>
-        <p:spPr>
-          <a:xfrm>
-            <a:off x="812800" y="2413000"/>
-            <a:ext cx="6604000" cy="952500"/>
-          </a:xfrm>
-          <a:prstGeom prst="rect">
-            <a:avLst/>
-          </a:prstGeom>
-          <a:noFill/>
-          <a:ln/>
-        </p:spPr>
-        <p:txBody>
-          <a:bodyPr wrap="square" lIns="0" tIns="0" rIns="0" bIns="0" rtlCol="0" anchor="t"/>
-          <a:lstStyle/>
-          <a:p>
-            <a:pPr algn="l" indent="0" marL="0">
-              <a:buNone/>
-            </a:pPr>
-            <a:r>
-              <a:rPr lang="en-US" sz="6000" b="1" dirty="0">
-                <a:solidFill>
-                  <a:srgbClr val="1E2A3B"/>
-                </a:solidFill>
-              </a:rPr>
-              <a:t>Obrigado</a:t>
-            </a:r>
-            <a:endParaRPr lang="en-US" sz="6000" dirty="0"/>
-          </a:p>
-        </p:txBody>
-      </p:sp>
-      <p:sp>
-        <p:nvSpPr>
-          <p:cNvPr id="3" name="Text 1"/>
-          <p:cNvSpPr/>
-          <p:nvPr>
-            <p:ph idx="102" type="body" hasCustomPrompt="1"/>
-          </p:nvPr>
-        </p:nvSpPr>
-        <p:spPr>
-          <a:xfrm>
-            <a:off x="7569200" y="6197600"/>
-            <a:ext cx="3810000" cy="279400"/>
-          </a:xfrm>
-          <a:prstGeom prst="rect">
-            <a:avLst/>
-          </a:prstGeom>
-          <a:noFill/>
-          <a:ln/>
-        </p:spPr>
-        <p:txBody>
-          <a:bodyPr wrap="square" lIns="0" tIns="0" rIns="0" bIns="0" rtlCol="0" anchor="ctr"/>
-          <a:lstStyle/>
-          <a:p>
-            <a:pPr algn="r" indent="0" marL="0">
-              <a:buNone/>
-            </a:pPr>
-            <a:r>
-              <a:rPr lang="en-US" sz="1200" dirty="0">
-                <a:solidFill>
-                  <a:srgbClr val="5C4A12"/>
-                </a:solidFill>
-              </a:rPr>
-              <a:t>Encerramento · 11</a:t>
-            </a:r>
-            <a:endParaRPr lang="en-US" sz="1200" dirty="0"/>
-          </a:p>
-        </p:txBody>
-      </p:sp>
-      <p:sp>
-        <p:nvSpPr>
-          <p:cNvPr id="5" name="anim|1|sobe|65"/>
-          <p:cNvSpPr txBox="1"/>
-          <p:nvPr/>
-        </p:nvSpPr>
-        <p:spPr>
-          <a:xfrm>
-            <a:off x="812800" y="3429000"/>
-            <a:ext cx="6604000" cy="635000"/>
-          </a:xfrm>
-          <a:prstGeom prst="rect">
-            <a:avLst/>
-          </a:prstGeom>
-          <a:noFill/>
-          <a:ln/>
-        </p:spPr>
-        <p:txBody>
-          <a:bodyPr wrap="square" lIns="0" tIns="0" rIns="0" bIns="0" rtlCol="0" anchor="t"/>
-          <a:lstStyle/>
-          <a:p>
-            <a:pPr indent="0" marL="0">
-              <a:buNone/>
-            </a:pPr>
-            <a:r>
-              <a:rPr lang="en-US" sz="3600" b="1" dirty="0">
-                <a:solidFill>
-                  <a:srgbClr val="1E2A3B"/>
-                </a:solidFill>
-              </a:rPr>
-              <a:t>Perguntas?</a:t>
-            </a:r>
-            <a:endParaRPr lang="en-US" sz="3600" dirty="0"/>
-          </a:p>
-        </p:txBody>
-      </p:sp>
-      <p:pic>
-        <p:nvPicPr>
-          <p:cNvPr id="6" name="anim|2|zoom|66" descr="Rover, o cachorro amarelo, lendo um livro vermelho">    </p:cNvPr>
-          <p:cNvPicPr>
-            <a:picLocks noChangeAspect="1"/>
-          </p:cNvPicPr>
-          <p:nvPr/>
-        </p:nvPicPr>
-        <p:blipFill>
-          <a:blip r:embed="rId1"/>
-          <a:stretch>
-            <a:fillRect/>
-          </a:stretch>
-        </p:blipFill>
-        <p:spPr>
-          <a:xfrm>
-            <a:off x="7937500" y="1574800"/>
-            <a:ext cx="3048000" cy="3327400"/>
-          </a:xfrm>
-          <a:prstGeom prst="rect">
-            <a:avLst/>
-          </a:prstGeom>
-        </p:spPr>
-      </p:pic>
-    </p:spTree>
-  </p:cSld>
-  <p:clrMapOvr>
-    <a:masterClrMapping/>
-  </p:clrMapOvr>
-</p:sld>
-</file>
-
 <file path=ppt/slides/slide2.xml><?xml version="1.0" encoding="utf-8"?>
 <p:sld xmlns:a="http://schemas.openxmlformats.org/drawingml/2006/main" xmlns:r="http://schemas.openxmlformats.org/officeDocument/2006/relationships" xmlns:p="http://schemas.openxmlformats.org/presentationml/2006/main">
   <p:cSld name="Slide 2">
@@ -5601,7 +4750,7 @@
                   <a:srgbClr val="1E2A3B"/>
                 </a:solidFill>
               </a:rPr>
-              <a:t>Camadas</a:t>
+              <a:t>Demonstração no /docs</a:t>
             </a:r>
             <a:endParaRPr lang="en-US" sz="3600" dirty="0"/>
           </a:p>
@@ -5639,584 +4788,7 @@
                   <a:srgbClr val="667085"/>
                 </a:solidFill>
               </a:rPr>
-              <a:t>Camadas · 05</a:t>
-            </a:r>
-            <a:endParaRPr lang="en-US" sz="1200" dirty="0"/>
-          </a:p>
-        </p:txBody>
-      </p:sp>
-      <p:sp>
-        <p:nvSpPr>
-          <p:cNvPr id="5" name="anim|1|sobe|40"/>
-          <p:cNvSpPr/>
-          <p:nvPr/>
-        </p:nvSpPr>
-        <p:spPr>
-          <a:xfrm>
-            <a:off x="812800" y="1905000"/>
-            <a:ext cx="2298700" cy="2349500"/>
-          </a:xfrm>
-          <a:prstGeom prst="roundRect">
-            <a:avLst>
-              <a:gd name="adj" fmla="val 5569"/>
-            </a:avLst>
-          </a:prstGeom>
-          <a:solidFill>
-            <a:srgbClr val="FFFDF8"/>
-          </a:solidFill>
-          <a:ln w="12700">
-            <a:solidFill>
-              <a:srgbClr val="E8DCC0"/>
-            </a:solidFill>
-          </a:ln>
-        </p:spPr>
-        <p:txBody>
-          <a:bodyPr wrap="square" lIns="254000" tIns="254000" rIns="254000" bIns="254000" rtlCol="0" anchor="t"/>
-          <a:lstStyle/>
-          <a:p>
-            <a:pPr indent="0" marL="0">
-              <a:spcAft>
-                <a:spcPts val="800"/>
-              </a:spcAft>
-              <a:buNone/>
-            </a:pPr>
-            <a:r>
-              <a:rPr lang="en-US" sz="1200" dirty="0">
-                <a:solidFill>
-                  <a:srgbClr val="B45309"/>
-                </a:solidFill>
-                <a:latin typeface="Consolas" pitchFamily="34" charset="0"/>
-                <a:ea typeface="Consolas" pitchFamily="34" charset="-122"/>
-                <a:cs typeface="Consolas" pitchFamily="34" charset="-120"/>
-              </a:rPr>
-              <a:t>app/data</a:t>
-            </a:r>
-            <a:endParaRPr lang="en-US" sz="1200" dirty="0"/>
-          </a:p>
-          <a:p>
-            <a:pPr indent="0" marL="0">
-              <a:spcAft>
-                <a:spcPts val="800"/>
-              </a:spcAft>
-              <a:buNone/>
-            </a:pPr>
-            <a:r>
-              <a:rPr lang="en-US" sz="2200" b="1" dirty="0">
-                <a:solidFill>
-                  <a:srgbClr val="1E2A3B"/>
-                </a:solidFill>
-              </a:rPr>
-              <a:t>Data</a:t>
-            </a:r>
-            <a:endParaRPr lang="en-US" sz="1200" dirty="0"/>
-          </a:p>
-          <a:p>
-            <a:pPr indent="0" marL="0">
-              <a:buNone/>
-            </a:pPr>
-            <a:r>
-              <a:rPr lang="en-US" sz="1600" dirty="0">
-                <a:solidFill>
-                  <a:srgbClr val="4A5568"/>
-                </a:solidFill>
-              </a:rPr>
-              <a:t>Mocks com listas de dicionários.</a:t>
-            </a:r>
-            <a:endParaRPr lang="en-US" sz="1200" dirty="0"/>
-          </a:p>
-        </p:txBody>
-      </p:sp>
-      <p:sp>
-        <p:nvSpPr>
-          <p:cNvPr id="6" name="anim|2|traco-dir|41"/>
-          <p:cNvSpPr/>
-          <p:nvPr/>
-        </p:nvSpPr>
-        <p:spPr>
-          <a:xfrm>
-            <a:off x="3187700" y="3079750"/>
-            <a:ext cx="304800" cy="0"/>
-          </a:xfrm>
-          <a:prstGeom prst="line">
-            <a:avLst/>
-          </a:prstGeom>
-          <a:noFill/>
-          <a:ln w="38100">
-            <a:solidFill>
-              <a:srgbClr val="B45309"/>
-            </a:solidFill>
-            <a:prstDash val="solid"/>
-            <a:tailEnd type="triangle"/>
-          </a:ln>
-        </p:spPr>
-      </p:sp>
-      <p:sp>
-        <p:nvSpPr>
-          <p:cNvPr id="7" name="anim|3|sobe|42"/>
-          <p:cNvSpPr/>
-          <p:nvPr/>
-        </p:nvSpPr>
-        <p:spPr>
-          <a:xfrm>
-            <a:off x="3568700" y="1905000"/>
-            <a:ext cx="2298700" cy="2349500"/>
-          </a:xfrm>
-          <a:prstGeom prst="roundRect">
-            <a:avLst>
-              <a:gd name="adj" fmla="val 5569"/>
-            </a:avLst>
-          </a:prstGeom>
-          <a:solidFill>
-            <a:srgbClr val="FDE7B0"/>
-          </a:solidFill>
-          <a:ln w="12700">
-            <a:solidFill>
-              <a:srgbClr val="F2C25B"/>
-            </a:solidFill>
-          </a:ln>
-        </p:spPr>
-        <p:txBody>
-          <a:bodyPr wrap="square" lIns="254000" tIns="254000" rIns="254000" bIns="254000" rtlCol="0" anchor="t"/>
-          <a:lstStyle/>
-          <a:p>
-            <a:pPr indent="0" marL="0">
-              <a:spcAft>
-                <a:spcPts val="800"/>
-              </a:spcAft>
-              <a:buNone/>
-            </a:pPr>
-            <a:r>
-              <a:rPr lang="en-US" sz="1200" dirty="0">
-                <a:solidFill>
-                  <a:srgbClr val="8A3B06"/>
-                </a:solidFill>
-                <a:latin typeface="Consolas" pitchFamily="34" charset="0"/>
-                <a:ea typeface="Consolas" pitchFamily="34" charset="-122"/>
-                <a:cs typeface="Consolas" pitchFamily="34" charset="-120"/>
-              </a:rPr>
-              <a:t>app/models</a:t>
-            </a:r>
-            <a:endParaRPr lang="en-US" sz="1200" dirty="0"/>
-          </a:p>
-          <a:p>
-            <a:pPr indent="0" marL="0">
-              <a:spcAft>
-                <a:spcPts val="800"/>
-              </a:spcAft>
-              <a:buNone/>
-            </a:pPr>
-            <a:r>
-              <a:rPr lang="en-US" sz="2200" b="1" dirty="0">
-                <a:solidFill>
-                  <a:srgbClr val="1E2A3B"/>
-                </a:solidFill>
-              </a:rPr>
-              <a:t>Models</a:t>
-            </a:r>
-            <a:endParaRPr lang="en-US" sz="1200" dirty="0"/>
-          </a:p>
-          <a:p>
-            <a:pPr indent="0" marL="0">
-              <a:buNone/>
-            </a:pPr>
-            <a:r>
-              <a:rPr lang="en-US" sz="1600" dirty="0">
-                <a:solidFill>
-                  <a:srgbClr val="3D3424"/>
-                </a:solidFill>
-              </a:rPr>
-              <a:t>Classes e regras de negócio. Não importam o FastAPI.</a:t>
-            </a:r>
-            <a:endParaRPr lang="en-US" sz="1200" dirty="0"/>
-          </a:p>
-        </p:txBody>
-      </p:sp>
-      <p:sp>
-        <p:nvSpPr>
-          <p:cNvPr id="8" name="anim|4|traco-dir|43"/>
-          <p:cNvSpPr/>
-          <p:nvPr/>
-        </p:nvSpPr>
-        <p:spPr>
-          <a:xfrm>
-            <a:off x="5943600" y="3079750"/>
-            <a:ext cx="304800" cy="0"/>
-          </a:xfrm>
-          <a:prstGeom prst="line">
-            <a:avLst/>
-          </a:prstGeom>
-          <a:noFill/>
-          <a:ln w="38100">
-            <a:solidFill>
-              <a:srgbClr val="B45309"/>
-            </a:solidFill>
-            <a:prstDash val="solid"/>
-            <a:tailEnd type="triangle"/>
-          </a:ln>
-        </p:spPr>
-      </p:sp>
-      <p:sp>
-        <p:nvSpPr>
-          <p:cNvPr id="9" name="anim|5|sobe|44"/>
-          <p:cNvSpPr/>
-          <p:nvPr/>
-        </p:nvSpPr>
-        <p:spPr>
-          <a:xfrm>
-            <a:off x="6324600" y="1905000"/>
-            <a:ext cx="2298700" cy="2349500"/>
-          </a:xfrm>
-          <a:prstGeom prst="roundRect">
-            <a:avLst>
-              <a:gd name="adj" fmla="val 5569"/>
-            </a:avLst>
-          </a:prstGeom>
-          <a:solidFill>
-            <a:srgbClr val="FFFDF8"/>
-          </a:solidFill>
-          <a:ln w="12700">
-            <a:solidFill>
-              <a:srgbClr val="E8DCC0"/>
-            </a:solidFill>
-          </a:ln>
-        </p:spPr>
-        <p:txBody>
-          <a:bodyPr wrap="square" lIns="254000" tIns="254000" rIns="254000" bIns="254000" rtlCol="0" anchor="t"/>
-          <a:lstStyle/>
-          <a:p>
-            <a:pPr indent="0" marL="0">
-              <a:spcAft>
-                <a:spcPts val="800"/>
-              </a:spcAft>
-              <a:buNone/>
-            </a:pPr>
-            <a:r>
-              <a:rPr lang="en-US" sz="1200" dirty="0">
-                <a:solidFill>
-                  <a:srgbClr val="B45309"/>
-                </a:solidFill>
-                <a:latin typeface="Consolas" pitchFamily="34" charset="0"/>
-                <a:ea typeface="Consolas" pitchFamily="34" charset="-122"/>
-                <a:cs typeface="Consolas" pitchFamily="34" charset="-120"/>
-              </a:rPr>
-              <a:t>app/controllers</a:t>
-            </a:r>
-            <a:endParaRPr lang="en-US" sz="1200" dirty="0"/>
-          </a:p>
-          <a:p>
-            <a:pPr indent="0" marL="0">
-              <a:spcAft>
-                <a:spcPts val="800"/>
-              </a:spcAft>
-              <a:buNone/>
-            </a:pPr>
-            <a:r>
-              <a:rPr lang="en-US" sz="2200" b="1" dirty="0">
-                <a:solidFill>
-                  <a:srgbClr val="1E2A3B"/>
-                </a:solidFill>
-              </a:rPr>
-              <a:t>Controllers</a:t>
-            </a:r>
-            <a:endParaRPr lang="en-US" sz="1200" dirty="0"/>
-          </a:p>
-          <a:p>
-            <a:pPr indent="0" marL="0">
-              <a:buNone/>
-            </a:pPr>
-            <a:r>
-              <a:rPr lang="en-US" sz="1600" dirty="0">
-                <a:solidFill>
-                  <a:srgbClr val="4A5568"/>
-                </a:solidFill>
-              </a:rPr>
-              <a:t>Casos de uso. Retornam None quando não encontram.</a:t>
-            </a:r>
-            <a:endParaRPr lang="en-US" sz="1200" dirty="0"/>
-          </a:p>
-        </p:txBody>
-      </p:sp>
-      <p:sp>
-        <p:nvSpPr>
-          <p:cNvPr id="10" name="anim|6|traco-dir|45"/>
-          <p:cNvSpPr/>
-          <p:nvPr/>
-        </p:nvSpPr>
-        <p:spPr>
-          <a:xfrm>
-            <a:off x="8699500" y="3079750"/>
-            <a:ext cx="304800" cy="0"/>
-          </a:xfrm>
-          <a:prstGeom prst="line">
-            <a:avLst/>
-          </a:prstGeom>
-          <a:noFill/>
-          <a:ln w="38100">
-            <a:solidFill>
-              <a:srgbClr val="B45309"/>
-            </a:solidFill>
-            <a:prstDash val="solid"/>
-            <a:tailEnd type="triangle"/>
-          </a:ln>
-        </p:spPr>
-      </p:sp>
-      <p:sp>
-        <p:nvSpPr>
-          <p:cNvPr id="11" name="anim|7|sobe|46"/>
-          <p:cNvSpPr/>
-          <p:nvPr/>
-        </p:nvSpPr>
-        <p:spPr>
-          <a:xfrm>
-            <a:off x="9080500" y="1905000"/>
-            <a:ext cx="2298700" cy="2349500"/>
-          </a:xfrm>
-          <a:prstGeom prst="roundRect">
-            <a:avLst>
-              <a:gd name="adj" fmla="val 5569"/>
-            </a:avLst>
-          </a:prstGeom>
-          <a:solidFill>
-            <a:srgbClr val="FFFDF8"/>
-          </a:solidFill>
-          <a:ln w="12700">
-            <a:solidFill>
-              <a:srgbClr val="E8DCC0"/>
-            </a:solidFill>
-          </a:ln>
-        </p:spPr>
-        <p:txBody>
-          <a:bodyPr wrap="square" lIns="254000" tIns="254000" rIns="254000" bIns="254000" rtlCol="0" anchor="t"/>
-          <a:lstStyle/>
-          <a:p>
-            <a:pPr indent="0" marL="0">
-              <a:spcAft>
-                <a:spcPts val="800"/>
-              </a:spcAft>
-              <a:buNone/>
-            </a:pPr>
-            <a:r>
-              <a:rPr lang="en-US" sz="1200" dirty="0">
-                <a:solidFill>
-                  <a:srgbClr val="B45309"/>
-                </a:solidFill>
-                <a:latin typeface="Consolas" pitchFamily="34" charset="0"/>
-                <a:ea typeface="Consolas" pitchFamily="34" charset="-122"/>
-                <a:cs typeface="Consolas" pitchFamily="34" charset="-120"/>
-              </a:rPr>
-              <a:t>app/routes</a:t>
-            </a:r>
-            <a:endParaRPr lang="en-US" sz="1200" dirty="0"/>
-          </a:p>
-          <a:p>
-            <a:pPr indent="0" marL="0">
-              <a:spcAft>
-                <a:spcPts val="800"/>
-              </a:spcAft>
-              <a:buNone/>
-            </a:pPr>
-            <a:r>
-              <a:rPr lang="en-US" sz="2200" b="1" dirty="0">
-                <a:solidFill>
-                  <a:srgbClr val="1E2A3B"/>
-                </a:solidFill>
-              </a:rPr>
-              <a:t>Routes</a:t>
-            </a:r>
-            <a:endParaRPr lang="en-US" sz="1200" dirty="0"/>
-          </a:p>
-          <a:p>
-            <a:pPr indent="0" marL="0">
-              <a:buNone/>
-            </a:pPr>
-            <a:r>
-              <a:rPr lang="en-US" sz="1600" dirty="0">
-                <a:solidFill>
-                  <a:srgbClr val="4A5568"/>
-                </a:solidFill>
-              </a:rPr>
-              <a:t>Rotas e códigos HTTP.</a:t>
-            </a:r>
-            <a:endParaRPr lang="en-US" sz="1200" dirty="0"/>
-          </a:p>
-        </p:txBody>
-      </p:sp>
-      <p:sp>
-        <p:nvSpPr>
-          <p:cNvPr id="12" name="anim|8|sobe|47"/>
-          <p:cNvSpPr txBox="1"/>
-          <p:nvPr/>
-        </p:nvSpPr>
-        <p:spPr>
-          <a:xfrm>
-            <a:off x="812800" y="4635500"/>
-            <a:ext cx="10566400" cy="635000"/>
-          </a:xfrm>
-          <a:prstGeom prst="rect">
-            <a:avLst/>
-          </a:prstGeom>
-          <a:noFill/>
-          <a:ln/>
-        </p:spPr>
-        <p:txBody>
-          <a:bodyPr wrap="square" lIns="0" tIns="0" rIns="0" bIns="0" rtlCol="0" anchor="t"/>
-          <a:lstStyle/>
-          <a:p>
-            <a:pPr indent="0" marL="0">
-              <a:buNone/>
-            </a:pPr>
-            <a:r>
-              <a:rPr lang="en-US" sz="1600" dirty="0">
-                <a:solidFill>
-                  <a:srgbClr val="4A5568"/>
-                </a:solidFill>
-              </a:rPr>
-              <a:t>Se os mocks fossem trocados por um banco de dados, mudariam apenas </a:t>
-            </a:r>
-            <a:pPr indent="0" marL="0">
-              <a:buNone/>
-            </a:pPr>
-            <a:r>
-              <a:rPr lang="en-US" sz="1600" b="1" dirty="0">
-                <a:solidFill>
-                  <a:srgbClr val="4A5568"/>
-                </a:solidFill>
-              </a:rPr>
-              <a:t>app/data</a:t>
-            </a:r>
-            <a:pPr indent="0" marL="0">
-              <a:buNone/>
-            </a:pPr>
-            <a:r>
-              <a:rPr lang="en-US" sz="1600" dirty="0">
-                <a:solidFill>
-                  <a:srgbClr val="4A5568"/>
-                </a:solidFill>
-              </a:rPr>
-              <a:t> e as funções </a:t>
-            </a:r>
-            <a:pPr indent="0" marL="0">
-              <a:buNone/>
-            </a:pPr>
-            <a:r>
-              <a:rPr lang="en-US" sz="1600" b="1" dirty="0">
-                <a:solidFill>
-                  <a:srgbClr val="4A5568"/>
-                </a:solidFill>
-              </a:rPr>
-              <a:t>carregar_*()</a:t>
-            </a:r>
-            <a:pPr indent="0" marL="0">
-              <a:buNone/>
-            </a:pPr>
-            <a:r>
-              <a:rPr lang="en-US" sz="1600" dirty="0">
-                <a:solidFill>
-                  <a:srgbClr val="4A5568"/>
-                </a:solidFill>
-              </a:rPr>
-              <a:t>.</a:t>
-            </a:r>
-            <a:endParaRPr lang="en-US" sz="1600" dirty="0"/>
-          </a:p>
-        </p:txBody>
-      </p:sp>
-    </p:spTree>
-  </p:cSld>
-  <p:clrMapOvr>
-    <a:masterClrMapping/>
-  </p:clrMapOvr>
-</p:sld>
-</file>
-
-<file path=ppt/slides/slide6.xml><?xml version="1.0" encoding="utf-8"?>
-<p:sld xmlns:a="http://schemas.openxmlformats.org/drawingml/2006/main" xmlns:r="http://schemas.openxmlformats.org/officeDocument/2006/relationships" xmlns:p="http://schemas.openxmlformats.org/presentationml/2006/main">
-  <p:cSld name="Slide 6">
-    <p:spTree>
-      <p:nvGrpSpPr>
-        <p:cNvPr id="1" name=""/>
-        <p:cNvGrpSpPr/>
-        <p:nvPr/>
-      </p:nvGrpSpPr>
-      <p:grpSpPr>
-        <a:xfrm>
-          <a:off x="0" y="0"/>
-          <a:ext cx="0" cy="0"/>
-          <a:chOff x="0" y="0"/>
-          <a:chExt cx="0" cy="0"/>
-        </a:xfrm>
-      </p:grpSpPr>
-      <p:sp>
-        <p:nvSpPr>
-          <p:cNvPr id="2" name="Text 1"/>
-          <p:cNvSpPr/>
-          <p:nvPr>
-            <p:ph idx="101" type="title" hasCustomPrompt="1"/>
-          </p:nvPr>
-        </p:nvSpPr>
-        <p:spPr>
-          <a:xfrm>
-            <a:off x="812800" y="762000"/>
-            <a:ext cx="10566400" cy="635000"/>
-          </a:xfrm>
-          <a:prstGeom prst="rect">
-            <a:avLst/>
-          </a:prstGeom>
-          <a:noFill/>
-          <a:ln/>
-        </p:spPr>
-        <p:txBody>
-          <a:bodyPr wrap="square" lIns="0" tIns="0" rIns="0" bIns="0" rtlCol="0" anchor="t"/>
-          <a:lstStyle/>
-          <a:p>
-            <a:pPr algn="l" indent="0" marL="0">
-              <a:buNone/>
-            </a:pPr>
-            <a:r>
-              <a:rPr lang="en-US" sz="3600" b="1" dirty="0">
-                <a:solidFill>
-                  <a:srgbClr val="1E2A3B"/>
-                </a:solidFill>
-              </a:rPr>
-              <a:t>Regras de negócio</a:t>
-            </a:r>
-            <a:endParaRPr lang="en-US" sz="3600" dirty="0"/>
-          </a:p>
-        </p:txBody>
-      </p:sp>
-      <p:sp>
-        <p:nvSpPr>
-          <p:cNvPr id="3" name="Text 1"/>
-          <p:cNvSpPr/>
-          <p:nvPr>
-            <p:ph idx="102" type="body" hasCustomPrompt="1"/>
-          </p:nvPr>
-        </p:nvSpPr>
-        <p:spPr>
-          <a:xfrm>
-            <a:off x="7569200" y="6197600"/>
-            <a:ext cx="3810000" cy="279400"/>
-          </a:xfrm>
-          <a:prstGeom prst="rect">
-            <a:avLst/>
-          </a:prstGeom>
-          <a:noFill/>
-          <a:ln/>
-        </p:spPr>
-        <p:txBody>
-          <a:bodyPr wrap="square" lIns="0" tIns="0" rIns="0" bIns="0" rtlCol="0" anchor="ctr"/>
-          <a:lstStyle/>
-          <a:p>
-            <a:pPr algn="r" indent="0" marL="0">
-              <a:buNone/>
-            </a:pPr>
-            <a:r>
-              <a:rPr lang="en-US" sz="1200" dirty="0">
-                <a:solidFill>
-                  <a:srgbClr val="667085"/>
-                </a:solidFill>
-              </a:rPr>
-              <a:t>Regras · 06</a:t>
+              <a:t>Demonstração · 05</a:t>
             </a:r>
             <a:endParaRPr lang="en-US" sz="1200" dirty="0"/>
           </a:p>
@@ -6224,1699 +4796,7 @@
       </p:sp>
       <p:graphicFrame>
         <p:nvGraphicFramePr>
-          <p:cNvPr id="7" name="anim|1|sobe|48"/>
-          <p:cNvGraphicFramePr>
-            <a:graphicFrameLocks noGrp="1"/>
-          </p:cNvGraphicFramePr>
-          <p:nvPr>
-            <p:extLst>
-              <p:ext uri="{D42A27DB-BD31-4B8C-83A1-F6EECF244321}">
-                <p14:modId xmlns:p14="http://schemas.microsoft.com/office/powerpoint/2010/main" val="1579011935"/>
-              </p:ext>
-            </p:extLst>
-          </p:nvPr>
-        </p:nvGraphicFramePr>
-        <p:xfrm>
-          <a:off x="812800" y="1587500"/>
-          <a:ext cx="10566400" cy="914400"/>
-        </p:xfrm>
-        <a:graphic>
-          <a:graphicData uri="http://schemas.openxmlformats.org/drawingml/2006/table">
-            <a:tbl>
-              <a:tblPr/>
-              <a:tblGrid>
-                <a:gridCol w="5283200"/>
-                <a:gridCol w="1901952"/>
-                <a:gridCol w="3381248"/>
-              </a:tblGrid>
-              <a:tr h="381000">
-                <a:tc>
-                  <a:txBody>
-                    <a:bodyPr/>
-                    <a:lstStyle/>
-                    <a:p>
-                      <a:pPr indent="0" marL="0">
-                        <a:buNone/>
-                      </a:pPr>
-                      <a:r>
-                        <a:rPr lang="en-US" sz="1400" b="1" dirty="0">
-                          <a:solidFill>
-                            <a:srgbClr val="1E2A3B"/>
-                          </a:solidFill>
-                        </a:rPr>
-                        <a:t>Regra</a:t>
-                      </a:r>
-                      <a:endParaRPr lang="en-US" sz="1400" dirty="0"/>
-                    </a:p>
-                  </a:txBody>
-                  <a:tcPr marL="127000" marR="127000" marT="63500" marB="63500" anchor="ctr">
-                    <a:lnL w="12700" cap="flat" cmpd="sng" algn="ctr">
-                      <a:solidFill>
-                        <a:srgbClr val="E8DCC0"/>
-                      </a:solidFill>
-                      <a:prstDash val="solid"/>
-                      <a:round/>
-                      <a:headEnd type="none" w="med" len="med"/>
-                      <a:tailEnd type="none" w="med" len="med"/>
-                    </a:lnL>
-                    <a:lnR w="12700" cap="flat" cmpd="sng" algn="ctr">
-                      <a:solidFill>
-                        <a:srgbClr val="E8DCC0"/>
-                      </a:solidFill>
-                      <a:prstDash val="solid"/>
-                      <a:round/>
-                      <a:headEnd type="none" w="med" len="med"/>
-                      <a:tailEnd type="none" w="med" len="med"/>
-                    </a:lnR>
-                    <a:lnT w="12700" cap="flat" cmpd="sng" algn="ctr">
-                      <a:solidFill>
-                        <a:srgbClr val="E8DCC0"/>
-                      </a:solidFill>
-                      <a:prstDash val="solid"/>
-                      <a:round/>
-                      <a:headEnd type="none" w="med" len="med"/>
-                      <a:tailEnd type="none" w="med" len="med"/>
-                    </a:lnT>
-                    <a:lnB w="12700" cap="flat" cmpd="sng" algn="ctr">
-                      <a:solidFill>
-                        <a:srgbClr val="E8DCC0"/>
-                      </a:solidFill>
-                      <a:prstDash val="solid"/>
-                      <a:round/>
-                      <a:headEnd type="none" w="med" len="med"/>
-                      <a:tailEnd type="none" w="med" len="med"/>
-                    </a:lnB>
-                    <a:solidFill>
-                      <a:srgbClr val="F1E7D0"/>
-                    </a:solidFill>
-                  </a:tcPr>
-                </a:tc>
-                <a:tc>
-                  <a:txBody>
-                    <a:bodyPr/>
-                    <a:lstStyle/>
-                    <a:p>
-                      <a:pPr indent="0" marL="0">
-                        <a:buNone/>
-                      </a:pPr>
-                      <a:r>
-                        <a:rPr lang="en-US" sz="1400" b="1" dirty="0">
-                          <a:solidFill>
-                            <a:srgbClr val="1E2A3B"/>
-                          </a:solidFill>
-                        </a:rPr>
-                        <a:t>Classe</a:t>
-                      </a:r>
-                      <a:endParaRPr lang="en-US" sz="1400" dirty="0"/>
-                    </a:p>
-                  </a:txBody>
-                  <a:tcPr marL="127000" marR="127000" marT="63500" marB="63500" anchor="ctr">
-                    <a:lnL w="12700" cap="flat" cmpd="sng" algn="ctr">
-                      <a:solidFill>
-                        <a:srgbClr val="E8DCC0"/>
-                      </a:solidFill>
-                      <a:prstDash val="solid"/>
-                      <a:round/>
-                      <a:headEnd type="none" w="med" len="med"/>
-                      <a:tailEnd type="none" w="med" len="med"/>
-                    </a:lnL>
-                    <a:lnR w="12700" cap="flat" cmpd="sng" algn="ctr">
-                      <a:solidFill>
-                        <a:srgbClr val="E8DCC0"/>
-                      </a:solidFill>
-                      <a:prstDash val="solid"/>
-                      <a:round/>
-                      <a:headEnd type="none" w="med" len="med"/>
-                      <a:tailEnd type="none" w="med" len="med"/>
-                    </a:lnR>
-                    <a:lnT w="12700" cap="flat" cmpd="sng" algn="ctr">
-                      <a:solidFill>
-                        <a:srgbClr val="E8DCC0"/>
-                      </a:solidFill>
-                      <a:prstDash val="solid"/>
-                      <a:round/>
-                      <a:headEnd type="none" w="med" len="med"/>
-                      <a:tailEnd type="none" w="med" len="med"/>
-                    </a:lnT>
-                    <a:lnB w="12700" cap="flat" cmpd="sng" algn="ctr">
-                      <a:solidFill>
-                        <a:srgbClr val="E8DCC0"/>
-                      </a:solidFill>
-                      <a:prstDash val="solid"/>
-                      <a:round/>
-                      <a:headEnd type="none" w="med" len="med"/>
-                      <a:tailEnd type="none" w="med" len="med"/>
-                    </a:lnB>
-                    <a:solidFill>
-                      <a:srgbClr val="F1E7D0"/>
-                    </a:solidFill>
-                  </a:tcPr>
-                </a:tc>
-                <a:tc>
-                  <a:txBody>
-                    <a:bodyPr/>
-                    <a:lstStyle/>
-                    <a:p>
-                      <a:pPr indent="0" marL="0">
-                        <a:buNone/>
-                      </a:pPr>
-                      <a:r>
-                        <a:rPr lang="en-US" sz="1400" b="1" dirty="0">
-                          <a:solidFill>
-                            <a:srgbClr val="1E2A3B"/>
-                          </a:solidFill>
-                        </a:rPr>
-                        <a:t>Exceção</a:t>
-                      </a:r>
-                      <a:endParaRPr lang="en-US" sz="1400" dirty="0"/>
-                    </a:p>
-                  </a:txBody>
-                  <a:tcPr marL="127000" marR="127000" marT="63500" marB="63500" anchor="ctr">
-                    <a:lnL w="12700" cap="flat" cmpd="sng" algn="ctr">
-                      <a:solidFill>
-                        <a:srgbClr val="E8DCC0"/>
-                      </a:solidFill>
-                      <a:prstDash val="solid"/>
-                      <a:round/>
-                      <a:headEnd type="none" w="med" len="med"/>
-                      <a:tailEnd type="none" w="med" len="med"/>
-                    </a:lnL>
-                    <a:lnR w="12700" cap="flat" cmpd="sng" algn="ctr">
-                      <a:solidFill>
-                        <a:srgbClr val="E8DCC0"/>
-                      </a:solidFill>
-                      <a:prstDash val="solid"/>
-                      <a:round/>
-                      <a:headEnd type="none" w="med" len="med"/>
-                      <a:tailEnd type="none" w="med" len="med"/>
-                    </a:lnR>
-                    <a:lnT w="12700" cap="flat" cmpd="sng" algn="ctr">
-                      <a:solidFill>
-                        <a:srgbClr val="E8DCC0"/>
-                      </a:solidFill>
-                      <a:prstDash val="solid"/>
-                      <a:round/>
-                      <a:headEnd type="none" w="med" len="med"/>
-                      <a:tailEnd type="none" w="med" len="med"/>
-                    </a:lnT>
-                    <a:lnB w="12700" cap="flat" cmpd="sng" algn="ctr">
-                      <a:solidFill>
-                        <a:srgbClr val="E8DCC0"/>
-                      </a:solidFill>
-                      <a:prstDash val="solid"/>
-                      <a:round/>
-                      <a:headEnd type="none" w="med" len="med"/>
-                      <a:tailEnd type="none" w="med" len="med"/>
-                    </a:lnB>
-                    <a:solidFill>
-                      <a:srgbClr val="F1E7D0"/>
-                    </a:solidFill>
-                  </a:tcPr>
-                </a:tc>
-              </a:tr>
-              <a:tr h="381000">
-                <a:tc>
-                  <a:txBody>
-                    <a:bodyPr/>
-                    <a:lstStyle/>
-                    <a:p>
-                      <a:pPr indent="0" marL="0">
-                        <a:buNone/>
-                      </a:pPr>
-                      <a:r>
-                        <a:rPr lang="en-US" sz="1400" dirty="0">
-                          <a:solidFill>
-                            <a:srgbClr val="1E2A3B"/>
-                          </a:solidFill>
-                        </a:rPr>
-                        <a:t>Idade do animal entre 0 e 30</a:t>
-                      </a:r>
-                      <a:endParaRPr lang="en-US" sz="1400" dirty="0"/>
-                    </a:p>
-                  </a:txBody>
-                  <a:tcPr marL="127000" marR="127000" marT="63500" marB="63500" anchor="ctr">
-                    <a:lnL w="12700" cap="flat" cmpd="sng" algn="ctr">
-                      <a:solidFill>
-                        <a:srgbClr val="E8DCC0"/>
-                      </a:solidFill>
-                      <a:prstDash val="solid"/>
-                      <a:round/>
-                      <a:headEnd type="none" w="med" len="med"/>
-                      <a:tailEnd type="none" w="med" len="med"/>
-                    </a:lnL>
-                    <a:lnR w="12700" cap="flat" cmpd="sng" algn="ctr">
-                      <a:solidFill>
-                        <a:srgbClr val="E8DCC0"/>
-                      </a:solidFill>
-                      <a:prstDash val="solid"/>
-                      <a:round/>
-                      <a:headEnd type="none" w="med" len="med"/>
-                      <a:tailEnd type="none" w="med" len="med"/>
-                    </a:lnR>
-                    <a:lnT w="12700" cap="flat" cmpd="sng" algn="ctr">
-                      <a:solidFill>
-                        <a:srgbClr val="E8DCC0"/>
-                      </a:solidFill>
-                      <a:prstDash val="solid"/>
-                      <a:round/>
-                      <a:headEnd type="none" w="med" len="med"/>
-                      <a:tailEnd type="none" w="med" len="med"/>
-                    </a:lnT>
-                    <a:lnB w="12700" cap="flat" cmpd="sng" algn="ctr">
-                      <a:solidFill>
-                        <a:srgbClr val="E8DCC0"/>
-                      </a:solidFill>
-                      <a:prstDash val="solid"/>
-                      <a:round/>
-                      <a:headEnd type="none" w="med" len="med"/>
-                      <a:tailEnd type="none" w="med" len="med"/>
-                    </a:lnB>
-                    <a:solidFill>
-                      <a:srgbClr val="FAF3E3"/>
-                    </a:solidFill>
-                  </a:tcPr>
-                </a:tc>
-                <a:tc>
-                  <a:txBody>
-                    <a:bodyPr/>
-                    <a:lstStyle/>
-                    <a:p>
-                      <a:pPr indent="0" marL="0">
-                        <a:buNone/>
-                      </a:pPr>
-                      <a:r>
-                        <a:rPr lang="en-US" sz="1400" dirty="0">
-                          <a:solidFill>
-                            <a:srgbClr val="1E2A3B"/>
-                          </a:solidFill>
-                        </a:rPr>
-                        <a:t>Animal</a:t>
-                      </a:r>
-                      <a:endParaRPr lang="en-US" sz="1400" dirty="0"/>
-                    </a:p>
-                  </a:txBody>
-                  <a:tcPr marL="127000" marR="127000" marT="63500" marB="63500" anchor="ctr">
-                    <a:lnL w="12700" cap="flat" cmpd="sng" algn="ctr">
-                      <a:solidFill>
-                        <a:srgbClr val="E8DCC0"/>
-                      </a:solidFill>
-                      <a:prstDash val="solid"/>
-                      <a:round/>
-                      <a:headEnd type="none" w="med" len="med"/>
-                      <a:tailEnd type="none" w="med" len="med"/>
-                    </a:lnL>
-                    <a:lnR w="12700" cap="flat" cmpd="sng" algn="ctr">
-                      <a:solidFill>
-                        <a:srgbClr val="E8DCC0"/>
-                      </a:solidFill>
-                      <a:prstDash val="solid"/>
-                      <a:round/>
-                      <a:headEnd type="none" w="med" len="med"/>
-                      <a:tailEnd type="none" w="med" len="med"/>
-                    </a:lnR>
-                    <a:lnT w="12700" cap="flat" cmpd="sng" algn="ctr">
-                      <a:solidFill>
-                        <a:srgbClr val="E8DCC0"/>
-                      </a:solidFill>
-                      <a:prstDash val="solid"/>
-                      <a:round/>
-                      <a:headEnd type="none" w="med" len="med"/>
-                      <a:tailEnd type="none" w="med" len="med"/>
-                    </a:lnT>
-                    <a:lnB w="12700" cap="flat" cmpd="sng" algn="ctr">
-                      <a:solidFill>
-                        <a:srgbClr val="E8DCC0"/>
-                      </a:solidFill>
-                      <a:prstDash val="solid"/>
-                      <a:round/>
-                      <a:headEnd type="none" w="med" len="med"/>
-                      <a:tailEnd type="none" w="med" len="med"/>
-                    </a:lnB>
-                    <a:solidFill>
-                      <a:srgbClr val="FAF3E3"/>
-                    </a:solidFill>
-                  </a:tcPr>
-                </a:tc>
-                <a:tc>
-                  <a:txBody>
-                    <a:bodyPr/>
-                    <a:lstStyle/>
-                    <a:p>
-                      <a:pPr indent="0" marL="0">
-                        <a:buNone/>
-                      </a:pPr>
-                      <a:r>
-                        <a:rPr lang="en-US" sz="1400" dirty="0">
-                          <a:solidFill>
-                            <a:srgbClr val="1E2A3B"/>
-                          </a:solidFill>
-                        </a:rPr>
-                        <a:t>ValueError</a:t>
-                      </a:r>
-                      <a:endParaRPr lang="en-US" sz="1400" dirty="0"/>
-                    </a:p>
-                  </a:txBody>
-                  <a:tcPr marL="127000" marR="127000" marT="63500" marB="63500" anchor="ctr">
-                    <a:lnL w="12700" cap="flat" cmpd="sng" algn="ctr">
-                      <a:solidFill>
-                        <a:srgbClr val="E8DCC0"/>
-                      </a:solidFill>
-                      <a:prstDash val="solid"/>
-                      <a:round/>
-                      <a:headEnd type="none" w="med" len="med"/>
-                      <a:tailEnd type="none" w="med" len="med"/>
-                    </a:lnL>
-                    <a:lnR w="12700" cap="flat" cmpd="sng" algn="ctr">
-                      <a:solidFill>
-                        <a:srgbClr val="E8DCC0"/>
-                      </a:solidFill>
-                      <a:prstDash val="solid"/>
-                      <a:round/>
-                      <a:headEnd type="none" w="med" len="med"/>
-                      <a:tailEnd type="none" w="med" len="med"/>
-                    </a:lnR>
-                    <a:lnT w="12700" cap="flat" cmpd="sng" algn="ctr">
-                      <a:solidFill>
-                        <a:srgbClr val="E8DCC0"/>
-                      </a:solidFill>
-                      <a:prstDash val="solid"/>
-                      <a:round/>
-                      <a:headEnd type="none" w="med" len="med"/>
-                      <a:tailEnd type="none" w="med" len="med"/>
-                    </a:lnT>
-                    <a:lnB w="12700" cap="flat" cmpd="sng" algn="ctr">
-                      <a:solidFill>
-                        <a:srgbClr val="E8DCC0"/>
-                      </a:solidFill>
-                      <a:prstDash val="solid"/>
-                      <a:round/>
-                      <a:headEnd type="none" w="med" len="med"/>
-                      <a:tailEnd type="none" w="med" len="med"/>
-                    </a:lnB>
-                    <a:solidFill>
-                      <a:srgbClr val="FAF3E3"/>
-                    </a:solidFill>
-                  </a:tcPr>
-                </a:tc>
-              </a:tr>
-              <a:tr h="381000">
-                <a:tc>
-                  <a:txBody>
-                    <a:bodyPr/>
-                    <a:lstStyle/>
-                    <a:p>
-                      <a:pPr indent="0" marL="0">
-                        <a:buNone/>
-                      </a:pPr>
-                      <a:r>
-                        <a:rPr lang="en-US" sz="1400" dirty="0">
-                          <a:solidFill>
-                            <a:srgbClr val="1E2A3B"/>
-                          </a:solidFill>
-                        </a:rPr>
-                        <a:t>Porte pequeno, medio ou grande</a:t>
-                      </a:r>
-                      <a:endParaRPr lang="en-US" sz="1400" dirty="0"/>
-                    </a:p>
-                  </a:txBody>
-                  <a:tcPr marL="127000" marR="127000" marT="63500" marB="63500" anchor="ctr">
-                    <a:lnL w="12700" cap="flat" cmpd="sng" algn="ctr">
-                      <a:solidFill>
-                        <a:srgbClr val="E8DCC0"/>
-                      </a:solidFill>
-                      <a:prstDash val="solid"/>
-                      <a:round/>
-                      <a:headEnd type="none" w="med" len="med"/>
-                      <a:tailEnd type="none" w="med" len="med"/>
-                    </a:lnL>
-                    <a:lnR w="12700" cap="flat" cmpd="sng" algn="ctr">
-                      <a:solidFill>
-                        <a:srgbClr val="E8DCC0"/>
-                      </a:solidFill>
-                      <a:prstDash val="solid"/>
-                      <a:round/>
-                      <a:headEnd type="none" w="med" len="med"/>
-                      <a:tailEnd type="none" w="med" len="med"/>
-                    </a:lnR>
-                    <a:lnT w="12700" cap="flat" cmpd="sng" algn="ctr">
-                      <a:solidFill>
-                        <a:srgbClr val="E8DCC0"/>
-                      </a:solidFill>
-                      <a:prstDash val="solid"/>
-                      <a:round/>
-                      <a:headEnd type="none" w="med" len="med"/>
-                      <a:tailEnd type="none" w="med" len="med"/>
-                    </a:lnT>
-                    <a:lnB w="12700" cap="flat" cmpd="sng" algn="ctr">
-                      <a:solidFill>
-                        <a:srgbClr val="E8DCC0"/>
-                      </a:solidFill>
-                      <a:prstDash val="solid"/>
-                      <a:round/>
-                      <a:headEnd type="none" w="med" len="med"/>
-                      <a:tailEnd type="none" w="med" len="med"/>
-                    </a:lnB>
-                    <a:solidFill>
-                      <a:srgbClr val="FFFDF8"/>
-                    </a:solidFill>
-                  </a:tcPr>
-                </a:tc>
-                <a:tc>
-                  <a:txBody>
-                    <a:bodyPr/>
-                    <a:lstStyle/>
-                    <a:p>
-                      <a:pPr indent="0" marL="0">
-                        <a:buNone/>
-                      </a:pPr>
-                      <a:r>
-                        <a:rPr lang="en-US" sz="1400" dirty="0">
-                          <a:solidFill>
-                            <a:srgbClr val="1E2A3B"/>
-                          </a:solidFill>
-                        </a:rPr>
-                        <a:t>Animal</a:t>
-                      </a:r>
-                      <a:endParaRPr lang="en-US" sz="1400" dirty="0"/>
-                    </a:p>
-                  </a:txBody>
-                  <a:tcPr marL="127000" marR="127000" marT="63500" marB="63500" anchor="ctr">
-                    <a:lnL w="12700" cap="flat" cmpd="sng" algn="ctr">
-                      <a:solidFill>
-                        <a:srgbClr val="E8DCC0"/>
-                      </a:solidFill>
-                      <a:prstDash val="solid"/>
-                      <a:round/>
-                      <a:headEnd type="none" w="med" len="med"/>
-                      <a:tailEnd type="none" w="med" len="med"/>
-                    </a:lnL>
-                    <a:lnR w="12700" cap="flat" cmpd="sng" algn="ctr">
-                      <a:solidFill>
-                        <a:srgbClr val="E8DCC0"/>
-                      </a:solidFill>
-                      <a:prstDash val="solid"/>
-                      <a:round/>
-                      <a:headEnd type="none" w="med" len="med"/>
-                      <a:tailEnd type="none" w="med" len="med"/>
-                    </a:lnR>
-                    <a:lnT w="12700" cap="flat" cmpd="sng" algn="ctr">
-                      <a:solidFill>
-                        <a:srgbClr val="E8DCC0"/>
-                      </a:solidFill>
-                      <a:prstDash val="solid"/>
-                      <a:round/>
-                      <a:headEnd type="none" w="med" len="med"/>
-                      <a:tailEnd type="none" w="med" len="med"/>
-                    </a:lnT>
-                    <a:lnB w="12700" cap="flat" cmpd="sng" algn="ctr">
-                      <a:solidFill>
-                        <a:srgbClr val="E8DCC0"/>
-                      </a:solidFill>
-                      <a:prstDash val="solid"/>
-                      <a:round/>
-                      <a:headEnd type="none" w="med" len="med"/>
-                      <a:tailEnd type="none" w="med" len="med"/>
-                    </a:lnB>
-                    <a:solidFill>
-                      <a:srgbClr val="FFFDF8"/>
-                    </a:solidFill>
-                  </a:tcPr>
-                </a:tc>
-                <a:tc>
-                  <a:txBody>
-                    <a:bodyPr/>
-                    <a:lstStyle/>
-                    <a:p>
-                      <a:pPr indent="0" marL="0">
-                        <a:buNone/>
-                      </a:pPr>
-                      <a:r>
-                        <a:rPr lang="en-US" sz="1400" dirty="0">
-                          <a:solidFill>
-                            <a:srgbClr val="1E2A3B"/>
-                          </a:solidFill>
-                        </a:rPr>
-                        <a:t>ValueError</a:t>
-                      </a:r>
-                      <a:endParaRPr lang="en-US" sz="1400" dirty="0"/>
-                    </a:p>
-                  </a:txBody>
-                  <a:tcPr marL="127000" marR="127000" marT="63500" marB="63500" anchor="ctr">
-                    <a:lnL w="12700" cap="flat" cmpd="sng" algn="ctr">
-                      <a:solidFill>
-                        <a:srgbClr val="E8DCC0"/>
-                      </a:solidFill>
-                      <a:prstDash val="solid"/>
-                      <a:round/>
-                      <a:headEnd type="none" w="med" len="med"/>
-                      <a:tailEnd type="none" w="med" len="med"/>
-                    </a:lnL>
-                    <a:lnR w="12700" cap="flat" cmpd="sng" algn="ctr">
-                      <a:solidFill>
-                        <a:srgbClr val="E8DCC0"/>
-                      </a:solidFill>
-                      <a:prstDash val="solid"/>
-                      <a:round/>
-                      <a:headEnd type="none" w="med" len="med"/>
-                      <a:tailEnd type="none" w="med" len="med"/>
-                    </a:lnR>
-                    <a:lnT w="12700" cap="flat" cmpd="sng" algn="ctr">
-                      <a:solidFill>
-                        <a:srgbClr val="E8DCC0"/>
-                      </a:solidFill>
-                      <a:prstDash val="solid"/>
-                      <a:round/>
-                      <a:headEnd type="none" w="med" len="med"/>
-                      <a:tailEnd type="none" w="med" len="med"/>
-                    </a:lnT>
-                    <a:lnB w="12700" cap="flat" cmpd="sng" algn="ctr">
-                      <a:solidFill>
-                        <a:srgbClr val="E8DCC0"/>
-                      </a:solidFill>
-                      <a:prstDash val="solid"/>
-                      <a:round/>
-                      <a:headEnd type="none" w="med" len="med"/>
-                      <a:tailEnd type="none" w="med" len="med"/>
-                    </a:lnB>
-                    <a:solidFill>
-                      <a:srgbClr val="FFFDF8"/>
-                    </a:solidFill>
-                  </a:tcPr>
-                </a:tc>
-              </a:tr>
-              <a:tr h="381000">
-                <a:tc>
-                  <a:txBody>
-                    <a:bodyPr/>
-                    <a:lstStyle/>
-                    <a:p>
-                      <a:pPr indent="0" marL="0">
-                        <a:buNone/>
-                      </a:pPr>
-                      <a:r>
-                        <a:rPr lang="en-US" sz="1400" dirty="0">
-                          <a:solidFill>
-                            <a:srgbClr val="1E2A3B"/>
-                          </a:solidFill>
-                        </a:rPr>
-                        <a:t>Adotante com 18 anos ou mais</a:t>
-                      </a:r>
-                      <a:endParaRPr lang="en-US" sz="1400" dirty="0"/>
-                    </a:p>
-                  </a:txBody>
-                  <a:tcPr marL="127000" marR="127000" marT="63500" marB="63500" anchor="ctr">
-                    <a:lnL w="12700" cap="flat" cmpd="sng" algn="ctr">
-                      <a:solidFill>
-                        <a:srgbClr val="E8DCC0"/>
-                      </a:solidFill>
-                      <a:prstDash val="solid"/>
-                      <a:round/>
-                      <a:headEnd type="none" w="med" len="med"/>
-                      <a:tailEnd type="none" w="med" len="med"/>
-                    </a:lnL>
-                    <a:lnR w="12700" cap="flat" cmpd="sng" algn="ctr">
-                      <a:solidFill>
-                        <a:srgbClr val="E8DCC0"/>
-                      </a:solidFill>
-                      <a:prstDash val="solid"/>
-                      <a:round/>
-                      <a:headEnd type="none" w="med" len="med"/>
-                      <a:tailEnd type="none" w="med" len="med"/>
-                    </a:lnR>
-                    <a:lnT w="12700" cap="flat" cmpd="sng" algn="ctr">
-                      <a:solidFill>
-                        <a:srgbClr val="E8DCC0"/>
-                      </a:solidFill>
-                      <a:prstDash val="solid"/>
-                      <a:round/>
-                      <a:headEnd type="none" w="med" len="med"/>
-                      <a:tailEnd type="none" w="med" len="med"/>
-                    </a:lnT>
-                    <a:lnB w="12700" cap="flat" cmpd="sng" algn="ctr">
-                      <a:solidFill>
-                        <a:srgbClr val="E8DCC0"/>
-                      </a:solidFill>
-                      <a:prstDash val="solid"/>
-                      <a:round/>
-                      <a:headEnd type="none" w="med" len="med"/>
-                      <a:tailEnd type="none" w="med" len="med"/>
-                    </a:lnB>
-                    <a:solidFill>
-                      <a:srgbClr val="FAF3E3"/>
-                    </a:solidFill>
-                  </a:tcPr>
-                </a:tc>
-                <a:tc>
-                  <a:txBody>
-                    <a:bodyPr/>
-                    <a:lstStyle/>
-                    <a:p>
-                      <a:pPr indent="0" marL="0">
-                        <a:buNone/>
-                      </a:pPr>
-                      <a:r>
-                        <a:rPr lang="en-US" sz="1400" dirty="0">
-                          <a:solidFill>
-                            <a:srgbClr val="1E2A3B"/>
-                          </a:solidFill>
-                        </a:rPr>
-                        <a:t>Adotante</a:t>
-                      </a:r>
-                      <a:endParaRPr lang="en-US" sz="1400" dirty="0"/>
-                    </a:p>
-                  </a:txBody>
-                  <a:tcPr marL="127000" marR="127000" marT="63500" marB="63500" anchor="ctr">
-                    <a:lnL w="12700" cap="flat" cmpd="sng" algn="ctr">
-                      <a:solidFill>
-                        <a:srgbClr val="E8DCC0"/>
-                      </a:solidFill>
-                      <a:prstDash val="solid"/>
-                      <a:round/>
-                      <a:headEnd type="none" w="med" len="med"/>
-                      <a:tailEnd type="none" w="med" len="med"/>
-                    </a:lnL>
-                    <a:lnR w="12700" cap="flat" cmpd="sng" algn="ctr">
-                      <a:solidFill>
-                        <a:srgbClr val="E8DCC0"/>
-                      </a:solidFill>
-                      <a:prstDash val="solid"/>
-                      <a:round/>
-                      <a:headEnd type="none" w="med" len="med"/>
-                      <a:tailEnd type="none" w="med" len="med"/>
-                    </a:lnR>
-                    <a:lnT w="12700" cap="flat" cmpd="sng" algn="ctr">
-                      <a:solidFill>
-                        <a:srgbClr val="E8DCC0"/>
-                      </a:solidFill>
-                      <a:prstDash val="solid"/>
-                      <a:round/>
-                      <a:headEnd type="none" w="med" len="med"/>
-                      <a:tailEnd type="none" w="med" len="med"/>
-                    </a:lnT>
-                    <a:lnB w="12700" cap="flat" cmpd="sng" algn="ctr">
-                      <a:solidFill>
-                        <a:srgbClr val="E8DCC0"/>
-                      </a:solidFill>
-                      <a:prstDash val="solid"/>
-                      <a:round/>
-                      <a:headEnd type="none" w="med" len="med"/>
-                      <a:tailEnd type="none" w="med" len="med"/>
-                    </a:lnB>
-                    <a:solidFill>
-                      <a:srgbClr val="FAF3E3"/>
-                    </a:solidFill>
-                  </a:tcPr>
-                </a:tc>
-                <a:tc>
-                  <a:txBody>
-                    <a:bodyPr/>
-                    <a:lstStyle/>
-                    <a:p>
-                      <a:pPr indent="0" marL="0">
-                        <a:buNone/>
-                      </a:pPr>
-                      <a:r>
-                        <a:rPr lang="en-US" sz="1400" dirty="0">
-                          <a:solidFill>
-                            <a:srgbClr val="1E2A3B"/>
-                          </a:solidFill>
-                        </a:rPr>
-                        <a:t>ValueError</a:t>
-                      </a:r>
-                      <a:endParaRPr lang="en-US" sz="1400" dirty="0"/>
-                    </a:p>
-                  </a:txBody>
-                  <a:tcPr marL="127000" marR="127000" marT="63500" marB="63500" anchor="ctr">
-                    <a:lnL w="12700" cap="flat" cmpd="sng" algn="ctr">
-                      <a:solidFill>
-                        <a:srgbClr val="E8DCC0"/>
-                      </a:solidFill>
-                      <a:prstDash val="solid"/>
-                      <a:round/>
-                      <a:headEnd type="none" w="med" len="med"/>
-                      <a:tailEnd type="none" w="med" len="med"/>
-                    </a:lnL>
-                    <a:lnR w="12700" cap="flat" cmpd="sng" algn="ctr">
-                      <a:solidFill>
-                        <a:srgbClr val="E8DCC0"/>
-                      </a:solidFill>
-                      <a:prstDash val="solid"/>
-                      <a:round/>
-                      <a:headEnd type="none" w="med" len="med"/>
-                      <a:tailEnd type="none" w="med" len="med"/>
-                    </a:lnR>
-                    <a:lnT w="12700" cap="flat" cmpd="sng" algn="ctr">
-                      <a:solidFill>
-                        <a:srgbClr val="E8DCC0"/>
-                      </a:solidFill>
-                      <a:prstDash val="solid"/>
-                      <a:round/>
-                      <a:headEnd type="none" w="med" len="med"/>
-                      <a:tailEnd type="none" w="med" len="med"/>
-                    </a:lnT>
-                    <a:lnB w="12700" cap="flat" cmpd="sng" algn="ctr">
-                      <a:solidFill>
-                        <a:srgbClr val="E8DCC0"/>
-                      </a:solidFill>
-                      <a:prstDash val="solid"/>
-                      <a:round/>
-                      <a:headEnd type="none" w="med" len="med"/>
-                      <a:tailEnd type="none" w="med" len="med"/>
-                    </a:lnB>
-                    <a:solidFill>
-                      <a:srgbClr val="FAF3E3"/>
-                    </a:solidFill>
-                  </a:tcPr>
-                </a:tc>
-              </a:tr>
-              <a:tr h="381000">
-                <a:tc>
-                  <a:txBody>
-                    <a:bodyPr/>
-                    <a:lstStyle/>
-                    <a:p>
-                      <a:pPr indent="0" marL="0">
-                        <a:buNone/>
-                      </a:pPr>
-                      <a:r>
-                        <a:rPr lang="en-US" sz="1400" dirty="0">
-                          <a:solidFill>
-                            <a:srgbClr val="1E2A3B"/>
-                          </a:solidFill>
-                        </a:rPr>
-                        <a:t>Data da adoção não pode ser vazia</a:t>
-                      </a:r>
-                      <a:endParaRPr lang="en-US" sz="1400" dirty="0"/>
-                    </a:p>
-                  </a:txBody>
-                  <a:tcPr marL="127000" marR="127000" marT="63500" marB="63500" anchor="ctr">
-                    <a:lnL w="12700" cap="flat" cmpd="sng" algn="ctr">
-                      <a:solidFill>
-                        <a:srgbClr val="E8DCC0"/>
-                      </a:solidFill>
-                      <a:prstDash val="solid"/>
-                      <a:round/>
-                      <a:headEnd type="none" w="med" len="med"/>
-                      <a:tailEnd type="none" w="med" len="med"/>
-                    </a:lnL>
-                    <a:lnR w="12700" cap="flat" cmpd="sng" algn="ctr">
-                      <a:solidFill>
-                        <a:srgbClr val="E8DCC0"/>
-                      </a:solidFill>
-                      <a:prstDash val="solid"/>
-                      <a:round/>
-                      <a:headEnd type="none" w="med" len="med"/>
-                      <a:tailEnd type="none" w="med" len="med"/>
-                    </a:lnR>
-                    <a:lnT w="12700" cap="flat" cmpd="sng" algn="ctr">
-                      <a:solidFill>
-                        <a:srgbClr val="E8DCC0"/>
-                      </a:solidFill>
-                      <a:prstDash val="solid"/>
-                      <a:round/>
-                      <a:headEnd type="none" w="med" len="med"/>
-                      <a:tailEnd type="none" w="med" len="med"/>
-                    </a:lnT>
-                    <a:lnB w="12700" cap="flat" cmpd="sng" algn="ctr">
-                      <a:solidFill>
-                        <a:srgbClr val="E8DCC0"/>
-                      </a:solidFill>
-                      <a:prstDash val="solid"/>
-                      <a:round/>
-                      <a:headEnd type="none" w="med" len="med"/>
-                      <a:tailEnd type="none" w="med" len="med"/>
-                    </a:lnB>
-                    <a:solidFill>
-                      <a:srgbClr val="FFFDF8"/>
-                    </a:solidFill>
-                  </a:tcPr>
-                </a:tc>
-                <a:tc>
-                  <a:txBody>
-                    <a:bodyPr/>
-                    <a:lstStyle/>
-                    <a:p>
-                      <a:pPr indent="0" marL="0">
-                        <a:buNone/>
-                      </a:pPr>
-                      <a:r>
-                        <a:rPr lang="en-US" sz="1400" dirty="0">
-                          <a:solidFill>
-                            <a:srgbClr val="1E2A3B"/>
-                          </a:solidFill>
-                        </a:rPr>
-                        <a:t>Adocao</a:t>
-                      </a:r>
-                      <a:endParaRPr lang="en-US" sz="1400" dirty="0"/>
-                    </a:p>
-                  </a:txBody>
-                  <a:tcPr marL="127000" marR="127000" marT="63500" marB="63500" anchor="ctr">
-                    <a:lnL w="12700" cap="flat" cmpd="sng" algn="ctr">
-                      <a:solidFill>
-                        <a:srgbClr val="E8DCC0"/>
-                      </a:solidFill>
-                      <a:prstDash val="solid"/>
-                      <a:round/>
-                      <a:headEnd type="none" w="med" len="med"/>
-                      <a:tailEnd type="none" w="med" len="med"/>
-                    </a:lnL>
-                    <a:lnR w="12700" cap="flat" cmpd="sng" algn="ctr">
-                      <a:solidFill>
-                        <a:srgbClr val="E8DCC0"/>
-                      </a:solidFill>
-                      <a:prstDash val="solid"/>
-                      <a:round/>
-                      <a:headEnd type="none" w="med" len="med"/>
-                      <a:tailEnd type="none" w="med" len="med"/>
-                    </a:lnR>
-                    <a:lnT w="12700" cap="flat" cmpd="sng" algn="ctr">
-                      <a:solidFill>
-                        <a:srgbClr val="E8DCC0"/>
-                      </a:solidFill>
-                      <a:prstDash val="solid"/>
-                      <a:round/>
-                      <a:headEnd type="none" w="med" len="med"/>
-                      <a:tailEnd type="none" w="med" len="med"/>
-                    </a:lnT>
-                    <a:lnB w="12700" cap="flat" cmpd="sng" algn="ctr">
-                      <a:solidFill>
-                        <a:srgbClr val="E8DCC0"/>
-                      </a:solidFill>
-                      <a:prstDash val="solid"/>
-                      <a:round/>
-                      <a:headEnd type="none" w="med" len="med"/>
-                      <a:tailEnd type="none" w="med" len="med"/>
-                    </a:lnB>
-                    <a:solidFill>
-                      <a:srgbClr val="FFFDF8"/>
-                    </a:solidFill>
-                  </a:tcPr>
-                </a:tc>
-                <a:tc>
-                  <a:txBody>
-                    <a:bodyPr/>
-                    <a:lstStyle/>
-                    <a:p>
-                      <a:pPr indent="0" marL="0">
-                        <a:buNone/>
-                      </a:pPr>
-                      <a:r>
-                        <a:rPr lang="en-US" sz="1400" dirty="0">
-                          <a:solidFill>
-                            <a:srgbClr val="1E2A3B"/>
-                          </a:solidFill>
-                        </a:rPr>
-                        <a:t>ValueError → 422</a:t>
-                      </a:r>
-                      <a:endParaRPr lang="en-US" sz="1400" dirty="0"/>
-                    </a:p>
-                  </a:txBody>
-                  <a:tcPr marL="127000" marR="127000" marT="63500" marB="63500" anchor="ctr">
-                    <a:lnL w="12700" cap="flat" cmpd="sng" algn="ctr">
-                      <a:solidFill>
-                        <a:srgbClr val="E8DCC0"/>
-                      </a:solidFill>
-                      <a:prstDash val="solid"/>
-                      <a:round/>
-                      <a:headEnd type="none" w="med" len="med"/>
-                      <a:tailEnd type="none" w="med" len="med"/>
-                    </a:lnL>
-                    <a:lnR w="12700" cap="flat" cmpd="sng" algn="ctr">
-                      <a:solidFill>
-                        <a:srgbClr val="E8DCC0"/>
-                      </a:solidFill>
-                      <a:prstDash val="solid"/>
-                      <a:round/>
-                      <a:headEnd type="none" w="med" len="med"/>
-                      <a:tailEnd type="none" w="med" len="med"/>
-                    </a:lnR>
-                    <a:lnT w="12700" cap="flat" cmpd="sng" algn="ctr">
-                      <a:solidFill>
-                        <a:srgbClr val="E8DCC0"/>
-                      </a:solidFill>
-                      <a:prstDash val="solid"/>
-                      <a:round/>
-                      <a:headEnd type="none" w="med" len="med"/>
-                      <a:tailEnd type="none" w="med" len="med"/>
-                    </a:lnT>
-                    <a:lnB w="12700" cap="flat" cmpd="sng" algn="ctr">
-                      <a:solidFill>
-                        <a:srgbClr val="E8DCC0"/>
-                      </a:solidFill>
-                      <a:prstDash val="solid"/>
-                      <a:round/>
-                      <a:headEnd type="none" w="med" len="med"/>
-                      <a:tailEnd type="none" w="med" len="med"/>
-                    </a:lnB>
-                    <a:solidFill>
-                      <a:srgbClr val="FFFDF8"/>
-                    </a:solidFill>
-                  </a:tcPr>
-                </a:tc>
-              </a:tr>
-              <a:tr h="381000">
-                <a:tc>
-                  <a:txBody>
-                    <a:bodyPr/>
-                    <a:lstStyle/>
-                    <a:p>
-                      <a:pPr indent="0" marL="0">
-                        <a:buNone/>
-                      </a:pPr>
-                      <a:r>
-                        <a:rPr lang="en-US" sz="1400" dirty="0">
-                          <a:solidFill>
-                            <a:srgbClr val="1E2A3B"/>
-                          </a:solidFill>
-                        </a:rPr>
-                        <a:t>Cão grande exige quintal</a:t>
-                      </a:r>
-                      <a:endParaRPr lang="en-US" sz="1400" dirty="0"/>
-                    </a:p>
-                  </a:txBody>
-                  <a:tcPr marL="127000" marR="127000" marT="63500" marB="63500" anchor="ctr">
-                    <a:lnL w="12700" cap="flat" cmpd="sng" algn="ctr">
-                      <a:solidFill>
-                        <a:srgbClr val="E8DCC0"/>
-                      </a:solidFill>
-                      <a:prstDash val="solid"/>
-                      <a:round/>
-                      <a:headEnd type="none" w="med" len="med"/>
-                      <a:tailEnd type="none" w="med" len="med"/>
-                    </a:lnL>
-                    <a:lnR w="12700" cap="flat" cmpd="sng" algn="ctr">
-                      <a:solidFill>
-                        <a:srgbClr val="E8DCC0"/>
-                      </a:solidFill>
-                      <a:prstDash val="solid"/>
-                      <a:round/>
-                      <a:headEnd type="none" w="med" len="med"/>
-                      <a:tailEnd type="none" w="med" len="med"/>
-                    </a:lnR>
-                    <a:lnT w="12700" cap="flat" cmpd="sng" algn="ctr">
-                      <a:solidFill>
-                        <a:srgbClr val="E8DCC0"/>
-                      </a:solidFill>
-                      <a:prstDash val="solid"/>
-                      <a:round/>
-                      <a:headEnd type="none" w="med" len="med"/>
-                      <a:tailEnd type="none" w="med" len="med"/>
-                    </a:lnT>
-                    <a:lnB w="12700" cap="flat" cmpd="sng" algn="ctr">
-                      <a:solidFill>
-                        <a:srgbClr val="E8DCC0"/>
-                      </a:solidFill>
-                      <a:prstDash val="solid"/>
-                      <a:round/>
-                      <a:headEnd type="none" w="med" len="med"/>
-                      <a:tailEnd type="none" w="med" len="med"/>
-                    </a:lnB>
-                    <a:solidFill>
-                      <a:srgbClr val="FAF3E3"/>
-                    </a:solidFill>
-                  </a:tcPr>
-                </a:tc>
-                <a:tc>
-                  <a:txBody>
-                    <a:bodyPr/>
-                    <a:lstStyle/>
-                    <a:p>
-                      <a:pPr indent="0" marL="0">
-                        <a:buNone/>
-                      </a:pPr>
-                      <a:r>
-                        <a:rPr lang="en-US" sz="1400" dirty="0">
-                          <a:solidFill>
-                            <a:srgbClr val="1E2A3B"/>
-                          </a:solidFill>
-                        </a:rPr>
-                        <a:t>Cao</a:t>
-                      </a:r>
-                      <a:endParaRPr lang="en-US" sz="1400" dirty="0"/>
-                    </a:p>
-                  </a:txBody>
-                  <a:tcPr marL="127000" marR="127000" marT="63500" marB="63500" anchor="ctr">
-                    <a:lnL w="12700" cap="flat" cmpd="sng" algn="ctr">
-                      <a:solidFill>
-                        <a:srgbClr val="E8DCC0"/>
-                      </a:solidFill>
-                      <a:prstDash val="solid"/>
-                      <a:round/>
-                      <a:headEnd type="none" w="med" len="med"/>
-                      <a:tailEnd type="none" w="med" len="med"/>
-                    </a:lnL>
-                    <a:lnR w="12700" cap="flat" cmpd="sng" algn="ctr">
-                      <a:solidFill>
-                        <a:srgbClr val="E8DCC0"/>
-                      </a:solidFill>
-                      <a:prstDash val="solid"/>
-                      <a:round/>
-                      <a:headEnd type="none" w="med" len="med"/>
-                      <a:tailEnd type="none" w="med" len="med"/>
-                    </a:lnR>
-                    <a:lnT w="12700" cap="flat" cmpd="sng" algn="ctr">
-                      <a:solidFill>
-                        <a:srgbClr val="E8DCC0"/>
-                      </a:solidFill>
-                      <a:prstDash val="solid"/>
-                      <a:round/>
-                      <a:headEnd type="none" w="med" len="med"/>
-                      <a:tailEnd type="none" w="med" len="med"/>
-                    </a:lnT>
-                    <a:lnB w="12700" cap="flat" cmpd="sng" algn="ctr">
-                      <a:solidFill>
-                        <a:srgbClr val="E8DCC0"/>
-                      </a:solidFill>
-                      <a:prstDash val="solid"/>
-                      <a:round/>
-                      <a:headEnd type="none" w="med" len="med"/>
-                      <a:tailEnd type="none" w="med" len="med"/>
-                    </a:lnB>
-                    <a:solidFill>
-                      <a:srgbClr val="FAF3E3"/>
-                    </a:solidFill>
-                  </a:tcPr>
-                </a:tc>
-                <a:tc>
-                  <a:txBody>
-                    <a:bodyPr/>
-                    <a:lstStyle/>
-                    <a:p>
-                      <a:pPr indent="0" marL="0">
-                        <a:buNone/>
-                      </a:pPr>
-                      <a:r>
-                        <a:rPr lang="en-US" sz="1400" dirty="0">
-                          <a:solidFill>
-                            <a:srgbClr val="1E2A3B"/>
-                          </a:solidFill>
-                        </a:rPr>
-                        <a:t>ValueError → 422</a:t>
-                      </a:r>
-                      <a:endParaRPr lang="en-US" sz="1400" dirty="0"/>
-                    </a:p>
-                  </a:txBody>
-                  <a:tcPr marL="127000" marR="127000" marT="63500" marB="63500" anchor="ctr">
-                    <a:lnL w="12700" cap="flat" cmpd="sng" algn="ctr">
-                      <a:solidFill>
-                        <a:srgbClr val="E8DCC0"/>
-                      </a:solidFill>
-                      <a:prstDash val="solid"/>
-                      <a:round/>
-                      <a:headEnd type="none" w="med" len="med"/>
-                      <a:tailEnd type="none" w="med" len="med"/>
-                    </a:lnL>
-                    <a:lnR w="12700" cap="flat" cmpd="sng" algn="ctr">
-                      <a:solidFill>
-                        <a:srgbClr val="E8DCC0"/>
-                      </a:solidFill>
-                      <a:prstDash val="solid"/>
-                      <a:round/>
-                      <a:headEnd type="none" w="med" len="med"/>
-                      <a:tailEnd type="none" w="med" len="med"/>
-                    </a:lnR>
-                    <a:lnT w="12700" cap="flat" cmpd="sng" algn="ctr">
-                      <a:solidFill>
-                        <a:srgbClr val="E8DCC0"/>
-                      </a:solidFill>
-                      <a:prstDash val="solid"/>
-                      <a:round/>
-                      <a:headEnd type="none" w="med" len="med"/>
-                      <a:tailEnd type="none" w="med" len="med"/>
-                    </a:lnT>
-                    <a:lnB w="12700" cap="flat" cmpd="sng" algn="ctr">
-                      <a:solidFill>
-                        <a:srgbClr val="E8DCC0"/>
-                      </a:solidFill>
-                      <a:prstDash val="solid"/>
-                      <a:round/>
-                      <a:headEnd type="none" w="med" len="med"/>
-                      <a:tailEnd type="none" w="med" len="med"/>
-                    </a:lnB>
-                    <a:solidFill>
-                      <a:srgbClr val="FAF3E3"/>
-                    </a:solidFill>
-                  </a:tcPr>
-                </a:tc>
-              </a:tr>
-              <a:tr h="381000">
-                <a:tc>
-                  <a:txBody>
-                    <a:bodyPr/>
-                    <a:lstStyle/>
-                    <a:p>
-                      <a:pPr indent="0" marL="0">
-                        <a:buNone/>
-                      </a:pPr>
-                      <a:r>
-                        <a:rPr lang="en-US" sz="1400" dirty="0">
-                          <a:solidFill>
-                            <a:srgbClr val="1E2A3B"/>
-                          </a:solidFill>
-                        </a:rPr>
-                        <a:t>Animal já adotado</a:t>
-                      </a:r>
-                      <a:endParaRPr lang="en-US" sz="1400" dirty="0"/>
-                    </a:p>
-                  </a:txBody>
-                  <a:tcPr marL="127000" marR="127000" marT="63500" marB="63500" anchor="ctr">
-                    <a:lnL w="12700" cap="flat" cmpd="sng" algn="ctr">
-                      <a:solidFill>
-                        <a:srgbClr val="E8DCC0"/>
-                      </a:solidFill>
-                      <a:prstDash val="solid"/>
-                      <a:round/>
-                      <a:headEnd type="none" w="med" len="med"/>
-                      <a:tailEnd type="none" w="med" len="med"/>
-                    </a:lnL>
-                    <a:lnR w="12700" cap="flat" cmpd="sng" algn="ctr">
-                      <a:solidFill>
-                        <a:srgbClr val="E8DCC0"/>
-                      </a:solidFill>
-                      <a:prstDash val="solid"/>
-                      <a:round/>
-                      <a:headEnd type="none" w="med" len="med"/>
-                      <a:tailEnd type="none" w="med" len="med"/>
-                    </a:lnR>
-                    <a:lnT w="12700" cap="flat" cmpd="sng" algn="ctr">
-                      <a:solidFill>
-                        <a:srgbClr val="E8DCC0"/>
-                      </a:solidFill>
-                      <a:prstDash val="solid"/>
-                      <a:round/>
-                      <a:headEnd type="none" w="med" len="med"/>
-                      <a:tailEnd type="none" w="med" len="med"/>
-                    </a:lnT>
-                    <a:lnB w="12700" cap="flat" cmpd="sng" algn="ctr">
-                      <a:solidFill>
-                        <a:srgbClr val="E8DCC0"/>
-                      </a:solidFill>
-                      <a:prstDash val="solid"/>
-                      <a:round/>
-                      <a:headEnd type="none" w="med" len="med"/>
-                      <a:tailEnd type="none" w="med" len="med"/>
-                    </a:lnB>
-                    <a:solidFill>
-                      <a:srgbClr val="FFFDF8"/>
-                    </a:solidFill>
-                  </a:tcPr>
-                </a:tc>
-                <a:tc>
-                  <a:txBody>
-                    <a:bodyPr/>
-                    <a:lstStyle/>
-                    <a:p>
-                      <a:pPr indent="0" marL="0">
-                        <a:buNone/>
-                      </a:pPr>
-                      <a:r>
-                        <a:rPr lang="en-US" sz="1400" dirty="0">
-                          <a:solidFill>
-                            <a:srgbClr val="1E2A3B"/>
-                          </a:solidFill>
-                        </a:rPr>
-                        <a:t>Animal</a:t>
-                      </a:r>
-                      <a:endParaRPr lang="en-US" sz="1400" dirty="0"/>
-                    </a:p>
-                  </a:txBody>
-                  <a:tcPr marL="127000" marR="127000" marT="63500" marB="63500" anchor="ctr">
-                    <a:lnL w="12700" cap="flat" cmpd="sng" algn="ctr">
-                      <a:solidFill>
-                        <a:srgbClr val="E8DCC0"/>
-                      </a:solidFill>
-                      <a:prstDash val="solid"/>
-                      <a:round/>
-                      <a:headEnd type="none" w="med" len="med"/>
-                      <a:tailEnd type="none" w="med" len="med"/>
-                    </a:lnL>
-                    <a:lnR w="12700" cap="flat" cmpd="sng" algn="ctr">
-                      <a:solidFill>
-                        <a:srgbClr val="E8DCC0"/>
-                      </a:solidFill>
-                      <a:prstDash val="solid"/>
-                      <a:round/>
-                      <a:headEnd type="none" w="med" len="med"/>
-                      <a:tailEnd type="none" w="med" len="med"/>
-                    </a:lnR>
-                    <a:lnT w="12700" cap="flat" cmpd="sng" algn="ctr">
-                      <a:solidFill>
-                        <a:srgbClr val="E8DCC0"/>
-                      </a:solidFill>
-                      <a:prstDash val="solid"/>
-                      <a:round/>
-                      <a:headEnd type="none" w="med" len="med"/>
-                      <a:tailEnd type="none" w="med" len="med"/>
-                    </a:lnT>
-                    <a:lnB w="12700" cap="flat" cmpd="sng" algn="ctr">
-                      <a:solidFill>
-                        <a:srgbClr val="E8DCC0"/>
-                      </a:solidFill>
-                      <a:prstDash val="solid"/>
-                      <a:round/>
-                      <a:headEnd type="none" w="med" len="med"/>
-                      <a:tailEnd type="none" w="med" len="med"/>
-                    </a:lnB>
-                    <a:solidFill>
-                      <a:srgbClr val="FFFDF8"/>
-                    </a:solidFill>
-                  </a:tcPr>
-                </a:tc>
-                <a:tc>
-                  <a:txBody>
-                    <a:bodyPr/>
-                    <a:lstStyle/>
-                    <a:p>
-                      <a:pPr indent="0" marL="0">
-                        <a:buNone/>
-                      </a:pPr>
-                      <a:r>
-                        <a:rPr lang="en-US" sz="1400" dirty="0">
-                          <a:solidFill>
-                            <a:srgbClr val="1E2A3B"/>
-                          </a:solidFill>
-                        </a:rPr>
-                        <a:t>ConflitoError → 409</a:t>
-                      </a:r>
-                      <a:endParaRPr lang="en-US" sz="1400" dirty="0"/>
-                    </a:p>
-                  </a:txBody>
-                  <a:tcPr marL="127000" marR="127000" marT="63500" marB="63500" anchor="ctr">
-                    <a:lnL w="12700" cap="flat" cmpd="sng" algn="ctr">
-                      <a:solidFill>
-                        <a:srgbClr val="E8DCC0"/>
-                      </a:solidFill>
-                      <a:prstDash val="solid"/>
-                      <a:round/>
-                      <a:headEnd type="none" w="med" len="med"/>
-                      <a:tailEnd type="none" w="med" len="med"/>
-                    </a:lnL>
-                    <a:lnR w="12700" cap="flat" cmpd="sng" algn="ctr">
-                      <a:solidFill>
-                        <a:srgbClr val="E8DCC0"/>
-                      </a:solidFill>
-                      <a:prstDash val="solid"/>
-                      <a:round/>
-                      <a:headEnd type="none" w="med" len="med"/>
-                      <a:tailEnd type="none" w="med" len="med"/>
-                    </a:lnR>
-                    <a:lnT w="12700" cap="flat" cmpd="sng" algn="ctr">
-                      <a:solidFill>
-                        <a:srgbClr val="E8DCC0"/>
-                      </a:solidFill>
-                      <a:prstDash val="solid"/>
-                      <a:round/>
-                      <a:headEnd type="none" w="med" len="med"/>
-                      <a:tailEnd type="none" w="med" len="med"/>
-                    </a:lnT>
-                    <a:lnB w="12700" cap="flat" cmpd="sng" algn="ctr">
-                      <a:solidFill>
-                        <a:srgbClr val="E8DCC0"/>
-                      </a:solidFill>
-                      <a:prstDash val="solid"/>
-                      <a:round/>
-                      <a:headEnd type="none" w="med" len="med"/>
-                      <a:tailEnd type="none" w="med" len="med"/>
-                    </a:lnB>
-                    <a:solidFill>
-                      <a:srgbClr val="FFFDF8"/>
-                    </a:solidFill>
-                  </a:tcPr>
-                </a:tc>
-              </a:tr>
-              <a:tr h="381000">
-                <a:tc>
-                  <a:txBody>
-                    <a:bodyPr/>
-                    <a:lstStyle/>
-                    <a:p>
-                      <a:pPr indent="0" marL="0">
-                        <a:buNone/>
-                      </a:pPr>
-                      <a:r>
-                        <a:rPr lang="en-US" sz="1400" dirty="0">
-                          <a:solidFill>
-                            <a:srgbClr val="1E2A3B"/>
-                          </a:solidFill>
-                        </a:rPr>
-                        <a:t>Limite de 2 adoções por adotante</a:t>
-                      </a:r>
-                      <a:endParaRPr lang="en-US" sz="1400" dirty="0"/>
-                    </a:p>
-                  </a:txBody>
-                  <a:tcPr marL="127000" marR="127000" marT="63500" marB="63500" anchor="ctr">
-                    <a:lnL w="12700" cap="flat" cmpd="sng" algn="ctr">
-                      <a:solidFill>
-                        <a:srgbClr val="E8DCC0"/>
-                      </a:solidFill>
-                      <a:prstDash val="solid"/>
-                      <a:round/>
-                      <a:headEnd type="none" w="med" len="med"/>
-                      <a:tailEnd type="none" w="med" len="med"/>
-                    </a:lnL>
-                    <a:lnR w="12700" cap="flat" cmpd="sng" algn="ctr">
-                      <a:solidFill>
-                        <a:srgbClr val="E8DCC0"/>
-                      </a:solidFill>
-                      <a:prstDash val="solid"/>
-                      <a:round/>
-                      <a:headEnd type="none" w="med" len="med"/>
-                      <a:tailEnd type="none" w="med" len="med"/>
-                    </a:lnR>
-                    <a:lnT w="12700" cap="flat" cmpd="sng" algn="ctr">
-                      <a:solidFill>
-                        <a:srgbClr val="E8DCC0"/>
-                      </a:solidFill>
-                      <a:prstDash val="solid"/>
-                      <a:round/>
-                      <a:headEnd type="none" w="med" len="med"/>
-                      <a:tailEnd type="none" w="med" len="med"/>
-                    </a:lnT>
-                    <a:lnB w="12700" cap="flat" cmpd="sng" algn="ctr">
-                      <a:solidFill>
-                        <a:srgbClr val="E8DCC0"/>
-                      </a:solidFill>
-                      <a:prstDash val="solid"/>
-                      <a:round/>
-                      <a:headEnd type="none" w="med" len="med"/>
-                      <a:tailEnd type="none" w="med" len="med"/>
-                    </a:lnB>
-                    <a:solidFill>
-                      <a:srgbClr val="FAF3E3"/>
-                    </a:solidFill>
-                  </a:tcPr>
-                </a:tc>
-                <a:tc>
-                  <a:txBody>
-                    <a:bodyPr/>
-                    <a:lstStyle/>
-                    <a:p>
-                      <a:pPr indent="0" marL="0">
-                        <a:buNone/>
-                      </a:pPr>
-                      <a:r>
-                        <a:rPr lang="en-US" sz="1400" dirty="0">
-                          <a:solidFill>
-                            <a:srgbClr val="1E2A3B"/>
-                          </a:solidFill>
-                        </a:rPr>
-                        <a:t>Adotante</a:t>
-                      </a:r>
-                      <a:endParaRPr lang="en-US" sz="1400" dirty="0"/>
-                    </a:p>
-                  </a:txBody>
-                  <a:tcPr marL="127000" marR="127000" marT="63500" marB="63500" anchor="ctr">
-                    <a:lnL w="12700" cap="flat" cmpd="sng" algn="ctr">
-                      <a:solidFill>
-                        <a:srgbClr val="E8DCC0"/>
-                      </a:solidFill>
-                      <a:prstDash val="solid"/>
-                      <a:round/>
-                      <a:headEnd type="none" w="med" len="med"/>
-                      <a:tailEnd type="none" w="med" len="med"/>
-                    </a:lnL>
-                    <a:lnR w="12700" cap="flat" cmpd="sng" algn="ctr">
-                      <a:solidFill>
-                        <a:srgbClr val="E8DCC0"/>
-                      </a:solidFill>
-                      <a:prstDash val="solid"/>
-                      <a:round/>
-                      <a:headEnd type="none" w="med" len="med"/>
-                      <a:tailEnd type="none" w="med" len="med"/>
-                    </a:lnR>
-                    <a:lnT w="12700" cap="flat" cmpd="sng" algn="ctr">
-                      <a:solidFill>
-                        <a:srgbClr val="E8DCC0"/>
-                      </a:solidFill>
-                      <a:prstDash val="solid"/>
-                      <a:round/>
-                      <a:headEnd type="none" w="med" len="med"/>
-                      <a:tailEnd type="none" w="med" len="med"/>
-                    </a:lnT>
-                    <a:lnB w="12700" cap="flat" cmpd="sng" algn="ctr">
-                      <a:solidFill>
-                        <a:srgbClr val="E8DCC0"/>
-                      </a:solidFill>
-                      <a:prstDash val="solid"/>
-                      <a:round/>
-                      <a:headEnd type="none" w="med" len="med"/>
-                      <a:tailEnd type="none" w="med" len="med"/>
-                    </a:lnB>
-                    <a:solidFill>
-                      <a:srgbClr val="FAF3E3"/>
-                    </a:solidFill>
-                  </a:tcPr>
-                </a:tc>
-                <a:tc>
-                  <a:txBody>
-                    <a:bodyPr/>
-                    <a:lstStyle/>
-                    <a:p>
-                      <a:pPr indent="0" marL="0">
-                        <a:buNone/>
-                      </a:pPr>
-                      <a:r>
-                        <a:rPr lang="en-US" sz="1400" dirty="0">
-                          <a:solidFill>
-                            <a:srgbClr val="1E2A3B"/>
-                          </a:solidFill>
-                        </a:rPr>
-                        <a:t>ConflitoError → 409</a:t>
-                      </a:r>
-                      <a:endParaRPr lang="en-US" sz="1400" dirty="0"/>
-                    </a:p>
-                  </a:txBody>
-                  <a:tcPr marL="127000" marR="127000" marT="63500" marB="63500" anchor="ctr">
-                    <a:lnL w="12700" cap="flat" cmpd="sng" algn="ctr">
-                      <a:solidFill>
-                        <a:srgbClr val="E8DCC0"/>
-                      </a:solidFill>
-                      <a:prstDash val="solid"/>
-                      <a:round/>
-                      <a:headEnd type="none" w="med" len="med"/>
-                      <a:tailEnd type="none" w="med" len="med"/>
-                    </a:lnL>
-                    <a:lnR w="12700" cap="flat" cmpd="sng" algn="ctr">
-                      <a:solidFill>
-                        <a:srgbClr val="E8DCC0"/>
-                      </a:solidFill>
-                      <a:prstDash val="solid"/>
-                      <a:round/>
-                      <a:headEnd type="none" w="med" len="med"/>
-                      <a:tailEnd type="none" w="med" len="med"/>
-                    </a:lnR>
-                    <a:lnT w="12700" cap="flat" cmpd="sng" algn="ctr">
-                      <a:solidFill>
-                        <a:srgbClr val="E8DCC0"/>
-                      </a:solidFill>
-                      <a:prstDash val="solid"/>
-                      <a:round/>
-                      <a:headEnd type="none" w="med" len="med"/>
-                      <a:tailEnd type="none" w="med" len="med"/>
-                    </a:lnT>
-                    <a:lnB w="12700" cap="flat" cmpd="sng" algn="ctr">
-                      <a:solidFill>
-                        <a:srgbClr val="E8DCC0"/>
-                      </a:solidFill>
-                      <a:prstDash val="solid"/>
-                      <a:round/>
-                      <a:headEnd type="none" w="med" len="med"/>
-                      <a:tailEnd type="none" w="med" len="med"/>
-                    </a:lnB>
-                    <a:solidFill>
-                      <a:srgbClr val="FAF3E3"/>
-                    </a:solidFill>
-                  </a:tcPr>
-                </a:tc>
-              </a:tr>
-            </a:tbl>
-          </a:graphicData>
-        </a:graphic>
-      </p:graphicFrame>
-      <p:sp>
-        <p:nvSpPr>
-          <p:cNvPr id="6" name="anim|2|sobe|49"/>
-          <p:cNvSpPr txBox="1"/>
-          <p:nvPr/>
-        </p:nvSpPr>
-        <p:spPr>
-          <a:xfrm>
-            <a:off x="812800" y="4953000"/>
-            <a:ext cx="10566400" cy="381000"/>
-          </a:xfrm>
-          <a:prstGeom prst="rect">
-            <a:avLst/>
-          </a:prstGeom>
-          <a:noFill/>
-          <a:ln/>
-        </p:spPr>
-        <p:txBody>
-          <a:bodyPr wrap="square" lIns="0" tIns="0" rIns="0" bIns="0" rtlCol="0" anchor="t"/>
-          <a:lstStyle/>
-          <a:p>
-            <a:pPr indent="0" marL="0">
-              <a:buNone/>
-            </a:pPr>
-            <a:r>
-              <a:rPr lang="en-US" sz="1600" dirty="0">
-                <a:solidFill>
-                  <a:srgbClr val="4A5568"/>
-                </a:solidFill>
-              </a:rPr>
-              <a:t>O construtor chama os métodos </a:t>
-            </a:r>
-            <a:pPr indent="0" marL="0">
-              <a:buNone/>
-            </a:pPr>
-            <a:r>
-              <a:rPr lang="en-US" sz="1600" b="1" dirty="0">
-                <a:solidFill>
-                  <a:srgbClr val="4A5568"/>
-                </a:solidFill>
-              </a:rPr>
-              <a:t>alterar_</a:t>
-            </a:r>
-            <a:pPr indent="0" marL="0">
-              <a:buNone/>
-            </a:pPr>
-            <a:r>
-              <a:rPr lang="en-US" sz="1600" dirty="0">
-                <a:solidFill>
-                  <a:srgbClr val="4A5568"/>
-                </a:solidFill>
-              </a:rPr>
-              <a:t>, que fazem a validação. Não existe </a:t>
-            </a:r>
-            <a:pPr indent="0" marL="0">
-              <a:buNone/>
-            </a:pPr>
-            <a:r>
-              <a:rPr lang="en-US" sz="1600" b="1" dirty="0">
-                <a:solidFill>
-                  <a:srgbClr val="4A5568"/>
-                </a:solidFill>
-              </a:rPr>
-              <a:t>alterar_id</a:t>
-            </a:r>
-            <a:pPr indent="0" marL="0">
-              <a:buNone/>
-            </a:pPr>
-            <a:r>
-              <a:rPr lang="en-US" sz="1600" dirty="0">
-                <a:solidFill>
-                  <a:srgbClr val="4A5568"/>
-                </a:solidFill>
-              </a:rPr>
-              <a:t>.</a:t>
-            </a:r>
-            <a:endParaRPr lang="en-US" sz="1600" dirty="0"/>
-          </a:p>
-        </p:txBody>
-      </p:sp>
-    </p:spTree>
-  </p:cSld>
-  <p:clrMapOvr>
-    <a:masterClrMapping/>
-  </p:clrMapOvr>
-</p:sld>
-</file>
-
-<file path=ppt/slides/slide7.xml><?xml version="1.0" encoding="utf-8"?>
-<p:sld xmlns:a="http://schemas.openxmlformats.org/drawingml/2006/main" xmlns:r="http://schemas.openxmlformats.org/officeDocument/2006/relationships" xmlns:p="http://schemas.openxmlformats.org/presentationml/2006/main">
-  <p:cSld name="Slide 7">
-    <p:spTree>
-      <p:nvGrpSpPr>
-        <p:cNvPr id="1" name=""/>
-        <p:cNvGrpSpPr/>
-        <p:nvPr/>
-      </p:nvGrpSpPr>
-      <p:grpSpPr>
-        <a:xfrm>
-          <a:off x="0" y="0"/>
-          <a:ext cx="0" cy="0"/>
-          <a:chOff x="0" y="0"/>
-          <a:chExt cx="0" cy="0"/>
-        </a:xfrm>
-      </p:grpSpPr>
-      <p:sp>
-        <p:nvSpPr>
-          <p:cNvPr id="2" name="Text 1"/>
-          <p:cNvSpPr/>
-          <p:nvPr>
-            <p:ph idx="101" type="title" hasCustomPrompt="1"/>
-          </p:nvPr>
-        </p:nvSpPr>
-        <p:spPr>
-          <a:xfrm>
-            <a:off x="812800" y="762000"/>
-            <a:ext cx="10566400" cy="635000"/>
-          </a:xfrm>
-          <a:prstGeom prst="rect">
-            <a:avLst/>
-          </a:prstGeom>
-          <a:noFill/>
-          <a:ln/>
-        </p:spPr>
-        <p:txBody>
-          <a:bodyPr wrap="square" lIns="0" tIns="0" rIns="0" bIns="0" rtlCol="0" anchor="t"/>
-          <a:lstStyle/>
-          <a:p>
-            <a:pPr algn="l" indent="0" marL="0">
-              <a:buNone/>
-            </a:pPr>
-            <a:r>
-              <a:rPr lang="en-US" sz="3600" b="1" dirty="0">
-                <a:solidFill>
-                  <a:srgbClr val="1E2A3B"/>
-                </a:solidFill>
-              </a:rPr>
-              <a:t>Demonstração no /docs</a:t>
-            </a:r>
-            <a:endParaRPr lang="en-US" sz="3600" dirty="0"/>
-          </a:p>
-        </p:txBody>
-      </p:sp>
-      <p:sp>
-        <p:nvSpPr>
-          <p:cNvPr id="3" name="Text 1"/>
-          <p:cNvSpPr/>
-          <p:nvPr>
-            <p:ph idx="102" type="body" hasCustomPrompt="1"/>
-          </p:nvPr>
-        </p:nvSpPr>
-        <p:spPr>
-          <a:xfrm>
-            <a:off x="7569200" y="6197600"/>
-            <a:ext cx="3810000" cy="279400"/>
-          </a:xfrm>
-          <a:prstGeom prst="rect">
-            <a:avLst/>
-          </a:prstGeom>
-          <a:noFill/>
-          <a:ln/>
-        </p:spPr>
-        <p:txBody>
-          <a:bodyPr wrap="square" lIns="0" tIns="0" rIns="0" bIns="0" rtlCol="0" anchor="ctr"/>
-          <a:lstStyle/>
-          <a:p>
-            <a:pPr algn="r" indent="0" marL="0">
-              <a:buNone/>
-            </a:pPr>
-            <a:r>
-              <a:rPr lang="en-US" sz="1200" dirty="0">
-                <a:solidFill>
-                  <a:srgbClr val="667085"/>
-                </a:solidFill>
-              </a:rPr>
-              <a:t>Demonstração · 07</a:t>
-            </a:r>
-            <a:endParaRPr lang="en-US" sz="1200" dirty="0"/>
-          </a:p>
-        </p:txBody>
-      </p:sp>
-      <p:graphicFrame>
-        <p:nvGraphicFramePr>
-          <p:cNvPr id="8" name="anim|1|sobe|50"/>
+          <p:cNvPr id="6" name="anim|1|sobe|40"/>
           <p:cNvGraphicFramePr>
             <a:graphicFrameLocks noGrp="1"/>
           </p:cNvGraphicFramePr>
@@ -9965,7 +6845,7 @@
       </p:graphicFrame>
       <p:sp>
         <p:nvSpPr>
-          <p:cNvPr id="6" name="anim|2|sobe|51"/>
+          <p:cNvPr id="6" name="anim|2|sobe|41"/>
           <p:cNvSpPr txBox="1"/>
           <p:nvPr/>
         </p:nvSpPr>
@@ -10040,6 +6920,1122 @@
               <a:t>. Os dados ficam em memória e voltam ao estado inicial quando o servidor reinicia.</a:t>
             </a:r>
             <a:endParaRPr lang="en-US" sz="1200" dirty="0"/>
+          </a:p>
+        </p:txBody>
+      </p:sp>
+    </p:spTree>
+  </p:cSld>
+  <p:clrMapOvr>
+    <a:masterClrMapping/>
+  </p:clrMapOvr>
+</p:sld>
+</file>
+
+<file path=ppt/slides/slide6.xml><?xml version="1.0" encoding="utf-8"?>
+<p:sld xmlns:a="http://schemas.openxmlformats.org/drawingml/2006/main" xmlns:r="http://schemas.openxmlformats.org/officeDocument/2006/relationships" xmlns:p="http://schemas.openxmlformats.org/presentationml/2006/main">
+  <p:cSld name="Slide 6">
+    <p:spTree>
+      <p:nvGrpSpPr>
+        <p:cNvPr id="1" name=""/>
+        <p:cNvGrpSpPr/>
+        <p:nvPr/>
+      </p:nvGrpSpPr>
+      <p:grpSpPr>
+        <a:xfrm>
+          <a:off x="0" y="0"/>
+          <a:ext cx="0" cy="0"/>
+          <a:chOff x="0" y="0"/>
+          <a:chExt cx="0" cy="0"/>
+        </a:xfrm>
+      </p:grpSpPr>
+      <p:sp>
+        <p:nvSpPr>
+          <p:cNvPr id="2" name="Text 1"/>
+          <p:cNvSpPr/>
+          <p:nvPr>
+            <p:ph idx="101" type="title" hasCustomPrompt="1"/>
+          </p:nvPr>
+        </p:nvSpPr>
+        <p:spPr>
+          <a:xfrm>
+            <a:off x="812800" y="762000"/>
+            <a:ext cx="10566400" cy="635000"/>
+          </a:xfrm>
+          <a:prstGeom prst="rect">
+            <a:avLst/>
+          </a:prstGeom>
+          <a:noFill/>
+          <a:ln/>
+        </p:spPr>
+        <p:txBody>
+          <a:bodyPr wrap="square" lIns="0" tIns="0" rIns="0" bIns="0" rtlCol="0" anchor="t"/>
+          <a:lstStyle/>
+          <a:p>
+            <a:pPr algn="l" indent="0" marL="0">
+              <a:buNone/>
+            </a:pPr>
+            <a:r>
+              <a:rPr lang="en-US" sz="3600" b="1" dirty="0">
+                <a:solidFill>
+                  <a:srgbClr val="1E2A3B"/>
+                </a:solidFill>
+              </a:rPr>
+              <a:t>Códigos de resposta</a:t>
+            </a:r>
+            <a:endParaRPr lang="en-US" sz="3600" dirty="0"/>
+          </a:p>
+        </p:txBody>
+      </p:sp>
+      <p:sp>
+        <p:nvSpPr>
+          <p:cNvPr id="3" name="Text 1"/>
+          <p:cNvSpPr/>
+          <p:nvPr>
+            <p:ph idx="102" type="body" hasCustomPrompt="1"/>
+          </p:nvPr>
+        </p:nvSpPr>
+        <p:spPr>
+          <a:xfrm>
+            <a:off x="7569200" y="6197600"/>
+            <a:ext cx="3810000" cy="279400"/>
+          </a:xfrm>
+          <a:prstGeom prst="rect">
+            <a:avLst/>
+          </a:prstGeom>
+          <a:noFill/>
+          <a:ln/>
+        </p:spPr>
+        <p:txBody>
+          <a:bodyPr wrap="square" lIns="0" tIns="0" rIns="0" bIns="0" rtlCol="0" anchor="ctr"/>
+          <a:lstStyle/>
+          <a:p>
+            <a:pPr algn="r" indent="0" marL="0">
+              <a:buNone/>
+            </a:pPr>
+            <a:r>
+              <a:rPr lang="en-US" sz="1200" dirty="0">
+                <a:solidFill>
+                  <a:srgbClr val="667085"/>
+                </a:solidFill>
+              </a:rPr>
+              <a:t>Códigos HTTP · 06</a:t>
+            </a:r>
+            <a:endParaRPr lang="en-US" sz="1200" dirty="0"/>
+          </a:p>
+        </p:txBody>
+      </p:sp>
+      <p:sp>
+        <p:nvSpPr>
+          <p:cNvPr id="5" name="anim|1|zoom|42"/>
+          <p:cNvSpPr/>
+          <p:nvPr/>
+        </p:nvSpPr>
+        <p:spPr>
+          <a:xfrm>
+            <a:off x="812800" y="1587500"/>
+            <a:ext cx="2489200" cy="1905000"/>
+          </a:xfrm>
+          <a:prstGeom prst="roundRect">
+            <a:avLst>
+              <a:gd name="adj" fmla="val 6720"/>
+            </a:avLst>
+          </a:prstGeom>
+          <a:solidFill>
+            <a:srgbClr val="DCE8F7"/>
+          </a:solidFill>
+          <a:ln/>
+        </p:spPr>
+        <p:txBody>
+          <a:bodyPr wrap="square" lIns="254000" tIns="254000" rIns="254000" bIns="254000" rtlCol="0" anchor="t"/>
+          <a:lstStyle/>
+          <a:p>
+            <a:pPr indent="0" marL="0">
+              <a:spcAft>
+                <a:spcPts val="600"/>
+              </a:spcAft>
+              <a:buNone/>
+            </a:pPr>
+            <a:r>
+              <a:rPr lang="en-US" sz="3600" b="1" dirty="0">
+                <a:solidFill>
+                  <a:srgbClr val="1D5FD1"/>
+                </a:solidFill>
+              </a:rPr>
+              <a:t>201</a:t>
+            </a:r>
+            <a:endParaRPr lang="en-US" sz="3600" dirty="0"/>
+          </a:p>
+          <a:p>
+            <a:pPr indent="0" marL="0">
+              <a:spcAft>
+                <a:spcPts val="600"/>
+              </a:spcAft>
+              <a:buNone/>
+            </a:pPr>
+            <a:r>
+              <a:rPr lang="en-US" sz="1600" b="1" dirty="0">
+                <a:solidFill>
+                  <a:srgbClr val="1E2A3B"/>
+                </a:solidFill>
+              </a:rPr>
+              <a:t>Criado</a:t>
+            </a:r>
+            <a:endParaRPr lang="en-US" sz="3600" dirty="0"/>
+          </a:p>
+          <a:p>
+            <a:pPr indent="0" marL="0">
+              <a:buNone/>
+            </a:pPr>
+            <a:r>
+              <a:rPr lang="en-US" sz="1200" dirty="0">
+                <a:solidFill>
+                  <a:srgbClr val="33415C"/>
+                </a:solidFill>
+              </a:rPr>
+              <a:t>Adoção registrada.</a:t>
+            </a:r>
+            <a:endParaRPr lang="en-US" sz="3600" dirty="0"/>
+          </a:p>
+        </p:txBody>
+      </p:sp>
+      <p:sp>
+        <p:nvSpPr>
+          <p:cNvPr id="6" name="anim|2|zoom|43"/>
+          <p:cNvSpPr/>
+          <p:nvPr/>
+        </p:nvSpPr>
+        <p:spPr>
+          <a:xfrm>
+            <a:off x="3505200" y="1587500"/>
+            <a:ext cx="2489200" cy="1905000"/>
+          </a:xfrm>
+          <a:prstGeom prst="roundRect">
+            <a:avLst>
+              <a:gd name="adj" fmla="val 6720"/>
+            </a:avLst>
+          </a:prstGeom>
+          <a:solidFill>
+            <a:srgbClr val="FFFDF8"/>
+          </a:solidFill>
+          <a:ln w="12700">
+            <a:solidFill>
+              <a:srgbClr val="E8DCC0"/>
+            </a:solidFill>
+          </a:ln>
+        </p:spPr>
+        <p:txBody>
+          <a:bodyPr wrap="square" lIns="254000" tIns="254000" rIns="254000" bIns="254000" rtlCol="0" anchor="t"/>
+          <a:lstStyle/>
+          <a:p>
+            <a:pPr indent="0" marL="0">
+              <a:spcAft>
+                <a:spcPts val="600"/>
+              </a:spcAft>
+              <a:buNone/>
+            </a:pPr>
+            <a:r>
+              <a:rPr lang="en-US" sz="3600" b="1" dirty="0">
+                <a:solidFill>
+                  <a:srgbClr val="B45309"/>
+                </a:solidFill>
+              </a:rPr>
+              <a:t>404</a:t>
+            </a:r>
+            <a:endParaRPr lang="en-US" sz="3600" dirty="0"/>
+          </a:p>
+          <a:p>
+            <a:pPr indent="0" marL="0">
+              <a:spcAft>
+                <a:spcPts val="600"/>
+              </a:spcAft>
+              <a:buNone/>
+            </a:pPr>
+            <a:r>
+              <a:rPr lang="en-US" sz="1600" b="1" dirty="0">
+                <a:solidFill>
+                  <a:srgbClr val="1E2A3B"/>
+                </a:solidFill>
+              </a:rPr>
+              <a:t>Não encontrado</a:t>
+            </a:r>
+            <a:endParaRPr lang="en-US" sz="3600" dirty="0"/>
+          </a:p>
+          <a:p>
+            <a:pPr indent="0" marL="0">
+              <a:buNone/>
+            </a:pPr>
+            <a:r>
+              <a:rPr lang="en-US" sz="1200" dirty="0">
+                <a:solidFill>
+                  <a:srgbClr val="4A5568"/>
+                </a:solidFill>
+              </a:rPr>
+              <a:t>Animal ou adotante inexistente. O controller retornou None.</a:t>
+            </a:r>
+            <a:endParaRPr lang="en-US" sz="3600" dirty="0"/>
+          </a:p>
+        </p:txBody>
+      </p:sp>
+      <p:sp>
+        <p:nvSpPr>
+          <p:cNvPr id="7" name="anim|3|zoom|44"/>
+          <p:cNvSpPr/>
+          <p:nvPr/>
+        </p:nvSpPr>
+        <p:spPr>
+          <a:xfrm>
+            <a:off x="6197600" y="1587500"/>
+            <a:ext cx="2489200" cy="1905000"/>
+          </a:xfrm>
+          <a:prstGeom prst="roundRect">
+            <a:avLst>
+              <a:gd name="adj" fmla="val 6720"/>
+            </a:avLst>
+          </a:prstGeom>
+          <a:solidFill>
+            <a:srgbClr val="FFFDF8"/>
+          </a:solidFill>
+          <a:ln w="12700">
+            <a:solidFill>
+              <a:srgbClr val="E8DCC0"/>
+            </a:solidFill>
+          </a:ln>
+        </p:spPr>
+        <p:txBody>
+          <a:bodyPr wrap="square" lIns="254000" tIns="254000" rIns="254000" bIns="254000" rtlCol="0" anchor="t"/>
+          <a:lstStyle/>
+          <a:p>
+            <a:pPr indent="0" marL="0">
+              <a:spcAft>
+                <a:spcPts val="600"/>
+              </a:spcAft>
+              <a:buNone/>
+            </a:pPr>
+            <a:r>
+              <a:rPr lang="en-US" sz="3600" b="1" dirty="0">
+                <a:solidFill>
+                  <a:srgbClr val="B45309"/>
+                </a:solidFill>
+              </a:rPr>
+              <a:t>409</a:t>
+            </a:r>
+            <a:endParaRPr lang="en-US" sz="3600" dirty="0"/>
+          </a:p>
+          <a:p>
+            <a:pPr indent="0" marL="0">
+              <a:spcAft>
+                <a:spcPts val="600"/>
+              </a:spcAft>
+              <a:buNone/>
+            </a:pPr>
+            <a:r>
+              <a:rPr lang="en-US" sz="1600" b="1" dirty="0">
+                <a:solidFill>
+                  <a:srgbClr val="1E2A3B"/>
+                </a:solidFill>
+              </a:rPr>
+              <a:t>Conflito</a:t>
+            </a:r>
+            <a:endParaRPr lang="en-US" sz="3600" dirty="0"/>
+          </a:p>
+          <a:p>
+            <a:pPr indent="0" marL="0">
+              <a:buNone/>
+            </a:pPr>
+            <a:r>
+              <a:rPr lang="en-US" sz="1200" dirty="0">
+                <a:solidFill>
+                  <a:srgbClr val="4A5568"/>
+                </a:solidFill>
+              </a:rPr>
+              <a:t>Animal já adotado ou adotante com 2 adoções.</a:t>
+            </a:r>
+            <a:endParaRPr lang="en-US" sz="3600" dirty="0"/>
+          </a:p>
+        </p:txBody>
+      </p:sp>
+      <p:sp>
+        <p:nvSpPr>
+          <p:cNvPr id="8" name="anim|4|zoom|45"/>
+          <p:cNvSpPr/>
+          <p:nvPr/>
+        </p:nvSpPr>
+        <p:spPr>
+          <a:xfrm>
+            <a:off x="8890000" y="1587500"/>
+            <a:ext cx="2489200" cy="1905000"/>
+          </a:xfrm>
+          <a:prstGeom prst="roundRect">
+            <a:avLst>
+              <a:gd name="adj" fmla="val 6720"/>
+            </a:avLst>
+          </a:prstGeom>
+          <a:solidFill>
+            <a:srgbClr val="FFFDF8"/>
+          </a:solidFill>
+          <a:ln w="12700">
+            <a:solidFill>
+              <a:srgbClr val="E8DCC0"/>
+            </a:solidFill>
+          </a:ln>
+        </p:spPr>
+        <p:txBody>
+          <a:bodyPr wrap="square" lIns="254000" tIns="254000" rIns="254000" bIns="254000" rtlCol="0" anchor="t"/>
+          <a:lstStyle/>
+          <a:p>
+            <a:pPr indent="0" marL="0">
+              <a:spcAft>
+                <a:spcPts val="600"/>
+              </a:spcAft>
+              <a:buNone/>
+            </a:pPr>
+            <a:r>
+              <a:rPr lang="en-US" sz="3600" b="1" dirty="0">
+                <a:solidFill>
+                  <a:srgbClr val="B45309"/>
+                </a:solidFill>
+              </a:rPr>
+              <a:t>422</a:t>
+            </a:r>
+            <a:endParaRPr lang="en-US" sz="3600" dirty="0"/>
+          </a:p>
+          <a:p>
+            <a:pPr indent="0" marL="0">
+              <a:spcAft>
+                <a:spcPts val="600"/>
+              </a:spcAft>
+              <a:buNone/>
+            </a:pPr>
+            <a:r>
+              <a:rPr lang="en-US" sz="1600" b="1" dirty="0">
+                <a:solidFill>
+                  <a:srgbClr val="1E2A3B"/>
+                </a:solidFill>
+              </a:rPr>
+              <a:t>Regra violada</a:t>
+            </a:r>
+            <a:endParaRPr lang="en-US" sz="3600" dirty="0"/>
+          </a:p>
+          <a:p>
+            <a:pPr indent="0" marL="0">
+              <a:buNone/>
+            </a:pPr>
+            <a:r>
+              <a:rPr lang="en-US" sz="1200" dirty="0">
+                <a:solidFill>
+                  <a:srgbClr val="4A5568"/>
+                </a:solidFill>
+              </a:rPr>
+              <a:t>Cão grande sem quintal ou data vazia.</a:t>
+            </a:r>
+            <a:endParaRPr lang="en-US" sz="3600" dirty="0"/>
+          </a:p>
+        </p:txBody>
+      </p:sp>
+      <p:sp>
+        <p:nvSpPr>
+          <p:cNvPr id="9" name="anim|5|sobe|46"/>
+          <p:cNvSpPr/>
+          <p:nvPr/>
+        </p:nvSpPr>
+        <p:spPr>
+          <a:xfrm>
+            <a:off x="812800" y="3810000"/>
+            <a:ext cx="6350000" cy="1714500"/>
+          </a:xfrm>
+          <a:prstGeom prst="roundRect">
+            <a:avLst>
+              <a:gd name="adj" fmla="val 7467"/>
+            </a:avLst>
+          </a:prstGeom>
+          <a:solidFill>
+            <a:srgbClr val="F1E7D0"/>
+          </a:solidFill>
+          <a:ln/>
+        </p:spPr>
+        <p:txBody>
+          <a:bodyPr wrap="square" lIns="203200" tIns="304800" rIns="304800" bIns="203200" rtlCol="0" anchor="ctr"/>
+          <a:lstStyle/>
+          <a:p>
+            <a:pPr indent="0" marL="0">
+              <a:lnSpc>
+                <a:spcPct val="125000"/>
+              </a:lnSpc>
+              <a:buNone/>
+            </a:pPr>
+            <a:r>
+              <a:rPr lang="en-US" sz="1200" dirty="0">
+                <a:solidFill>
+                  <a:srgbClr val="1E2A3B"/>
+                </a:solidFill>
+                <a:latin typeface="Consolas" pitchFamily="34" charset="0"/>
+                <a:ea typeface="Consolas" pitchFamily="34" charset="-122"/>
+                <a:cs typeface="Consolas" pitchFamily="34" charset="-120"/>
+              </a:rPr>
+              <a:t>try:</a:t>
+            </a:r>
+            <a:endParaRPr lang="en-US" sz="1200" dirty="0"/>
+          </a:p>
+          <a:p>
+            <a:pPr indent="0" marL="0">
+              <a:lnSpc>
+                <a:spcPct val="125000"/>
+              </a:lnSpc>
+              <a:buNone/>
+            </a:pPr>
+            <a:r>
+              <a:rPr lang="en-US" sz="1200" dirty="0">
+                <a:solidFill>
+                  <a:srgbClr val="1E2A3B"/>
+                </a:solidFill>
+                <a:latin typeface="Consolas" pitchFamily="34" charset="0"/>
+                <a:ea typeface="Consolas" pitchFamily="34" charset="-122"/>
+                <a:cs typeface="Consolas" pitchFamily="34" charset="-120"/>
+              </a:rPr>
+              <a:t>    adocao = controller.registrar(...)</a:t>
+            </a:r>
+            <a:endParaRPr lang="en-US" sz="1200" dirty="0"/>
+          </a:p>
+          <a:p>
+            <a:pPr indent="0" marL="0">
+              <a:lnSpc>
+                <a:spcPct val="125000"/>
+              </a:lnSpc>
+              <a:buNone/>
+            </a:pPr>
+            <a:r>
+              <a:rPr lang="en-US" sz="1200" dirty="0">
+                <a:solidFill>
+                  <a:srgbClr val="1E2A3B"/>
+                </a:solidFill>
+                <a:latin typeface="Consolas" pitchFamily="34" charset="0"/>
+                <a:ea typeface="Consolas" pitchFamily="34" charset="-122"/>
+                <a:cs typeface="Consolas" pitchFamily="34" charset="-120"/>
+              </a:rPr>
+              <a:t>except ConflitoError as erro:</a:t>
+            </a:r>
+            <a:endParaRPr lang="en-US" sz="1200" dirty="0"/>
+          </a:p>
+          <a:p>
+            <a:pPr indent="0" marL="0">
+              <a:lnSpc>
+                <a:spcPct val="125000"/>
+              </a:lnSpc>
+              <a:buNone/>
+            </a:pPr>
+            <a:r>
+              <a:rPr lang="en-US" sz="1200" dirty="0">
+                <a:solidFill>
+                  <a:srgbClr val="1E2A3B"/>
+                </a:solidFill>
+                <a:latin typeface="Consolas" pitchFamily="34" charset="0"/>
+                <a:ea typeface="Consolas" pitchFamily="34" charset="-122"/>
+                <a:cs typeface="Consolas" pitchFamily="34" charset="-120"/>
+              </a:rPr>
+              <a:t>    raise HTTPException(409, str(erro))</a:t>
+            </a:r>
+            <a:endParaRPr lang="en-US" sz="1200" dirty="0"/>
+          </a:p>
+          <a:p>
+            <a:pPr indent="0" marL="0">
+              <a:lnSpc>
+                <a:spcPct val="125000"/>
+              </a:lnSpc>
+              <a:buNone/>
+            </a:pPr>
+            <a:r>
+              <a:rPr lang="en-US" sz="1200" dirty="0">
+                <a:solidFill>
+                  <a:srgbClr val="1E2A3B"/>
+                </a:solidFill>
+                <a:latin typeface="Consolas" pitchFamily="34" charset="0"/>
+                <a:ea typeface="Consolas" pitchFamily="34" charset="-122"/>
+                <a:cs typeface="Consolas" pitchFamily="34" charset="-120"/>
+              </a:rPr>
+              <a:t>except ValueError as erro:</a:t>
+            </a:r>
+            <a:endParaRPr lang="en-US" sz="1200" dirty="0"/>
+          </a:p>
+          <a:p>
+            <a:pPr indent="0" marL="0">
+              <a:lnSpc>
+                <a:spcPct val="125000"/>
+              </a:lnSpc>
+              <a:buNone/>
+            </a:pPr>
+            <a:r>
+              <a:rPr lang="en-US" sz="1200" dirty="0">
+                <a:solidFill>
+                  <a:srgbClr val="1E2A3B"/>
+                </a:solidFill>
+                <a:latin typeface="Consolas" pitchFamily="34" charset="0"/>
+                <a:ea typeface="Consolas" pitchFamily="34" charset="-122"/>
+                <a:cs typeface="Consolas" pitchFamily="34" charset="-120"/>
+              </a:rPr>
+              <a:t>    raise HTTPException(422, str(erro))</a:t>
+            </a:r>
+            <a:endParaRPr lang="en-US" sz="1200" dirty="0"/>
+          </a:p>
+        </p:txBody>
+      </p:sp>
+      <p:sp>
+        <p:nvSpPr>
+          <p:cNvPr id="10" name="anim|6|sobe|47"/>
+          <p:cNvSpPr txBox="1"/>
+          <p:nvPr/>
+        </p:nvSpPr>
+        <p:spPr>
+          <a:xfrm>
+            <a:off x="7467600" y="4191000"/>
+            <a:ext cx="3911600" cy="1016000"/>
+          </a:xfrm>
+          <a:prstGeom prst="rect">
+            <a:avLst/>
+          </a:prstGeom>
+          <a:noFill/>
+          <a:ln/>
+        </p:spPr>
+        <p:txBody>
+          <a:bodyPr wrap="square" lIns="0" tIns="0" rIns="0" bIns="0" rtlCol="0" anchor="t"/>
+          <a:lstStyle/>
+          <a:p>
+            <a:pPr indent="0" marL="0">
+              <a:buNone/>
+            </a:pPr>
+            <a:r>
+              <a:rPr lang="en-US" sz="1600" dirty="0">
+                <a:solidFill>
+                  <a:srgbClr val="4A5568"/>
+                </a:solidFill>
+              </a:rPr>
+              <a:t>Como </a:t>
+            </a:r>
+            <a:pPr indent="0" marL="0">
+              <a:buNone/>
+            </a:pPr>
+            <a:r>
+              <a:rPr lang="en-US" sz="1600" b="1" dirty="0">
+                <a:solidFill>
+                  <a:srgbClr val="4A5568"/>
+                </a:solidFill>
+              </a:rPr>
+              <a:t>ConflitoError</a:t>
+            </a:r>
+            <a:pPr indent="0" marL="0">
+              <a:buNone/>
+            </a:pPr>
+            <a:r>
+              <a:rPr lang="en-US" sz="1600" dirty="0">
+                <a:solidFill>
+                  <a:srgbClr val="4A5568"/>
+                </a:solidFill>
+              </a:rPr>
+              <a:t> herda de </a:t>
+            </a:r>
+            <a:pPr indent="0" marL="0">
+              <a:buNone/>
+            </a:pPr>
+            <a:r>
+              <a:rPr lang="en-US" sz="1600" b="1" dirty="0">
+                <a:solidFill>
+                  <a:srgbClr val="4A5568"/>
+                </a:solidFill>
+              </a:rPr>
+              <a:t>ValueError</a:t>
+            </a:r>
+            <a:pPr indent="0" marL="0">
+              <a:buNone/>
+            </a:pPr>
+            <a:r>
+              <a:rPr lang="en-US" sz="1600" dirty="0">
+                <a:solidFill>
+                  <a:srgbClr val="4A5568"/>
+                </a:solidFill>
+              </a:rPr>
+              <a:t>, o except dele precisa vir antes.</a:t>
+            </a:r>
+            <a:endParaRPr lang="en-US" sz="1600" dirty="0"/>
+          </a:p>
+        </p:txBody>
+      </p:sp>
+    </p:spTree>
+  </p:cSld>
+  <p:clrMapOvr>
+    <a:masterClrMapping/>
+  </p:clrMapOvr>
+</p:sld>
+</file>
+
+<file path=ppt/slides/slide7.xml><?xml version="1.0" encoding="utf-8"?>
+<p:sld xmlns:a="http://schemas.openxmlformats.org/drawingml/2006/main" xmlns:r="http://schemas.openxmlformats.org/officeDocument/2006/relationships" xmlns:p="http://schemas.openxmlformats.org/presentationml/2006/main">
+  <p:cSld name="Slide 7">
+    <p:spTree>
+      <p:nvGrpSpPr>
+        <p:cNvPr id="1" name=""/>
+        <p:cNvGrpSpPr/>
+        <p:nvPr/>
+      </p:nvGrpSpPr>
+      <p:grpSpPr>
+        <a:xfrm>
+          <a:off x="0" y="0"/>
+          <a:ext cx="0" cy="0"/>
+          <a:chOff x="0" y="0"/>
+          <a:chExt cx="0" cy="0"/>
+        </a:xfrm>
+      </p:grpSpPr>
+      <p:sp>
+        <p:nvSpPr>
+          <p:cNvPr id="2" name="Text 1"/>
+          <p:cNvSpPr/>
+          <p:nvPr>
+            <p:ph idx="101" type="title" hasCustomPrompt="1"/>
+          </p:nvPr>
+        </p:nvSpPr>
+        <p:spPr>
+          <a:xfrm>
+            <a:off x="812800" y="762000"/>
+            <a:ext cx="10566400" cy="635000"/>
+          </a:xfrm>
+          <a:prstGeom prst="rect">
+            <a:avLst/>
+          </a:prstGeom>
+          <a:noFill/>
+          <a:ln/>
+        </p:spPr>
+        <p:txBody>
+          <a:bodyPr wrap="square" lIns="0" tIns="0" rIns="0" bIns="0" rtlCol="0" anchor="t"/>
+          <a:lstStyle/>
+          <a:p>
+            <a:pPr algn="l" indent="0" marL="0">
+              <a:buNone/>
+            </a:pPr>
+            <a:r>
+              <a:rPr lang="en-US" sz="3600" b="1" dirty="0">
+                <a:solidFill>
+                  <a:srgbClr val="1E2A3B"/>
+                </a:solidFill>
+              </a:rPr>
+              <a:t>Herança</a:t>
+            </a:r>
+            <a:endParaRPr lang="en-US" sz="3600" dirty="0"/>
+          </a:p>
+        </p:txBody>
+      </p:sp>
+      <p:sp>
+        <p:nvSpPr>
+          <p:cNvPr id="3" name="Text 1"/>
+          <p:cNvSpPr/>
+          <p:nvPr>
+            <p:ph idx="102" type="body" hasCustomPrompt="1"/>
+          </p:nvPr>
+        </p:nvSpPr>
+        <p:spPr>
+          <a:xfrm>
+            <a:off x="7569200" y="6197600"/>
+            <a:ext cx="3810000" cy="279400"/>
+          </a:xfrm>
+          <a:prstGeom prst="rect">
+            <a:avLst/>
+          </a:prstGeom>
+          <a:noFill/>
+          <a:ln/>
+        </p:spPr>
+        <p:txBody>
+          <a:bodyPr wrap="square" lIns="0" tIns="0" rIns="0" bIns="0" rtlCol="0" anchor="ctr"/>
+          <a:lstStyle/>
+          <a:p>
+            <a:pPr algn="r" indent="0" marL="0">
+              <a:buNone/>
+            </a:pPr>
+            <a:r>
+              <a:rPr lang="en-US" sz="1200" dirty="0">
+                <a:solidFill>
+                  <a:srgbClr val="667085"/>
+                </a:solidFill>
+              </a:rPr>
+              <a:t>Herança · 07</a:t>
+            </a:r>
+            <a:endParaRPr lang="en-US" sz="1200" dirty="0"/>
+          </a:p>
+        </p:txBody>
+      </p:sp>
+      <p:sp>
+        <p:nvSpPr>
+          <p:cNvPr id="5" name="anim|1|sobe|48"/>
+          <p:cNvSpPr/>
+          <p:nvPr/>
+        </p:nvSpPr>
+        <p:spPr>
+          <a:xfrm>
+            <a:off x="812800" y="1587500"/>
+            <a:ext cx="6731000" cy="3175000"/>
+          </a:xfrm>
+          <a:prstGeom prst="roundRect">
+            <a:avLst>
+              <a:gd name="adj" fmla="val 4032"/>
+            </a:avLst>
+          </a:prstGeom>
+          <a:solidFill>
+            <a:srgbClr val="F1E7D0"/>
+          </a:solidFill>
+          <a:ln/>
+        </p:spPr>
+        <p:txBody>
+          <a:bodyPr wrap="square" lIns="254000" tIns="330200" rIns="330200" bIns="254000" rtlCol="0" anchor="ctr"/>
+          <a:lstStyle/>
+          <a:p>
+            <a:pPr indent="0" marL="0">
+              <a:lnSpc>
+                <a:spcPct val="125000"/>
+              </a:lnSpc>
+              <a:buNone/>
+            </a:pPr>
+            <a:r>
+              <a:rPr lang="en-US" sz="1200" dirty="0">
+                <a:solidFill>
+                  <a:srgbClr val="1E2A3B"/>
+                </a:solidFill>
+                <a:latin typeface="Consolas" pitchFamily="34" charset="0"/>
+                <a:ea typeface="Consolas" pitchFamily="34" charset="-122"/>
+                <a:cs typeface="Consolas" pitchFamily="34" charset="-120"/>
+              </a:rPr>
+              <a:t>class Cao(Animal):</a:t>
+            </a:r>
+            <a:endParaRPr lang="en-US" sz="1200" dirty="0"/>
+          </a:p>
+          <a:p>
+            <a:pPr indent="0" marL="0">
+              <a:lnSpc>
+                <a:spcPct val="125000"/>
+              </a:lnSpc>
+              <a:buNone/>
+            </a:pPr>
+            <a:r>
+              <a:rPr lang="en-US" sz="1200" dirty="0">
+                <a:solidFill>
+                  <a:srgbClr val="1E2A3B"/>
+                </a:solidFill>
+                <a:latin typeface="Consolas" pitchFamily="34" charset="0"/>
+                <a:ea typeface="Consolas" pitchFamily="34" charset="-122"/>
+                <a:cs typeface="Consolas" pitchFamily="34" charset="-120"/>
+              </a:rPr>
+              <a:t>    ESPECIE = 'cao'</a:t>
+            </a:r>
+            <a:endParaRPr lang="en-US" sz="1200" dirty="0"/>
+          </a:p>
+          <a:p>
+            <a:pPr indent="0" marL="0">
+              <a:lnSpc>
+                <a:spcPct val="125000"/>
+              </a:lnSpc>
+              <a:buNone/>
+            </a:pPr>
+            <a:r>
+              <a:rPr lang="en-US" sz="1200" dirty="0">
+                <a:solidFill>
+                  <a:srgbClr val="1E2A3B"/>
+                </a:solidFill>
+                <a:latin typeface="Consolas" pitchFamily="34" charset="0"/>
+                <a:ea typeface="Consolas" pitchFamily="34" charset="-122"/>
+                <a:cs typeface="Consolas" pitchFamily="34" charset="-120"/>
+              </a:rPr>
+              <a:t>    TAXA_ADOCAO = 80.0</a:t>
+            </a:r>
+            <a:endParaRPr lang="en-US" sz="1200" dirty="0"/>
+          </a:p>
+          <a:p>
+            <a:pPr indent="0" marL="0">
+              <a:lnSpc>
+                <a:spcPct val="125000"/>
+              </a:lnSpc>
+              <a:buNone/>
+            </a:pPr>
+            <a:r>
+              <a:rPr lang="en-US" sz="1200" dirty="0">
+                <a:solidFill>
+                  <a:srgbClr val="1E2A3B"/>
+                </a:solidFill>
+                <a:latin typeface="Consolas" pitchFamily="34" charset="0"/>
+                <a:ea typeface="Consolas" pitchFamily="34" charset="-122"/>
+                <a:cs typeface="Consolas" pitchFamily="34" charset="-120"/>
+              </a:rPr>
+              <a:t> </a:t>
+            </a:r>
+            <a:endParaRPr lang="en-US" sz="1200" dirty="0"/>
+          </a:p>
+          <a:p>
+            <a:pPr indent="0" marL="0">
+              <a:lnSpc>
+                <a:spcPct val="125000"/>
+              </a:lnSpc>
+              <a:buNone/>
+            </a:pPr>
+            <a:r>
+              <a:rPr lang="en-US" sz="1200" dirty="0">
+                <a:solidFill>
+                  <a:srgbClr val="1E2A3B"/>
+                </a:solidFill>
+                <a:latin typeface="Consolas" pitchFamily="34" charset="0"/>
+                <a:ea typeface="Consolas" pitchFamily="34" charset="-122"/>
+                <a:cs typeface="Consolas" pitchFamily="34" charset="-120"/>
+              </a:rPr>
+              <a:t>    def verificar_adotante(self, adotante):</a:t>
+            </a:r>
+            <a:endParaRPr lang="en-US" sz="1200" dirty="0"/>
+          </a:p>
+          <a:p>
+            <a:pPr indent="0" marL="0">
+              <a:lnSpc>
+                <a:spcPct val="125000"/>
+              </a:lnSpc>
+              <a:buNone/>
+            </a:pPr>
+            <a:r>
+              <a:rPr lang="en-US" sz="1200" b="1" dirty="0">
+                <a:solidFill>
+                  <a:srgbClr val="1D5FD1"/>
+                </a:solidFill>
+                <a:latin typeface="Consolas" pitchFamily="34" charset="0"/>
+                <a:ea typeface="Consolas" pitchFamily="34" charset="-122"/>
+                <a:cs typeface="Consolas" pitchFamily="34" charset="-120"/>
+              </a:rPr>
+              <a:t>        super().verificar_adotante(adotante)</a:t>
+            </a:r>
+            <a:endParaRPr lang="en-US" sz="1200" dirty="0"/>
+          </a:p>
+          <a:p>
+            <a:pPr indent="0" marL="0">
+              <a:lnSpc>
+                <a:spcPct val="125000"/>
+              </a:lnSpc>
+              <a:buNone/>
+            </a:pPr>
+            <a:r>
+              <a:rPr lang="en-US" sz="1200" dirty="0">
+                <a:solidFill>
+                  <a:srgbClr val="1E2A3B"/>
+                </a:solidFill>
+                <a:latin typeface="Consolas" pitchFamily="34" charset="0"/>
+                <a:ea typeface="Consolas" pitchFamily="34" charset="-122"/>
+                <a:cs typeface="Consolas" pitchFamily="34" charset="-120"/>
+              </a:rPr>
+              <a:t>        if self._porte == 'grande' and not adotante.mostrar_quintal():</a:t>
+            </a:r>
+            <a:endParaRPr lang="en-US" sz="1200" dirty="0"/>
+          </a:p>
+          <a:p>
+            <a:pPr indent="0" marL="0">
+              <a:lnSpc>
+                <a:spcPct val="125000"/>
+              </a:lnSpc>
+              <a:buNone/>
+            </a:pPr>
+            <a:r>
+              <a:rPr lang="en-US" sz="1200" dirty="0">
+                <a:solidFill>
+                  <a:srgbClr val="1E2A3B"/>
+                </a:solidFill>
+                <a:latin typeface="Consolas" pitchFamily="34" charset="0"/>
+                <a:ea typeface="Consolas" pitchFamily="34" charset="-122"/>
+                <a:cs typeface="Consolas" pitchFamily="34" charset="-120"/>
+              </a:rPr>
+              <a:t>            raise ValueError('cão de porte grande exige ...')</a:t>
+            </a:r>
+            <a:endParaRPr lang="en-US" sz="1200" dirty="0"/>
+          </a:p>
+        </p:txBody>
+      </p:sp>
+      <p:sp>
+        <p:nvSpPr>
+          <p:cNvPr id="6" name="anim|2|sobe|49"/>
+          <p:cNvSpPr/>
+          <p:nvPr/>
+        </p:nvSpPr>
+        <p:spPr>
+          <a:xfrm>
+            <a:off x="7747000" y="1587500"/>
+            <a:ext cx="3632200" cy="1651000"/>
+          </a:xfrm>
+          <a:prstGeom prst="roundRect">
+            <a:avLst>
+              <a:gd name="adj" fmla="val 7754"/>
+            </a:avLst>
+          </a:prstGeom>
+          <a:solidFill>
+            <a:srgbClr val="DCE8F7"/>
+          </a:solidFill>
+          <a:ln/>
+        </p:spPr>
+        <p:txBody>
+          <a:bodyPr wrap="square" lIns="254000" tIns="254000" rIns="254000" bIns="254000" rtlCol="0" anchor="t"/>
+          <a:lstStyle/>
+          <a:p>
+            <a:pPr indent="0" marL="0">
+              <a:spcAft>
+                <a:spcPts val="800"/>
+              </a:spcAft>
+              <a:buNone/>
+            </a:pPr>
+            <a:r>
+              <a:rPr lang="en-US" sz="1200" b="1" spc="200" kern="0" dirty="0">
+                <a:solidFill>
+                  <a:srgbClr val="1D5FD1"/>
+                </a:solidFill>
+              </a:rPr>
+              <a:t>SUPER()</a:t>
+            </a:r>
+            <a:endParaRPr lang="en-US" sz="1200" dirty="0"/>
+          </a:p>
+          <a:p>
+            <a:pPr indent="0" marL="0">
+              <a:buNone/>
+            </a:pPr>
+            <a:r>
+              <a:rPr lang="en-US" sz="1600" dirty="0">
+                <a:solidFill>
+                  <a:srgbClr val="1E2A3B"/>
+                </a:solidFill>
+              </a:rPr>
+              <a:t>Executa a verificação da classe Animal: se o animal está disponível e se o adotante ainda pode adotar.</a:t>
+            </a:r>
+            <a:endParaRPr lang="en-US" sz="1200" dirty="0"/>
+          </a:p>
+        </p:txBody>
+      </p:sp>
+      <p:sp>
+        <p:nvSpPr>
+          <p:cNvPr id="7" name="anim|3|sobe|50"/>
+          <p:cNvSpPr/>
+          <p:nvPr/>
+        </p:nvSpPr>
+        <p:spPr>
+          <a:xfrm>
+            <a:off x="7747000" y="3429000"/>
+            <a:ext cx="3632200" cy="1333500"/>
+          </a:xfrm>
+          <a:prstGeom prst="roundRect">
+            <a:avLst>
+              <a:gd name="adj" fmla="val 9600"/>
+            </a:avLst>
+          </a:prstGeom>
+          <a:solidFill>
+            <a:srgbClr val="FDE7B0"/>
+          </a:solidFill>
+          <a:ln/>
+        </p:spPr>
+        <p:txBody>
+          <a:bodyPr wrap="square" lIns="254000" tIns="254000" rIns="254000" bIns="254000" rtlCol="0" anchor="t"/>
+          <a:lstStyle/>
+          <a:p>
+            <a:pPr indent="0" marL="0">
+              <a:spcAft>
+                <a:spcPts val="800"/>
+              </a:spcAft>
+              <a:buNone/>
+            </a:pPr>
+            <a:r>
+              <a:rPr lang="en-US" sz="1200" b="1" spc="200" kern="0" dirty="0">
+                <a:solidFill>
+                  <a:srgbClr val="8A3B06"/>
+                </a:solidFill>
+              </a:rPr>
+              <a:t>SEM O SUPER()</a:t>
+            </a:r>
+            <a:endParaRPr lang="en-US" sz="1200" dirty="0"/>
+          </a:p>
+          <a:p>
+            <a:pPr indent="0" marL="0">
+              <a:buNone/>
+            </a:pPr>
+            <a:r>
+              <a:rPr lang="en-US" sz="1600" dirty="0">
+                <a:solidFill>
+                  <a:srgbClr val="1E2A3B"/>
+                </a:solidFill>
+              </a:rPr>
+              <a:t>Essas verificações não valeriam para cães.</a:t>
+            </a:r>
+            <a:endParaRPr lang="en-US" sz="1200" dirty="0"/>
+          </a:p>
+        </p:txBody>
+      </p:sp>
+      <p:sp>
+        <p:nvSpPr>
+          <p:cNvPr id="8" name="anim|4|sobe|51"/>
+          <p:cNvSpPr txBox="1"/>
+          <p:nvPr/>
+        </p:nvSpPr>
+        <p:spPr>
+          <a:xfrm>
+            <a:off x="812800" y="5016500"/>
+            <a:ext cx="10566400" cy="571500"/>
+          </a:xfrm>
+          <a:prstGeom prst="rect">
+            <a:avLst/>
+          </a:prstGeom>
+          <a:noFill/>
+          <a:ln/>
+        </p:spPr>
+        <p:txBody>
+          <a:bodyPr wrap="square" lIns="0" tIns="0" rIns="0" bIns="0" rtlCol="0" anchor="t"/>
+          <a:lstStyle/>
+          <a:p>
+            <a:pPr indent="0" marL="0">
+              <a:buNone/>
+            </a:pPr>
+            <a:r>
+              <a:rPr lang="en-US" sz="1600" dirty="0">
+                <a:solidFill>
+                  <a:srgbClr val="4A5568"/>
+                </a:solidFill>
+              </a:rPr>
+              <a:t>A </a:t>
+            </a:r>
+            <a:pPr indent="0" marL="0">
+              <a:buNone/>
+            </a:pPr>
+            <a:r>
+              <a:rPr lang="en-US" sz="1600" b="1" dirty="0">
+                <a:solidFill>
+                  <a:srgbClr val="4A5568"/>
+                </a:solidFill>
+              </a:rPr>
+              <a:t>descricao()</a:t>
+            </a:r>
+            <a:pPr indent="0" marL="0">
+              <a:buNone/>
+            </a:pPr>
+            <a:r>
+              <a:rPr lang="en-US" sz="1600" dirty="0">
+                <a:solidFill>
+                  <a:srgbClr val="4A5568"/>
+                </a:solidFill>
+              </a:rPr>
+              <a:t> também usa </a:t>
+            </a:r>
+            <a:pPr indent="0" marL="0">
+              <a:buNone/>
+            </a:pPr>
+            <a:r>
+              <a:rPr lang="en-US" sz="1600" b="1" dirty="0">
+                <a:solidFill>
+                  <a:srgbClr val="4A5568"/>
+                </a:solidFill>
+              </a:rPr>
+              <a:t>super()</a:t>
+            </a:r>
+            <a:pPr indent="0" marL="0">
+              <a:buNone/>
+            </a:pPr>
+            <a:r>
+              <a:rPr lang="en-US" sz="1600" dirty="0">
+                <a:solidFill>
+                  <a:srgbClr val="4A5568"/>
+                </a:solidFill>
+              </a:rPr>
+              <a:t>: pega o texto da classe Animal e acrescenta a parte da espécie.</a:t>
+            </a:r>
+            <a:endParaRPr lang="en-US" sz="1600" dirty="0"/>
           </a:p>
         </p:txBody>
       </p:sp>
@@ -10100,7 +8096,7 @@
                   <a:srgbClr val="1E2A3B"/>
                 </a:solidFill>
               </a:rPr>
-              <a:t>Códigos de resposta</a:t>
+              <a:t>Polimorfismo</a:t>
             </a:r>
             <a:endParaRPr lang="en-US" sz="3600" dirty="0"/>
           </a:p>
@@ -10138,7 +8134,7 @@
                   <a:srgbClr val="667085"/>
                 </a:solidFill>
               </a:rPr>
-              <a:t>Códigos HTTP · 08</a:t>
+              <a:t>Polimorfismo · 08</a:t>
             </a:r>
             <a:endParaRPr lang="en-US" sz="1200" dirty="0"/>
           </a:p>
@@ -10146,92 +8142,221 @@
       </p:sp>
       <p:sp>
         <p:nvSpPr>
-          <p:cNvPr id="5" name="anim|1|zoom|52"/>
+          <p:cNvPr id="5" name="anim|1|sobe|52"/>
           <p:cNvSpPr/>
           <p:nvPr/>
         </p:nvSpPr>
         <p:spPr>
           <a:xfrm>
             <a:off x="812800" y="1587500"/>
-            <a:ext cx="2489200" cy="1905000"/>
+            <a:ext cx="5207000" cy="2794000"/>
           </a:xfrm>
           <a:prstGeom prst="roundRect">
             <a:avLst>
-              <a:gd name="adj" fmla="val 6720"/>
+              <a:gd name="adj" fmla="val 4582"/>
             </a:avLst>
           </a:prstGeom>
           <a:solidFill>
-            <a:srgbClr val="DCE8F7"/>
+            <a:srgbClr val="F1E7D0"/>
           </a:solidFill>
           <a:ln/>
         </p:spPr>
         <p:txBody>
-          <a:bodyPr wrap="square" lIns="254000" tIns="254000" rIns="254000" bIns="254000" rtlCol="0" anchor="t"/>
+          <a:bodyPr wrap="square" lIns="254000" tIns="330200" rIns="330200" bIns="254000" rtlCol="0" anchor="t"/>
           <a:lstStyle/>
           <a:p>
             <a:pPr indent="0" marL="0">
               <a:spcAft>
-                <a:spcPts val="600"/>
+                <a:spcPts val="1000"/>
               </a:spcAft>
               <a:buNone/>
             </a:pPr>
             <a:r>
-              <a:rPr lang="en-US" sz="3600" b="1" dirty="0">
-                <a:solidFill>
-                  <a:srgbClr val="1D5FD1"/>
-                </a:solidFill>
-              </a:rPr>
-              <a:t>201</a:t>
-            </a:r>
-            <a:endParaRPr lang="en-US" sz="3600" dirty="0"/>
-          </a:p>
-          <a:p>
-            <a:pPr indent="0" marL="0">
-              <a:spcAft>
-                <a:spcPts val="600"/>
-              </a:spcAft>
-              <a:buNone/>
-            </a:pPr>
-            <a:r>
-              <a:rPr lang="en-US" sz="1600" b="1" dirty="0">
+              <a:rPr lang="en-US" sz="1200" b="1" dirty="0">
+                <a:solidFill>
+                  <a:srgbClr val="8A3B06"/>
+                </a:solidFill>
+              </a:rPr>
+              <a:t>app/models/animal.py</a:t>
+            </a:r>
+            <a:endParaRPr lang="en-US" sz="1200" dirty="0"/>
+          </a:p>
+          <a:p>
+            <a:pPr indent="0" marL="0">
+              <a:lnSpc>
+                <a:spcPct val="125000"/>
+              </a:lnSpc>
+              <a:buNone/>
+            </a:pPr>
+            <a:r>
+              <a:rPr lang="en-US" sz="1200" dirty="0">
                 <a:solidFill>
                   <a:srgbClr val="1E2A3B"/>
                 </a:solidFill>
-              </a:rPr>
-              <a:t>Criado</a:t>
-            </a:r>
-            <a:endParaRPr lang="en-US" sz="3600" dirty="0"/>
-          </a:p>
-          <a:p>
-            <a:pPr indent="0" marL="0">
+                <a:latin typeface="Consolas" pitchFamily="34" charset="0"/>
+                <a:ea typeface="Consolas" pitchFamily="34" charset="-122"/>
+                <a:cs typeface="Consolas" pitchFamily="34" charset="-120"/>
+              </a:rPr>
+              <a:t>ESPECIES = {</a:t>
+            </a:r>
+            <a:endParaRPr lang="en-US" sz="1200" dirty="0"/>
+          </a:p>
+          <a:p>
+            <a:pPr indent="0" marL="0">
+              <a:lnSpc>
+                <a:spcPct val="125000"/>
+              </a:lnSpc>
               <a:buNone/>
             </a:pPr>
             <a:r>
               <a:rPr lang="en-US" sz="1200" dirty="0">
                 <a:solidFill>
-                  <a:srgbClr val="33415C"/>
-                </a:solidFill>
-              </a:rPr>
-              <a:t>Adoção registrada.</a:t>
-            </a:r>
-            <a:endParaRPr lang="en-US" sz="3600" dirty="0"/>
+                  <a:srgbClr val="1E2A3B"/>
+                </a:solidFill>
+                <a:latin typeface="Consolas" pitchFamily="34" charset="0"/>
+                <a:ea typeface="Consolas" pitchFamily="34" charset="-122"/>
+                <a:cs typeface="Consolas" pitchFamily="34" charset="-120"/>
+              </a:rPr>
+              <a:t>    'cao': Cao,</a:t>
+            </a:r>
+            <a:endParaRPr lang="en-US" sz="1200" dirty="0"/>
+          </a:p>
+          <a:p>
+            <a:pPr indent="0" marL="0">
+              <a:lnSpc>
+                <a:spcPct val="125000"/>
+              </a:lnSpc>
+              <a:buNone/>
+            </a:pPr>
+            <a:r>
+              <a:rPr lang="en-US" sz="1200" dirty="0">
+                <a:solidFill>
+                  <a:srgbClr val="1E2A3B"/>
+                </a:solidFill>
+                <a:latin typeface="Consolas" pitchFamily="34" charset="0"/>
+                <a:ea typeface="Consolas" pitchFamily="34" charset="-122"/>
+                <a:cs typeface="Consolas" pitchFamily="34" charset="-120"/>
+              </a:rPr>
+              <a:t>    'gato': Gato,</a:t>
+            </a:r>
+            <a:endParaRPr lang="en-US" sz="1200" dirty="0"/>
+          </a:p>
+          <a:p>
+            <a:pPr indent="0" marL="0">
+              <a:lnSpc>
+                <a:spcPct val="125000"/>
+              </a:lnSpc>
+              <a:buNone/>
+            </a:pPr>
+            <a:r>
+              <a:rPr lang="en-US" sz="1200" dirty="0">
+                <a:solidFill>
+                  <a:srgbClr val="1E2A3B"/>
+                </a:solidFill>
+                <a:latin typeface="Consolas" pitchFamily="34" charset="0"/>
+                <a:ea typeface="Consolas" pitchFamily="34" charset="-122"/>
+                <a:cs typeface="Consolas" pitchFamily="34" charset="-120"/>
+              </a:rPr>
+              <a:t>}</a:t>
+            </a:r>
+            <a:endParaRPr lang="en-US" sz="1200" dirty="0"/>
+          </a:p>
+          <a:p>
+            <a:pPr indent="0" marL="0">
+              <a:lnSpc>
+                <a:spcPct val="125000"/>
+              </a:lnSpc>
+              <a:buNone/>
+            </a:pPr>
+            <a:r>
+              <a:rPr lang="en-US" sz="1200" dirty="0">
+                <a:solidFill>
+                  <a:srgbClr val="1E2A3B"/>
+                </a:solidFill>
+                <a:latin typeface="Consolas" pitchFamily="34" charset="0"/>
+                <a:ea typeface="Consolas" pitchFamily="34" charset="-122"/>
+                <a:cs typeface="Consolas" pitchFamily="34" charset="-120"/>
+              </a:rPr>
+              <a:t>classe = ESPECIES[a['especie']]</a:t>
+            </a:r>
+            <a:endParaRPr lang="en-US" sz="1200" dirty="0"/>
+          </a:p>
+          <a:p>
+            <a:pPr indent="0" marL="0">
+              <a:lnSpc>
+                <a:spcPct val="125000"/>
+              </a:lnSpc>
+              <a:buNone/>
+            </a:pPr>
+            <a:r>
+              <a:rPr lang="en-US" sz="1200" dirty="0">
+                <a:solidFill>
+                  <a:srgbClr val="1E2A3B"/>
+                </a:solidFill>
+                <a:latin typeface="Consolas" pitchFamily="34" charset="0"/>
+                <a:ea typeface="Consolas" pitchFamily="34" charset="-122"/>
+                <a:cs typeface="Consolas" pitchFamily="34" charset="-120"/>
+              </a:rPr>
+              <a:t>animal = classe(...)</a:t>
+            </a:r>
+            <a:endParaRPr lang="en-US" sz="1200" dirty="0"/>
+          </a:p>
+          <a:p>
+            <a:pPr indent="0" marL="0">
+              <a:lnSpc>
+                <a:spcPct val="125000"/>
+              </a:lnSpc>
+              <a:buNone/>
+            </a:pPr>
+            <a:r>
+              <a:rPr lang="en-US" sz="1200" dirty="0">
+                <a:solidFill>
+                  <a:srgbClr val="1E2A3B"/>
+                </a:solidFill>
+                <a:latin typeface="Consolas" pitchFamily="34" charset="0"/>
+                <a:ea typeface="Consolas" pitchFamily="34" charset="-122"/>
+                <a:cs typeface="Consolas" pitchFamily="34" charset="-120"/>
+              </a:rPr>
+              <a:t>animal.mostrar_taxa()</a:t>
+            </a:r>
+            <a:endParaRPr lang="en-US" sz="1200" dirty="0"/>
+          </a:p>
+          <a:p>
+            <a:pPr indent="0" marL="0">
+              <a:lnSpc>
+                <a:spcPct val="125000"/>
+              </a:lnSpc>
+              <a:buNone/>
+            </a:pPr>
+            <a:r>
+              <a:rPr lang="en-US" sz="1200" dirty="0">
+                <a:solidFill>
+                  <a:srgbClr val="5B6474"/>
+                </a:solidFill>
+                <a:latin typeface="Consolas" pitchFamily="34" charset="0"/>
+                <a:ea typeface="Consolas" pitchFamily="34" charset="-122"/>
+                <a:cs typeface="Consolas" pitchFamily="34" charset="-120"/>
+              </a:rPr>
+              <a:t># 80.0 para Cao, 50.0 para Gato</a:t>
+            </a:r>
+            <a:endParaRPr lang="en-US" sz="1200" dirty="0"/>
           </a:p>
         </p:txBody>
       </p:sp>
       <p:sp>
         <p:nvSpPr>
-          <p:cNvPr id="6" name="anim|2|zoom|53"/>
+          <p:cNvPr id="6" name="anim|2|sobe|53"/>
           <p:cNvSpPr/>
           <p:nvPr/>
         </p:nvSpPr>
         <p:spPr>
           <a:xfrm>
-            <a:off x="3505200" y="1587500"/>
-            <a:ext cx="2489200" cy="1905000"/>
+            <a:off x="6223000" y="1587500"/>
+            <a:ext cx="5156200" cy="2794000"/>
           </a:xfrm>
           <a:prstGeom prst="roundRect">
             <a:avLst>
-              <a:gd name="adj" fmla="val 6720"/>
+              <a:gd name="adj" fmla="val 4582"/>
             </a:avLst>
           </a:prstGeom>
           <a:solidFill>
@@ -10244,238 +8369,25 @@
           </a:ln>
         </p:spPr>
         <p:txBody>
-          <a:bodyPr wrap="square" lIns="254000" tIns="254000" rIns="254000" bIns="254000" rtlCol="0" anchor="t"/>
+          <a:bodyPr wrap="square" lIns="254000" tIns="330200" rIns="330200" bIns="254000" rtlCol="0" anchor="t"/>
           <a:lstStyle/>
           <a:p>
             <a:pPr indent="0" marL="0">
               <a:spcAft>
-                <a:spcPts val="600"/>
+                <a:spcPts val="1000"/>
               </a:spcAft>
               <a:buNone/>
             </a:pPr>
             <a:r>
-              <a:rPr lang="en-US" sz="3600" b="1" dirty="0">
+              <a:rPr lang="en-US" sz="1200" b="1" dirty="0">
                 <a:solidFill>
                   <a:srgbClr val="B45309"/>
                 </a:solidFill>
               </a:rPr>
-              <a:t>404</a:t>
-            </a:r>
-            <a:endParaRPr lang="en-US" sz="3600" dirty="0"/>
-          </a:p>
-          <a:p>
-            <a:pPr indent="0" marL="0">
-              <a:spcAft>
-                <a:spcPts val="600"/>
-              </a:spcAft>
-              <a:buNone/>
-            </a:pPr>
-            <a:r>
-              <a:rPr lang="en-US" sz="1600" b="1" dirty="0">
-                <a:solidFill>
-                  <a:srgbClr val="1E2A3B"/>
-                </a:solidFill>
-              </a:rPr>
-              <a:t>Não encontrado</a:t>
-            </a:r>
-            <a:endParaRPr lang="en-US" sz="3600" dirty="0"/>
-          </a:p>
-          <a:p>
-            <a:pPr indent="0" marL="0">
-              <a:buNone/>
-            </a:pPr>
-            <a:r>
-              <a:rPr lang="en-US" sz="1200" dirty="0">
-                <a:solidFill>
-                  <a:srgbClr val="4A5568"/>
-                </a:solidFill>
-              </a:rPr>
-              <a:t>Animal ou adotante inexistente. O controller retornou None.</a:t>
-            </a:r>
-            <a:endParaRPr lang="en-US" sz="3600" dirty="0"/>
-          </a:p>
-        </p:txBody>
-      </p:sp>
-      <p:sp>
-        <p:nvSpPr>
-          <p:cNvPr id="7" name="anim|3|zoom|54"/>
-          <p:cNvSpPr/>
-          <p:nvPr/>
-        </p:nvSpPr>
-        <p:spPr>
-          <a:xfrm>
-            <a:off x="6197600" y="1587500"/>
-            <a:ext cx="2489200" cy="1905000"/>
-          </a:xfrm>
-          <a:prstGeom prst="roundRect">
-            <a:avLst>
-              <a:gd name="adj" fmla="val 6720"/>
-            </a:avLst>
-          </a:prstGeom>
-          <a:solidFill>
-            <a:srgbClr val="FFFDF8"/>
-          </a:solidFill>
-          <a:ln w="12700">
-            <a:solidFill>
-              <a:srgbClr val="E8DCC0"/>
-            </a:solidFill>
-          </a:ln>
-        </p:spPr>
-        <p:txBody>
-          <a:bodyPr wrap="square" lIns="254000" tIns="254000" rIns="254000" bIns="254000" rtlCol="0" anchor="t"/>
-          <a:lstStyle/>
-          <a:p>
-            <a:pPr indent="0" marL="0">
-              <a:spcAft>
-                <a:spcPts val="600"/>
-              </a:spcAft>
-              <a:buNone/>
-            </a:pPr>
-            <a:r>
-              <a:rPr lang="en-US" sz="3600" b="1" dirty="0">
-                <a:solidFill>
-                  <a:srgbClr val="B45309"/>
-                </a:solidFill>
-              </a:rPr>
-              <a:t>409</a:t>
-            </a:r>
-            <a:endParaRPr lang="en-US" sz="3600" dirty="0"/>
-          </a:p>
-          <a:p>
-            <a:pPr indent="0" marL="0">
-              <a:spcAft>
-                <a:spcPts val="600"/>
-              </a:spcAft>
-              <a:buNone/>
-            </a:pPr>
-            <a:r>
-              <a:rPr lang="en-US" sz="1600" b="1" dirty="0">
-                <a:solidFill>
-                  <a:srgbClr val="1E2A3B"/>
-                </a:solidFill>
-              </a:rPr>
-              <a:t>Conflito</a:t>
-            </a:r>
-            <a:endParaRPr lang="en-US" sz="3600" dirty="0"/>
-          </a:p>
-          <a:p>
-            <a:pPr indent="0" marL="0">
-              <a:buNone/>
-            </a:pPr>
-            <a:r>
-              <a:rPr lang="en-US" sz="1200" dirty="0">
-                <a:solidFill>
-                  <a:srgbClr val="4A5568"/>
-                </a:solidFill>
-              </a:rPr>
-              <a:t>Animal já adotado ou adotante com 2 adoções.</a:t>
-            </a:r>
-            <a:endParaRPr lang="en-US" sz="3600" dirty="0"/>
-          </a:p>
-        </p:txBody>
-      </p:sp>
-      <p:sp>
-        <p:nvSpPr>
-          <p:cNvPr id="8" name="anim|4|zoom|55"/>
-          <p:cNvSpPr/>
-          <p:nvPr/>
-        </p:nvSpPr>
-        <p:spPr>
-          <a:xfrm>
-            <a:off x="8890000" y="1587500"/>
-            <a:ext cx="2489200" cy="1905000"/>
-          </a:xfrm>
-          <a:prstGeom prst="roundRect">
-            <a:avLst>
-              <a:gd name="adj" fmla="val 6720"/>
-            </a:avLst>
-          </a:prstGeom>
-          <a:solidFill>
-            <a:srgbClr val="FFFDF8"/>
-          </a:solidFill>
-          <a:ln w="12700">
-            <a:solidFill>
-              <a:srgbClr val="E8DCC0"/>
-            </a:solidFill>
-          </a:ln>
-        </p:spPr>
-        <p:txBody>
-          <a:bodyPr wrap="square" lIns="254000" tIns="254000" rIns="254000" bIns="254000" rtlCol="0" anchor="t"/>
-          <a:lstStyle/>
-          <a:p>
-            <a:pPr indent="0" marL="0">
-              <a:spcAft>
-                <a:spcPts val="600"/>
-              </a:spcAft>
-              <a:buNone/>
-            </a:pPr>
-            <a:r>
-              <a:rPr lang="en-US" sz="3600" b="1" dirty="0">
-                <a:solidFill>
-                  <a:srgbClr val="B45309"/>
-                </a:solidFill>
-              </a:rPr>
-              <a:t>422</a:t>
-            </a:r>
-            <a:endParaRPr lang="en-US" sz="3600" dirty="0"/>
-          </a:p>
-          <a:p>
-            <a:pPr indent="0" marL="0">
-              <a:spcAft>
-                <a:spcPts val="600"/>
-              </a:spcAft>
-              <a:buNone/>
-            </a:pPr>
-            <a:r>
-              <a:rPr lang="en-US" sz="1600" b="1" dirty="0">
-                <a:solidFill>
-                  <a:srgbClr val="1E2A3B"/>
-                </a:solidFill>
-              </a:rPr>
-              <a:t>Regra violada</a:t>
-            </a:r>
-            <a:endParaRPr lang="en-US" sz="3600" dirty="0"/>
-          </a:p>
-          <a:p>
-            <a:pPr indent="0" marL="0">
-              <a:buNone/>
-            </a:pPr>
-            <a:r>
-              <a:rPr lang="en-US" sz="1200" dirty="0">
-                <a:solidFill>
-                  <a:srgbClr val="4A5568"/>
-                </a:solidFill>
-              </a:rPr>
-              <a:t>Cão grande sem quintal ou data vazia.</a:t>
-            </a:r>
-            <a:endParaRPr lang="en-US" sz="3600" dirty="0"/>
-          </a:p>
-        </p:txBody>
-      </p:sp>
-      <p:sp>
-        <p:nvSpPr>
-          <p:cNvPr id="9" name="anim|5|sobe|56"/>
-          <p:cNvSpPr/>
-          <p:nvPr/>
-        </p:nvSpPr>
-        <p:spPr>
-          <a:xfrm>
-            <a:off x="812800" y="3810000"/>
-            <a:ext cx="6350000" cy="1714500"/>
-          </a:xfrm>
-          <a:prstGeom prst="roundRect">
-            <a:avLst>
-              <a:gd name="adj" fmla="val 7467"/>
-            </a:avLst>
-          </a:prstGeom>
-          <a:solidFill>
-            <a:srgbClr val="F1E7D0"/>
-          </a:solidFill>
-          <a:ln/>
-        </p:spPr>
-        <p:txBody>
-          <a:bodyPr wrap="square" lIns="203200" tIns="304800" rIns="304800" bIns="203200" rtlCol="0" anchor="ctr"/>
-          <a:lstStyle/>
+              <a:t>Sem polimorfismo, teria um if por espécie:</a:t>
+            </a:r>
+            <a:endParaRPr lang="en-US" sz="1200" dirty="0"/>
+          </a:p>
           <a:p>
             <a:pPr indent="0" marL="0">
               <a:lnSpc>
@@ -10486,13 +8398,13 @@
             <a:r>
               <a:rPr lang="en-US" sz="1200" dirty="0">
                 <a:solidFill>
-                  <a:srgbClr val="1E2A3B"/>
+                  <a:srgbClr val="667085"/>
                 </a:solidFill>
                 <a:latin typeface="Consolas" pitchFamily="34" charset="0"/>
                 <a:ea typeface="Consolas" pitchFamily="34" charset="-122"/>
                 <a:cs typeface="Consolas" pitchFamily="34" charset="-120"/>
               </a:rPr>
-              <a:t>try:</a:t>
+              <a:t>if especie == 'cao':</a:t>
             </a:r>
             <a:endParaRPr lang="en-US" sz="1200" dirty="0"/>
           </a:p>
@@ -10506,13 +8418,13 @@
             <a:r>
               <a:rPr lang="en-US" sz="1200" dirty="0">
                 <a:solidFill>
-                  <a:srgbClr val="1E2A3B"/>
+                  <a:srgbClr val="667085"/>
                 </a:solidFill>
                 <a:latin typeface="Consolas" pitchFamily="34" charset="0"/>
                 <a:ea typeface="Consolas" pitchFamily="34" charset="-122"/>
                 <a:cs typeface="Consolas" pitchFamily="34" charset="-120"/>
               </a:rPr>
-              <a:t>    adocao = controller.registrar(...)</a:t>
+              <a:t>    taxa = 80</a:t>
             </a:r>
             <a:endParaRPr lang="en-US" sz="1200" dirty="0"/>
           </a:p>
@@ -10526,13 +8438,13 @@
             <a:r>
               <a:rPr lang="en-US" sz="1200" dirty="0">
                 <a:solidFill>
-                  <a:srgbClr val="1E2A3B"/>
+                  <a:srgbClr val="667085"/>
                 </a:solidFill>
                 <a:latin typeface="Consolas" pitchFamily="34" charset="0"/>
                 <a:ea typeface="Consolas" pitchFamily="34" charset="-122"/>
                 <a:cs typeface="Consolas" pitchFamily="34" charset="-120"/>
               </a:rPr>
-              <a:t>except ConflitoError as erro:</a:t>
+              <a:t>else:</a:t>
             </a:r>
             <a:endParaRPr lang="en-US" sz="1200" dirty="0"/>
           </a:p>
@@ -10541,73 +8453,50 @@
               <a:lnSpc>
                 <a:spcPct val="125000"/>
               </a:lnSpc>
+              <a:spcAft>
+                <a:spcPts val="1400"/>
+              </a:spcAft>
               <a:buNone/>
             </a:pPr>
             <a:r>
               <a:rPr lang="en-US" sz="1200" dirty="0">
                 <a:solidFill>
-                  <a:srgbClr val="1E2A3B"/>
+                  <a:srgbClr val="667085"/>
                 </a:solidFill>
                 <a:latin typeface="Consolas" pitchFamily="34" charset="0"/>
                 <a:ea typeface="Consolas" pitchFamily="34" charset="-122"/>
                 <a:cs typeface="Consolas" pitchFamily="34" charset="-120"/>
               </a:rPr>
-              <a:t>    raise HTTPException(409, str(erro))</a:t>
+              <a:t>    taxa = 50</a:t>
             </a:r>
             <a:endParaRPr lang="en-US" sz="1200" dirty="0"/>
           </a:p>
           <a:p>
             <a:pPr indent="0" marL="0">
-              <a:lnSpc>
-                <a:spcPct val="125000"/>
-              </a:lnSpc>
-              <a:buNone/>
-            </a:pPr>
-            <a:r>
-              <a:rPr lang="en-US" sz="1200" dirty="0">
+              <a:buNone/>
+            </a:pPr>
+            <a:r>
+              <a:rPr lang="en-US" sz="1600" dirty="0">
                 <a:solidFill>
                   <a:srgbClr val="1E2A3B"/>
                 </a:solidFill>
-                <a:latin typeface="Consolas" pitchFamily="34" charset="0"/>
-                <a:ea typeface="Consolas" pitchFamily="34" charset="-122"/>
-                <a:cs typeface="Consolas" pitchFamily="34" charset="-120"/>
-              </a:rPr>
-              <a:t>except ValueError as erro:</a:t>
+              </a:rPr>
+              <a:t>Para uma nova espécie, basta criar a classe em animal.py e incluir os dados no mock.</a:t>
             </a:r>
             <a:endParaRPr lang="en-US" sz="1200" dirty="0"/>
           </a:p>
-          <a:p>
-            <a:pPr indent="0" marL="0">
-              <a:lnSpc>
-                <a:spcPct val="125000"/>
-              </a:lnSpc>
-              <a:buNone/>
-            </a:pPr>
-            <a:r>
-              <a:rPr lang="en-US" sz="1200" dirty="0">
-                <a:solidFill>
-                  <a:srgbClr val="1E2A3B"/>
-                </a:solidFill>
-                <a:latin typeface="Consolas" pitchFamily="34" charset="0"/>
-                <a:ea typeface="Consolas" pitchFamily="34" charset="-122"/>
-                <a:cs typeface="Consolas" pitchFamily="34" charset="-120"/>
-              </a:rPr>
-              <a:t>    raise HTTPException(422, str(erro))</a:t>
-            </a:r>
-            <a:endParaRPr lang="en-US" sz="1200" dirty="0"/>
-          </a:p>
         </p:txBody>
       </p:sp>
       <p:sp>
         <p:nvSpPr>
-          <p:cNvPr id="10" name="anim|6|sobe|57"/>
+          <p:cNvPr id="7" name="anim|3|sobe|54"/>
           <p:cNvSpPr txBox="1"/>
           <p:nvPr/>
         </p:nvSpPr>
         <p:spPr>
           <a:xfrm>
-            <a:off x="7467600" y="4191000"/>
-            <a:ext cx="3911600" cy="1016000"/>
+            <a:off x="812800" y="4699000"/>
+            <a:ext cx="10566400" cy="571500"/>
           </a:xfrm>
           <a:prstGeom prst="rect">
             <a:avLst/>
@@ -10628,7 +8517,7 @@
                   <a:srgbClr val="4A5568"/>
                 </a:solidFill>
               </a:rPr>
-              <a:t>Como </a:t>
+              <a:t>O projeto não tem nenhum if comparando tipo ou nome de classe, e o </a:t>
             </a:r>
             <a:pPr indent="0" marL="0">
               <a:buNone/>
@@ -10639,7 +8528,7 @@
                   <a:srgbClr val="4A5568"/>
                 </a:solidFill>
               </a:rPr>
-              <a:t>ConflitoError</a:t>
+              <a:t>verificar.py</a:t>
             </a:r>
             <a:pPr indent="0" marL="0">
               <a:buNone/>
@@ -10650,29 +8539,7 @@
                   <a:srgbClr val="4A5568"/>
                 </a:solidFill>
               </a:rPr>
-              <a:t> herda de </a:t>
-            </a:r>
-            <a:pPr indent="0" marL="0">
-              <a:buNone/>
-            </a:pPr>
-            <a:r>
-              <a:rPr lang="en-US" sz="1600" b="1" dirty="0">
-                <a:solidFill>
-                  <a:srgbClr val="4A5568"/>
-                </a:solidFill>
-              </a:rPr>
-              <a:t>ValueError</a:t>
-            </a:r>
-            <a:pPr indent="0" marL="0">
-              <a:buNone/>
-            </a:pPr>
-            <a:r>
-              <a:rPr lang="en-US" sz="1600" dirty="0">
-                <a:solidFill>
-                  <a:srgbClr val="4A5568"/>
-                </a:solidFill>
-              </a:rPr>
-              <a:t>, o except dele precisa vir antes.</a:t>
+              <a:t> confere isso.</a:t>
             </a:r>
             <a:endParaRPr lang="en-US" sz="1600" dirty="0"/>
           </a:p>
@@ -10713,8 +8580,8 @@
         </p:nvSpPr>
         <p:spPr>
           <a:xfrm>
-            <a:off x="812800" y="762000"/>
-            <a:ext cx="10566400" cy="635000"/>
+            <a:off x="812800" y="2413000"/>
+            <a:ext cx="6604000" cy="952500"/>
           </a:xfrm>
           <a:prstGeom prst="rect">
             <a:avLst/>
@@ -10730,14 +8597,14 @@
               <a:buNone/>
             </a:pPr>
             <a:r>
-              <a:rPr lang="en-US" sz="3600" b="1" dirty="0">
+              <a:rPr lang="en-US" sz="6000" b="1" dirty="0">
                 <a:solidFill>
                   <a:srgbClr val="1E2A3B"/>
                 </a:solidFill>
               </a:rPr>
-              <a:t>Herança</a:t>
-            </a:r>
-            <a:endParaRPr lang="en-US" sz="3600" dirty="0"/>
+              <a:t>Obrigado</a:t>
+            </a:r>
+            <a:endParaRPr lang="en-US" sz="6000" dirty="0"/>
           </a:p>
         </p:txBody>
       </p:sp>
@@ -10770,10 +8637,10 @@
             <a:r>
               <a:rPr lang="en-US" sz="1200" dirty="0">
                 <a:solidFill>
-                  <a:srgbClr val="667085"/>
-                </a:solidFill>
-              </a:rPr>
-              <a:t>Herança · 09</a:t>
+                  <a:srgbClr val="5C4A12"/>
+                </a:solidFill>
+              </a:rPr>
+              <a:t>Encerramento · 09</a:t>
             </a:r>
             <a:endParaRPr lang="en-US" sz="1200" dirty="0"/>
           </a:p>
@@ -10781,314 +8648,14 @@
       </p:sp>
       <p:sp>
         <p:nvSpPr>
-          <p:cNvPr id="5" name="anim|1|sobe|58"/>
-          <p:cNvSpPr/>
+          <p:cNvPr id="5" name="anim|1|sobe|55"/>
+          <p:cNvSpPr txBox="1"/>
           <p:nvPr/>
         </p:nvSpPr>
         <p:spPr>
           <a:xfrm>
-            <a:off x="812800" y="1587500"/>
-            <a:ext cx="6731000" cy="3175000"/>
-          </a:xfrm>
-          <a:prstGeom prst="roundRect">
-            <a:avLst>
-              <a:gd name="adj" fmla="val 4032"/>
-            </a:avLst>
-          </a:prstGeom>
-          <a:solidFill>
-            <a:srgbClr val="F1E7D0"/>
-          </a:solidFill>
-          <a:ln/>
-        </p:spPr>
-        <p:txBody>
-          <a:bodyPr wrap="square" lIns="254000" tIns="330200" rIns="330200" bIns="254000" rtlCol="0" anchor="ctr"/>
-          <a:lstStyle/>
-          <a:p>
-            <a:pPr indent="0" marL="0">
-              <a:lnSpc>
-                <a:spcPct val="125000"/>
-              </a:lnSpc>
-              <a:buNone/>
-            </a:pPr>
-            <a:r>
-              <a:rPr lang="en-US" sz="1200" dirty="0">
-                <a:solidFill>
-                  <a:srgbClr val="1E2A3B"/>
-                </a:solidFill>
-                <a:latin typeface="Consolas" pitchFamily="34" charset="0"/>
-                <a:ea typeface="Consolas" pitchFamily="34" charset="-122"/>
-                <a:cs typeface="Consolas" pitchFamily="34" charset="-120"/>
-              </a:rPr>
-              <a:t>class Cao(Animal):</a:t>
-            </a:r>
-            <a:endParaRPr lang="en-US" sz="1200" dirty="0"/>
-          </a:p>
-          <a:p>
-            <a:pPr indent="0" marL="0">
-              <a:lnSpc>
-                <a:spcPct val="125000"/>
-              </a:lnSpc>
-              <a:buNone/>
-            </a:pPr>
-            <a:r>
-              <a:rPr lang="en-US" sz="1200" dirty="0">
-                <a:solidFill>
-                  <a:srgbClr val="1E2A3B"/>
-                </a:solidFill>
-                <a:latin typeface="Consolas" pitchFamily="34" charset="0"/>
-                <a:ea typeface="Consolas" pitchFamily="34" charset="-122"/>
-                <a:cs typeface="Consolas" pitchFamily="34" charset="-120"/>
-              </a:rPr>
-              <a:t>    ESPECIE = 'cao'</a:t>
-            </a:r>
-            <a:endParaRPr lang="en-US" sz="1200" dirty="0"/>
-          </a:p>
-          <a:p>
-            <a:pPr indent="0" marL="0">
-              <a:lnSpc>
-                <a:spcPct val="125000"/>
-              </a:lnSpc>
-              <a:buNone/>
-            </a:pPr>
-            <a:r>
-              <a:rPr lang="en-US" sz="1200" dirty="0">
-                <a:solidFill>
-                  <a:srgbClr val="1E2A3B"/>
-                </a:solidFill>
-                <a:latin typeface="Consolas" pitchFamily="34" charset="0"/>
-                <a:ea typeface="Consolas" pitchFamily="34" charset="-122"/>
-                <a:cs typeface="Consolas" pitchFamily="34" charset="-120"/>
-              </a:rPr>
-              <a:t>    TAXA_ADOCAO = 80.0</a:t>
-            </a:r>
-            <a:endParaRPr lang="en-US" sz="1200" dirty="0"/>
-          </a:p>
-          <a:p>
-            <a:pPr indent="0" marL="0">
-              <a:lnSpc>
-                <a:spcPct val="125000"/>
-              </a:lnSpc>
-              <a:buNone/>
-            </a:pPr>
-            <a:r>
-              <a:rPr lang="en-US" sz="1200" dirty="0">
-                <a:solidFill>
-                  <a:srgbClr val="1E2A3B"/>
-                </a:solidFill>
-                <a:latin typeface="Consolas" pitchFamily="34" charset="0"/>
-                <a:ea typeface="Consolas" pitchFamily="34" charset="-122"/>
-                <a:cs typeface="Consolas" pitchFamily="34" charset="-120"/>
-              </a:rPr>
-              <a:t> </a:t>
-            </a:r>
-            <a:endParaRPr lang="en-US" sz="1200" dirty="0"/>
-          </a:p>
-          <a:p>
-            <a:pPr indent="0" marL="0">
-              <a:lnSpc>
-                <a:spcPct val="125000"/>
-              </a:lnSpc>
-              <a:buNone/>
-            </a:pPr>
-            <a:r>
-              <a:rPr lang="en-US" sz="1200" dirty="0">
-                <a:solidFill>
-                  <a:srgbClr val="1E2A3B"/>
-                </a:solidFill>
-                <a:latin typeface="Consolas" pitchFamily="34" charset="0"/>
-                <a:ea typeface="Consolas" pitchFamily="34" charset="-122"/>
-                <a:cs typeface="Consolas" pitchFamily="34" charset="-120"/>
-              </a:rPr>
-              <a:t>    def verificar_adotante(self, adotante):</a:t>
-            </a:r>
-            <a:endParaRPr lang="en-US" sz="1200" dirty="0"/>
-          </a:p>
-          <a:p>
-            <a:pPr indent="0" marL="0">
-              <a:lnSpc>
-                <a:spcPct val="125000"/>
-              </a:lnSpc>
-              <a:buNone/>
-            </a:pPr>
-            <a:r>
-              <a:rPr lang="en-US" sz="1200" b="1" dirty="0">
-                <a:solidFill>
-                  <a:srgbClr val="1D5FD1"/>
-                </a:solidFill>
-                <a:latin typeface="Consolas" pitchFamily="34" charset="0"/>
-                <a:ea typeface="Consolas" pitchFamily="34" charset="-122"/>
-                <a:cs typeface="Consolas" pitchFamily="34" charset="-120"/>
-              </a:rPr>
-              <a:t>        super().verificar_adotante(adotante)</a:t>
-            </a:r>
-            <a:endParaRPr lang="en-US" sz="1200" dirty="0"/>
-          </a:p>
-          <a:p>
-            <a:pPr indent="0" marL="0">
-              <a:lnSpc>
-                <a:spcPct val="125000"/>
-              </a:lnSpc>
-              <a:buNone/>
-            </a:pPr>
-            <a:r>
-              <a:rPr lang="en-US" sz="1200" dirty="0">
-                <a:solidFill>
-                  <a:srgbClr val="1E2A3B"/>
-                </a:solidFill>
-                <a:latin typeface="Consolas" pitchFamily="34" charset="0"/>
-                <a:ea typeface="Consolas" pitchFamily="34" charset="-122"/>
-                <a:cs typeface="Consolas" pitchFamily="34" charset="-120"/>
-              </a:rPr>
-              <a:t>        if self._porte == 'grande' and not adotante.mostrar_quintal():</a:t>
-            </a:r>
-            <a:endParaRPr lang="en-US" sz="1200" dirty="0"/>
-          </a:p>
-          <a:p>
-            <a:pPr indent="0" marL="0">
-              <a:lnSpc>
-                <a:spcPct val="125000"/>
-              </a:lnSpc>
-              <a:buNone/>
-            </a:pPr>
-            <a:r>
-              <a:rPr lang="en-US" sz="1200" dirty="0">
-                <a:solidFill>
-                  <a:srgbClr val="1E2A3B"/>
-                </a:solidFill>
-                <a:latin typeface="Consolas" pitchFamily="34" charset="0"/>
-                <a:ea typeface="Consolas" pitchFamily="34" charset="-122"/>
-                <a:cs typeface="Consolas" pitchFamily="34" charset="-120"/>
-              </a:rPr>
-              <a:t>            raise ValueError('cão de porte grande exige ...')</a:t>
-            </a:r>
-            <a:endParaRPr lang="en-US" sz="1200" dirty="0"/>
-          </a:p>
-        </p:txBody>
-      </p:sp>
-      <p:sp>
-        <p:nvSpPr>
-          <p:cNvPr id="6" name="anim|2|sobe|59"/>
-          <p:cNvSpPr/>
-          <p:nvPr/>
-        </p:nvSpPr>
-        <p:spPr>
-          <a:xfrm>
-            <a:off x="7747000" y="1587500"/>
-            <a:ext cx="3632200" cy="1651000"/>
-          </a:xfrm>
-          <a:prstGeom prst="roundRect">
-            <a:avLst>
-              <a:gd name="adj" fmla="val 7754"/>
-            </a:avLst>
-          </a:prstGeom>
-          <a:solidFill>
-            <a:srgbClr val="DCE8F7"/>
-          </a:solidFill>
-          <a:ln/>
-        </p:spPr>
-        <p:txBody>
-          <a:bodyPr wrap="square" lIns="254000" tIns="254000" rIns="254000" bIns="254000" rtlCol="0" anchor="t"/>
-          <a:lstStyle/>
-          <a:p>
-            <a:pPr indent="0" marL="0">
-              <a:spcAft>
-                <a:spcPts val="800"/>
-              </a:spcAft>
-              <a:buNone/>
-            </a:pPr>
-            <a:r>
-              <a:rPr lang="en-US" sz="1200" b="1" spc="200" kern="0" dirty="0">
-                <a:solidFill>
-                  <a:srgbClr val="1D5FD1"/>
-                </a:solidFill>
-              </a:rPr>
-              <a:t>SUPER()</a:t>
-            </a:r>
-            <a:endParaRPr lang="en-US" sz="1200" dirty="0"/>
-          </a:p>
-          <a:p>
-            <a:pPr indent="0" marL="0">
-              <a:buNone/>
-            </a:pPr>
-            <a:r>
-              <a:rPr lang="en-US" sz="1600" dirty="0">
-                <a:solidFill>
-                  <a:srgbClr val="1E2A3B"/>
-                </a:solidFill>
-              </a:rPr>
-              <a:t>Executa a verificação da classe Animal: se o animal está disponível e se o adotante ainda pode adotar.</a:t>
-            </a:r>
-            <a:endParaRPr lang="en-US" sz="1200" dirty="0"/>
-          </a:p>
-        </p:txBody>
-      </p:sp>
-      <p:sp>
-        <p:nvSpPr>
-          <p:cNvPr id="7" name="anim|3|sobe|60"/>
-          <p:cNvSpPr/>
-          <p:nvPr/>
-        </p:nvSpPr>
-        <p:spPr>
-          <a:xfrm>
-            <a:off x="7747000" y="3429000"/>
-            <a:ext cx="3632200" cy="1333500"/>
-          </a:xfrm>
-          <a:prstGeom prst="roundRect">
-            <a:avLst>
-              <a:gd name="adj" fmla="val 9600"/>
-            </a:avLst>
-          </a:prstGeom>
-          <a:solidFill>
-            <a:srgbClr val="FDE7B0"/>
-          </a:solidFill>
-          <a:ln/>
-        </p:spPr>
-        <p:txBody>
-          <a:bodyPr wrap="square" lIns="254000" tIns="254000" rIns="254000" bIns="254000" rtlCol="0" anchor="t"/>
-          <a:lstStyle/>
-          <a:p>
-            <a:pPr indent="0" marL="0">
-              <a:spcAft>
-                <a:spcPts val="800"/>
-              </a:spcAft>
-              <a:buNone/>
-            </a:pPr>
-            <a:r>
-              <a:rPr lang="en-US" sz="1200" b="1" spc="200" kern="0" dirty="0">
-                <a:solidFill>
-                  <a:srgbClr val="8A3B06"/>
-                </a:solidFill>
-              </a:rPr>
-              <a:t>SEM O SUPER()</a:t>
-            </a:r>
-            <a:endParaRPr lang="en-US" sz="1200" dirty="0"/>
-          </a:p>
-          <a:p>
-            <a:pPr indent="0" marL="0">
-              <a:buNone/>
-            </a:pPr>
-            <a:r>
-              <a:rPr lang="en-US" sz="1600" dirty="0">
-                <a:solidFill>
-                  <a:srgbClr val="1E2A3B"/>
-                </a:solidFill>
-              </a:rPr>
-              <a:t>Essas verificações não valeriam para cães.</a:t>
-            </a:r>
-            <a:endParaRPr lang="en-US" sz="1200" dirty="0"/>
-          </a:p>
-        </p:txBody>
-      </p:sp>
-      <p:sp>
-        <p:nvSpPr>
-          <p:cNvPr id="8" name="anim|4|sobe|61"/>
-          <p:cNvSpPr txBox="1"/>
-          <p:nvPr/>
-        </p:nvSpPr>
-        <p:spPr>
-          <a:xfrm>
-            <a:off x="812800" y="5016500"/>
-            <a:ext cx="10566400" cy="571500"/>
+            <a:off x="812800" y="3429000"/>
+            <a:ext cx="6604000" cy="635000"/>
           </a:xfrm>
           <a:prstGeom prst="rect">
             <a:avLst/>
@@ -11104,61 +8671,41 @@
               <a:buNone/>
             </a:pPr>
             <a:r>
-              <a:rPr lang="en-US" sz="1600" dirty="0">
-                <a:solidFill>
-                  <a:srgbClr val="4A5568"/>
-                </a:solidFill>
-              </a:rPr>
-              <a:t>A </a:t>
-            </a:r>
-            <a:pPr indent="0" marL="0">
-              <a:buNone/>
-            </a:pPr>
-            <a:r>
-              <a:rPr lang="en-US" sz="1600" b="1" dirty="0">
-                <a:solidFill>
-                  <a:srgbClr val="4A5568"/>
-                </a:solidFill>
-              </a:rPr>
-              <a:t>descricao()</a:t>
-            </a:r>
-            <a:pPr indent="0" marL="0">
-              <a:buNone/>
-            </a:pPr>
-            <a:r>
-              <a:rPr lang="en-US" sz="1600" dirty="0">
-                <a:solidFill>
-                  <a:srgbClr val="4A5568"/>
-                </a:solidFill>
-              </a:rPr>
-              <a:t> também usa </a:t>
-            </a:r>
-            <a:pPr indent="0" marL="0">
-              <a:buNone/>
-            </a:pPr>
-            <a:r>
-              <a:rPr lang="en-US" sz="1600" b="1" dirty="0">
-                <a:solidFill>
-                  <a:srgbClr val="4A5568"/>
-                </a:solidFill>
-              </a:rPr>
-              <a:t>super()</a:t>
-            </a:r>
-            <a:pPr indent="0" marL="0">
-              <a:buNone/>
-            </a:pPr>
-            <a:r>
-              <a:rPr lang="en-US" sz="1600" dirty="0">
-                <a:solidFill>
-                  <a:srgbClr val="4A5568"/>
-                </a:solidFill>
-              </a:rPr>
-              <a:t>: pega o texto da classe Animal e acrescenta a parte da espécie.</a:t>
-            </a:r>
-            <a:endParaRPr lang="en-US" sz="1600" dirty="0"/>
+              <a:rPr lang="en-US" sz="3600" b="1" dirty="0">
+                <a:solidFill>
+                  <a:srgbClr val="1E2A3B"/>
+                </a:solidFill>
+              </a:rPr>
+              <a:t>Perguntas?</a:t>
+            </a:r>
+            <a:endParaRPr lang="en-US" sz="3600" dirty="0"/>
           </a:p>
         </p:txBody>
       </p:sp>
+      <p:pic>
+        <p:nvPicPr>
+          <p:cNvPr id="6" name="anim|2|zoom|56" descr="Rover, o cachorro amarelo, lendo um livro vermelho">    </p:cNvPr>
+          <p:cNvPicPr>
+            <a:picLocks noChangeAspect="1"/>
+          </p:cNvPicPr>
+          <p:nvPr/>
+        </p:nvPicPr>
+        <p:blipFill>
+          <a:blip r:embed="rId1"/>
+          <a:stretch>
+            <a:fillRect/>
+          </a:stretch>
+        </p:blipFill>
+        <p:spPr>
+          <a:xfrm>
+            <a:off x="7937500" y="1574800"/>
+            <a:ext cx="3048000" cy="3327400"/>
+          </a:xfrm>
+          <a:prstGeom prst="rect">
+            <a:avLst/>
+          </a:prstGeom>
+        </p:spPr>
+      </p:pic>
     </p:spTree>
   </p:cSld>
   <p:clrMapOvr>
